--- a/presentation/output/AETHERIX_Presentation_Compact.pptx
+++ b/presentation/output/AETHERIX_Presentation_Compact.pptx
@@ -1372,7 +1372,7 @@
           <a:lstStyle/>
           <a:p>
             <a:r>
-              <a:t>Hit these numbers with confidence. 10-100x faster. &gt;95% availability vs 60-75%. Quantum-secure. (1 minute)</a:t>
+              <a:t>Be honest. Simulated: 241-node topology, RL routing, QKD security, 200x radiation reduction. Targets: 10-100x data rate, &gt;95% availability. (1 minute)</a:t>
             </a:r>
           </a:p>
         </p:txBody>
@@ -1512,7 +1512,7 @@
           <a:lstStyle/>
           <a:p>
             <a:r>
-              <a:t>This is real, working code. 27 Python modules, 480 tests, 12 interactive demos. All the physics is real. (1.5 minutes)</a:t>
+              <a:t>This is real, working code. 25 Python modules, 480 tests, 12 interactive demos. All the physics is real. (1.5 minutes)</a:t>
             </a:r>
           </a:p>
         </p:txBody>
@@ -1722,7 +1722,7 @@
           <a:lstStyle/>
           <a:p>
             <a:r>
-              <a:t>Summarize the four key numbers: 10-100x faster, &gt;95% availability, AI-powered routing, quantum-secure. Invite questions. (30 seconds)</a:t>
+              <a:t>Summarize: simulated achievements are 241-node topology, RL routing, QKD security, 200x radiation reduction. Design targets are 10-100x data rate and &gt;95% availability. Invite questions. (30 seconds)</a:t>
             </a:r>
           </a:p>
         </p:txBody>
@@ -5999,7 +5999,7 @@
               </a:defRPr>
             </a:pPr>
             <a:r>
-              <a:t>10–100x Faster Than RF</a:t>
+              <a:t>10–100x Capability Over RF</a:t>
             </a:r>
           </a:p>
         </p:txBody>
@@ -14993,7 +14993,7 @@
                         </a:defRPr>
                       </a:pPr>
                       <a:r>
-                        <a:t>50-70% via L4/L5</a:t>
+                        <a:t>L4/L5 relay (target)</a:t>
                       </a:r>
                     </a:p>
                   </a:txBody>
@@ -15017,7 +15017,7 @@
                         </a:defRPr>
                       </a:pPr>
                       <a:r>
-                        <a:t>+50-70% [A8]</a:t>
+                        <a:t>+50-70% (target) [A8]</a:t>
                       </a:r>
                     </a:p>
                   </a:txBody>
@@ -15603,7 +15603,7 @@
               </a:defRPr>
             </a:pPr>
             <a:r>
-              <a:t>27</a:t>
+              <a:t>25</a:t>
             </a:r>
           </a:p>
           <a:p>
@@ -17491,7 +17491,7 @@
           </a:solidFill>
           <a:ln w="12700">
             <a:solidFill>
-              <a:srgbClr val="2ECC71"/>
+              <a:srgbClr val="009EFF"/>
             </a:solidFill>
           </a:ln>
           <a:effectLst/>
@@ -17517,7 +17517,7 @@
             <a:pPr algn="ctr">
               <a:defRPr sz="2400" b="1">
                 <a:solidFill>
-                  <a:srgbClr val="2ECC71"/>
+                  <a:srgbClr val="009EFF"/>
                 </a:solidFill>
                 <a:latin typeface="Calibri"/>
               </a:defRPr>
@@ -17542,7 +17542,7 @@
               </a:defRPr>
             </a:pPr>
             <a:r>
-              <a:t>Data Rate [A4]</a:t>
+              <a:t>Target Speedup ♦</a:t>
             </a:r>
           </a:p>
         </p:txBody>
@@ -20086,7 +20086,7 @@
               </a:defRPr>
             </a:pPr>
             <a:r>
-              <a:t>Link utilisation</a:t>
+              <a:t>Link utilisation (target)</a:t>
             </a:r>
           </a:p>
         </p:txBody>
@@ -25299,7 +25299,7 @@
           </a:solidFill>
           <a:ln w="12700">
             <a:solidFill>
-              <a:srgbClr val="2ECC71"/>
+              <a:srgbClr val="009EFF"/>
             </a:solidFill>
           </a:ln>
           <a:effectLst/>
@@ -25325,7 +25325,7 @@
             <a:pPr algn="ctr">
               <a:defRPr sz="2400" b="1">
                 <a:solidFill>
-                  <a:srgbClr val="2ECC71"/>
+                  <a:srgbClr val="009EFF"/>
                 </a:solidFill>
                 <a:latin typeface="Calibri"/>
               </a:defRPr>
@@ -25350,7 +25350,7 @@
               </a:defRPr>
             </a:pPr>
             <a:r>
-              <a:t>Data Rate [A4]</a:t>
+              <a:t>Target Speedup ♦</a:t>
             </a:r>
           </a:p>
         </p:txBody>

--- a/presentation/output/AETHERIX_Presentation_Compact.pptx
+++ b/presentation/output/AETHERIX_Presentation_Compact.pptx
@@ -36,6 +36,8 @@
     <p:sldId id="284" r:id="rId35"/>
     <p:sldId id="285" r:id="rId36"/>
     <p:sldId id="286" r:id="rId37"/>
+    <p:sldId id="287" r:id="rId38"/>
+    <p:sldId id="288" r:id="rId39"/>
   </p:sldIdLst>
   <p:sldSz cx="12191695" cy="6858000" type="screen4x3"/>
   <p:notesSz cx="6858000" cy="9144000"/>
@@ -5898,7 +5900,7 @@
               </a:defRPr>
             </a:pPr>
             <a:r>
-              <a:t>10 / 31</a:t>
+              <a:t>10 / 33</a:t>
             </a:r>
           </a:p>
         </p:txBody>
@@ -5915,6 +5917,247 @@
 </file>
 
 <file path=ppt/slides/slide11.xml><?xml version="1.0" encoding="utf-8"?>
+<p:sld xmlns:a="http://schemas.openxmlformats.org/drawingml/2006/main" xmlns:p="http://schemas.openxmlformats.org/presentationml/2006/main" xmlns:r="http://schemas.openxmlformats.org/officeDocument/2006/relationships">
+  <p:cSld>
+    <p:bg>
+      <p:bgPr>
+        <a:solidFill>
+          <a:srgbClr val="0B0E1A"/>
+        </a:solidFill>
+        <a:effectLst/>
+      </p:bgPr>
+    </p:bg>
+    <p:spTree>
+      <p:nvGrpSpPr>
+        <p:cNvPr id="1" name=""/>
+        <p:cNvGrpSpPr/>
+        <p:nvPr/>
+      </p:nvGrpSpPr>
+      <p:grpSpPr/>
+      <p:sp>
+        <p:nvSpPr>
+          <p:cNvPr id="2" name="TextBox 1"/>
+          <p:cNvSpPr txBox="1"/>
+          <p:nvPr/>
+        </p:nvSpPr>
+        <p:spPr>
+          <a:xfrm>
+            <a:off x="548640" y="274320"/>
+            <a:ext cx="8229600" cy="548640"/>
+          </a:xfrm>
+          <a:prstGeom prst="rect">
+            <a:avLst/>
+          </a:prstGeom>
+          <a:noFill/>
+        </p:spPr>
+        <p:txBody>
+          <a:bodyPr wrap="square">
+            <a:spAutoFit/>
+          </a:bodyPr>
+          <a:lstStyle/>
+          <a:p>
+            <a:pPr algn="l">
+              <a:defRPr sz="3200" b="1">
+                <a:solidFill>
+                  <a:srgbClr val="FFFFFF"/>
+                </a:solidFill>
+                <a:latin typeface="Calibri"/>
+              </a:defRPr>
+            </a:pPr>
+            <a:r>
+              <a:t>NETWORK TOPOLOGY GRAPH</a:t>
+            </a:r>
+          </a:p>
+        </p:txBody>
+      </p:sp>
+      <p:sp>
+        <p:nvSpPr>
+          <p:cNvPr id="3" name="Rectangle 2"/>
+          <p:cNvSpPr/>
+          <p:nvPr/>
+        </p:nvSpPr>
+        <p:spPr>
+          <a:xfrm>
+            <a:off x="548640" y="868680"/>
+            <a:ext cx="2286000" cy="38100"/>
+          </a:xfrm>
+          <a:prstGeom prst="rect">
+            <a:avLst/>
+          </a:prstGeom>
+          <a:solidFill>
+            <a:srgbClr val="009EFF"/>
+          </a:solidFill>
+          <a:ln>
+            <a:noFill/>
+          </a:ln>
+          <a:effectLst/>
+        </p:spPr>
+        <p:style>
+          <a:lnRef idx="1">
+            <a:schemeClr val="accent1"/>
+          </a:lnRef>
+          <a:fillRef idx="3">
+            <a:schemeClr val="accent1"/>
+          </a:fillRef>
+          <a:effectRef idx="2">
+            <a:schemeClr val="accent1"/>
+          </a:effectRef>
+          <a:fontRef idx="minor">
+            <a:schemeClr val="lt1"/>
+          </a:fontRef>
+        </p:style>
+        <p:txBody>
+          <a:bodyPr rtlCol="0" anchor="ctr"/>
+          <a:lstStyle/>
+          <a:p>
+            <a:pPr algn="ctr"/>
+          </a:p>
+        </p:txBody>
+      </p:sp>
+      <p:pic>
+        <p:nvPicPr>
+          <p:cNvPr id="4" name="Picture 3" descr="network_topology.png"/>
+          <p:cNvPicPr>
+            <a:picLocks noChangeAspect="1"/>
+          </p:cNvPicPr>
+          <p:nvPr/>
+        </p:nvPicPr>
+        <p:blipFill>
+          <a:blip r:embed="rId2"/>
+          <a:stretch>
+            <a:fillRect/>
+          </a:stretch>
+        </p:blipFill>
+        <p:spPr>
+          <a:xfrm>
+            <a:off x="457200" y="1097280"/>
+            <a:ext cx="8229600" cy="4846320"/>
+          </a:xfrm>
+          <a:prstGeom prst="rect">
+            <a:avLst/>
+          </a:prstGeom>
+        </p:spPr>
+      </p:pic>
+      <p:sp>
+        <p:nvSpPr>
+          <p:cNvPr id="5" name="TextBox 4"/>
+          <p:cNvSpPr txBox="1"/>
+          <p:nvPr/>
+        </p:nvSpPr>
+        <p:spPr>
+          <a:xfrm>
+            <a:off x="457200" y="6601968"/>
+            <a:ext cx="11430000" cy="228600"/>
+          </a:xfrm>
+          <a:prstGeom prst="rect">
+            <a:avLst/>
+          </a:prstGeom>
+          <a:noFill/>
+        </p:spPr>
+        <p:txBody>
+          <a:bodyPr wrap="square">
+            <a:spAutoFit/>
+          </a:bodyPr>
+          <a:lstStyle/>
+          <a:p>
+            <a:pPr algn="l">
+              <a:defRPr sz="800" b="0">
+                <a:solidFill>
+                  <a:srgbClr val="6B7B96"/>
+                </a:solidFill>
+                <a:latin typeface="Calibri"/>
+              </a:defRPr>
+            </a:pPr>
+            <a:r>
+              <a:t>[A2] topology.py (241-node graph)  ·  [A1] rl_agent.py (RL routing)</a:t>
+            </a:r>
+          </a:p>
+        </p:txBody>
+      </p:sp>
+      <p:sp>
+        <p:nvSpPr>
+          <p:cNvPr id="6" name="TextBox 5"/>
+          <p:cNvSpPr txBox="1"/>
+          <p:nvPr/>
+        </p:nvSpPr>
+        <p:spPr>
+          <a:xfrm>
+            <a:off x="457200" y="6400800"/>
+            <a:ext cx="4572000" cy="365760"/>
+          </a:xfrm>
+          <a:prstGeom prst="rect">
+            <a:avLst/>
+          </a:prstGeom>
+          <a:noFill/>
+        </p:spPr>
+        <p:txBody>
+          <a:bodyPr wrap="square">
+            <a:spAutoFit/>
+          </a:bodyPr>
+          <a:lstStyle/>
+          <a:p>
+            <a:pPr algn="l">
+              <a:defRPr sz="1000" b="0">
+                <a:solidFill>
+                  <a:srgbClr val="6B7B96"/>
+                </a:solidFill>
+                <a:latin typeface="Calibri"/>
+              </a:defRPr>
+            </a:pPr>
+            <a:r>
+              <a:t>AETHERIX — Interplanetary Communication Network</a:t>
+            </a:r>
+          </a:p>
+        </p:txBody>
+      </p:sp>
+      <p:sp>
+        <p:nvSpPr>
+          <p:cNvPr id="7" name="TextBox 6"/>
+          <p:cNvSpPr txBox="1"/>
+          <p:nvPr/>
+        </p:nvSpPr>
+        <p:spPr>
+          <a:xfrm>
+            <a:off x="10058400" y="6400800"/>
+            <a:ext cx="1828800" cy="365760"/>
+          </a:xfrm>
+          <a:prstGeom prst="rect">
+            <a:avLst/>
+          </a:prstGeom>
+          <a:noFill/>
+        </p:spPr>
+        <p:txBody>
+          <a:bodyPr wrap="square">
+            <a:spAutoFit/>
+          </a:bodyPr>
+          <a:lstStyle/>
+          <a:p>
+            <a:pPr algn="r">
+              <a:defRPr sz="1000" b="0">
+                <a:solidFill>
+                  <a:srgbClr val="6B7B96"/>
+                </a:solidFill>
+                <a:latin typeface="Calibri"/>
+              </a:defRPr>
+            </a:pPr>
+            <a:r>
+              <a:t>11 / 33</a:t>
+            </a:r>
+          </a:p>
+        </p:txBody>
+      </p:sp>
+    </p:spTree>
+  </p:cSld>
+  <p:transition spd="med" advClick="1">
+    <p:fade/>
+  </p:transition>
+  <p:clrMapOvr>
+    <a:masterClrMapping/>
+  </p:clrMapOvr>
+</p:sld>
+</file>
+
+<file path=ppt/slides/slide12.xml><?xml version="1.0" encoding="utf-8"?>
 <p:sld xmlns:a="http://schemas.openxmlformats.org/drawingml/2006/main" xmlns:p="http://schemas.openxmlformats.org/presentationml/2006/main" xmlns:r="http://schemas.openxmlformats.org/officeDocument/2006/relationships">
   <p:cSld>
     <p:bg>
@@ -6765,7 +7008,7 @@
               </a:defRPr>
             </a:pPr>
             <a:r>
-              <a:t>11 / 31</a:t>
+              <a:t>12 / 33</a:t>
             </a:r>
           </a:p>
         </p:txBody>
@@ -6781,7 +7024,7 @@
 </p:sld>
 </file>
 
-<file path=ppt/slides/slide12.xml><?xml version="1.0" encoding="utf-8"?>
+<file path=ppt/slides/slide13.xml><?xml version="1.0" encoding="utf-8"?>
 <p:sld xmlns:a="http://schemas.openxmlformats.org/drawingml/2006/main" xmlns:p="http://schemas.openxmlformats.org/presentationml/2006/main" xmlns:r="http://schemas.openxmlformats.org/officeDocument/2006/relationships">
   <p:cSld>
     <p:bg>
@@ -7078,7 +7321,7 @@
               </a:defRPr>
             </a:pPr>
             <a:r>
-              <a:t>12 / 31</a:t>
+              <a:t>13 / 33</a:t>
             </a:r>
           </a:p>
         </p:txBody>
@@ -7094,7 +7337,7 @@
 </p:sld>
 </file>
 
-<file path=ppt/slides/slide13.xml><?xml version="1.0" encoding="utf-8"?>
+<file path=ppt/slides/slide14.xml><?xml version="1.0" encoding="utf-8"?>
 <p:sld xmlns:a="http://schemas.openxmlformats.org/drawingml/2006/main" xmlns:p="http://schemas.openxmlformats.org/presentationml/2006/main" xmlns:r="http://schemas.openxmlformats.org/officeDocument/2006/relationships">
   <p:cSld>
     <p:bg>
@@ -8176,7 +8419,7 @@
               </a:defRPr>
             </a:pPr>
             <a:r>
-              <a:t>13 / 31</a:t>
+              <a:t>14 / 33</a:t>
             </a:r>
           </a:p>
         </p:txBody>
@@ -8185,786 +8428,6 @@
   </p:cSld>
   <p:transition spd="med" advClick="1">
     <p:push dir="l"/>
-  </p:transition>
-  <p:clrMapOvr>
-    <a:masterClrMapping/>
-  </p:clrMapOvr>
-</p:sld>
-</file>
-
-<file path=ppt/slides/slide14.xml><?xml version="1.0" encoding="utf-8"?>
-<p:sld xmlns:a="http://schemas.openxmlformats.org/drawingml/2006/main" xmlns:p="http://schemas.openxmlformats.org/presentationml/2006/main" xmlns:r="http://schemas.openxmlformats.org/officeDocument/2006/relationships">
-  <p:cSld>
-    <p:bg>
-      <p:bgPr>
-        <a:solidFill>
-          <a:srgbClr val="0B0E1A"/>
-        </a:solidFill>
-        <a:effectLst/>
-      </p:bgPr>
-    </p:bg>
-    <p:spTree>
-      <p:nvGrpSpPr>
-        <p:cNvPr id="1" name=""/>
-        <p:cNvGrpSpPr/>
-        <p:nvPr/>
-      </p:nvGrpSpPr>
-      <p:grpSpPr/>
-      <p:sp>
-        <p:nvSpPr>
-          <p:cNvPr id="2" name="TextBox 1"/>
-          <p:cNvSpPr txBox="1"/>
-          <p:nvPr/>
-        </p:nvSpPr>
-        <p:spPr>
-          <a:xfrm>
-            <a:off x="548640" y="274320"/>
-            <a:ext cx="8229600" cy="548640"/>
-          </a:xfrm>
-          <a:prstGeom prst="rect">
-            <a:avLst/>
-          </a:prstGeom>
-          <a:noFill/>
-        </p:spPr>
-        <p:txBody>
-          <a:bodyPr wrap="square">
-            <a:spAutoFit/>
-          </a:bodyPr>
-          <a:lstStyle/>
-          <a:p>
-            <a:pPr algn="l">
-              <a:defRPr sz="3200" b="1">
-                <a:solidFill>
-                  <a:srgbClr val="FFFFFF"/>
-                </a:solidFill>
-                <a:latin typeface="Calibri"/>
-              </a:defRPr>
-            </a:pPr>
-            <a:r>
-              <a:t>RL-BASED ROUTING</a:t>
-            </a:r>
-          </a:p>
-        </p:txBody>
-      </p:sp>
-      <p:sp>
-        <p:nvSpPr>
-          <p:cNvPr id="3" name="TextBox 2"/>
-          <p:cNvSpPr txBox="1"/>
-          <p:nvPr/>
-        </p:nvSpPr>
-        <p:spPr>
-          <a:xfrm>
-            <a:off x="548640" y="822960"/>
-            <a:ext cx="8229600" cy="365760"/>
-          </a:xfrm>
-          <a:prstGeom prst="rect">
-            <a:avLst/>
-          </a:prstGeom>
-          <a:noFill/>
-        </p:spPr>
-        <p:txBody>
-          <a:bodyPr wrap="square">
-            <a:spAutoFit/>
-          </a:bodyPr>
-          <a:lstStyle/>
-          <a:p>
-            <a:pPr algn="l">
-              <a:defRPr sz="1600" b="0">
-                <a:solidFill>
-                  <a:srgbClr val="00D4AA"/>
-                </a:solidFill>
-                <a:latin typeface="Calibri"/>
-              </a:defRPr>
-            </a:pPr>
-            <a:r>
-              <a:t>AI Innovation</a:t>
-            </a:r>
-          </a:p>
-        </p:txBody>
-      </p:sp>
-      <p:sp>
-        <p:nvSpPr>
-          <p:cNvPr id="4" name="Rectangle 3"/>
-          <p:cNvSpPr/>
-          <p:nvPr/>
-        </p:nvSpPr>
-        <p:spPr>
-          <a:xfrm>
-            <a:off x="548640" y="1234440"/>
-            <a:ext cx="2286000" cy="38100"/>
-          </a:xfrm>
-          <a:prstGeom prst="rect">
-            <a:avLst/>
-          </a:prstGeom>
-          <a:solidFill>
-            <a:srgbClr val="009EFF"/>
-          </a:solidFill>
-          <a:ln>
-            <a:noFill/>
-          </a:ln>
-          <a:effectLst/>
-        </p:spPr>
-        <p:style>
-          <a:lnRef idx="1">
-            <a:schemeClr val="accent1"/>
-          </a:lnRef>
-          <a:fillRef idx="3">
-            <a:schemeClr val="accent1"/>
-          </a:fillRef>
-          <a:effectRef idx="2">
-            <a:schemeClr val="accent1"/>
-          </a:effectRef>
-          <a:fontRef idx="minor">
-            <a:schemeClr val="lt1"/>
-          </a:fontRef>
-        </p:style>
-        <p:txBody>
-          <a:bodyPr rtlCol="0" anchor="ctr"/>
-          <a:lstStyle/>
-          <a:p>
-            <a:pPr algn="ctr"/>
-          </a:p>
-        </p:txBody>
-      </p:sp>
-      <p:sp>
-        <p:nvSpPr>
-          <p:cNvPr id="5" name="Rounded Rectangle 4"/>
-          <p:cNvSpPr/>
-          <p:nvPr/>
-        </p:nvSpPr>
-        <p:spPr>
-          <a:xfrm>
-            <a:off x="274320" y="1417320"/>
-            <a:ext cx="4206240" cy="2286000"/>
-          </a:xfrm>
-          <a:prstGeom prst="roundRect">
-            <a:avLst/>
-          </a:prstGeom>
-          <a:solidFill>
-            <a:srgbClr val="141B2D"/>
-          </a:solidFill>
-          <a:ln w="12700">
-            <a:solidFill>
-              <a:srgbClr val="FF4D4D"/>
-            </a:solidFill>
-          </a:ln>
-          <a:effectLst/>
-        </p:spPr>
-        <p:style>
-          <a:lnRef idx="1">
-            <a:schemeClr val="accent1"/>
-          </a:lnRef>
-          <a:fillRef idx="3">
-            <a:schemeClr val="accent1"/>
-          </a:fillRef>
-          <a:effectRef idx="2">
-            <a:schemeClr val="accent1"/>
-          </a:effectRef>
-          <a:fontRef idx="minor">
-            <a:schemeClr val="lt1"/>
-          </a:fontRef>
-        </p:style>
-        <p:txBody>
-          <a:bodyPr rtlCol="0" anchor="ctr" wrap="square" lIns="137160" rIns="137160" tIns="91440" bIns="91440"/>
-          <a:lstStyle/>
-          <a:p>
-            <a:pPr algn="ctr">
-              <a:defRPr sz="1600" b="1">
-                <a:solidFill>
-                  <a:srgbClr val="009EFF"/>
-                </a:solidFill>
-                <a:latin typeface="Calibri"/>
-              </a:defRPr>
-            </a:pPr>
-            <a:r>
-              <a:t>Contact Graph Routing</a:t>
-            </a:r>
-          </a:p>
-          <a:p>
-            <a:pPr algn="l">
-              <a:spcBef>
-                <a:spcPts val="200"/>
-              </a:spcBef>
-              <a:spcAft>
-                <a:spcPts val="200"/>
-              </a:spcAft>
-              <a:defRPr sz="1300" b="0">
-                <a:solidFill>
-                  <a:srgbClr val="B0B8CC"/>
-                </a:solidFill>
-                <a:latin typeface="Calibri"/>
-              </a:defRPr>
-            </a:pPr>
-            <a:r>
-              <a:t>Pre-computed contact plans required</a:t>
-            </a:r>
-          </a:p>
-          <a:p>
-            <a:pPr algn="l">
-              <a:spcBef>
-                <a:spcPts val="200"/>
-              </a:spcBef>
-              <a:spcAft>
-                <a:spcPts val="200"/>
-              </a:spcAft>
-              <a:defRPr sz="1300" b="0">
-                <a:solidFill>
-                  <a:srgbClr val="B0B8CC"/>
-                </a:solidFill>
-                <a:latin typeface="Calibri"/>
-              </a:defRPr>
-            </a:pPr>
-            <a:r>
-              <a:t>Cannot adapt to unexpected link failures</a:t>
-            </a:r>
-          </a:p>
-          <a:p>
-            <a:pPr algn="l">
-              <a:spcBef>
-                <a:spcPts val="200"/>
-              </a:spcBef>
-              <a:spcAft>
-                <a:spcPts val="200"/>
-              </a:spcAft>
-              <a:defRPr sz="1300" b="0">
-                <a:solidFill>
-                  <a:srgbClr val="B0B8CC"/>
-                </a:solidFill>
-                <a:latin typeface="Calibri"/>
-              </a:defRPr>
-            </a:pPr>
-            <a:r>
-              <a:t>Computational cost grows O(n³) per route</a:t>
-            </a:r>
-          </a:p>
-          <a:p>
-            <a:pPr algn="l">
-              <a:spcBef>
-                <a:spcPts val="200"/>
-              </a:spcBef>
-              <a:spcAft>
-                <a:spcPts val="200"/>
-              </a:spcAft>
-              <a:defRPr sz="1300" b="0">
-                <a:solidFill>
-                  <a:srgbClr val="B0B8CC"/>
-                </a:solidFill>
-                <a:latin typeface="Calibri"/>
-              </a:defRPr>
-            </a:pPr>
-            <a:r>
-              <a:t>No learning from historical performance</a:t>
-            </a:r>
-          </a:p>
-          <a:p>
-            <a:pPr algn="l">
-              <a:spcBef>
-                <a:spcPts val="200"/>
-              </a:spcBef>
-              <a:spcAft>
-                <a:spcPts val="200"/>
-              </a:spcAft>
-              <a:defRPr sz="1300" b="0">
-                <a:solidFill>
-                  <a:srgbClr val="B0B8CC"/>
-                </a:solidFill>
-                <a:latin typeface="Calibri"/>
-              </a:defRPr>
-            </a:pPr>
-            <a:r>
-              <a:t>Single-path — ignores multipath opportunity</a:t>
-            </a:r>
-          </a:p>
-        </p:txBody>
-      </p:sp>
-      <p:sp>
-        <p:nvSpPr>
-          <p:cNvPr id="6" name="Rounded Rectangle 5"/>
-          <p:cNvSpPr/>
-          <p:nvPr/>
-        </p:nvSpPr>
-        <p:spPr>
-          <a:xfrm>
-            <a:off x="4663440" y="1417320"/>
-            <a:ext cx="4206240" cy="2286000"/>
-          </a:xfrm>
-          <a:prstGeom prst="roundRect">
-            <a:avLst/>
-          </a:prstGeom>
-          <a:solidFill>
-            <a:srgbClr val="141B2D"/>
-          </a:solidFill>
-          <a:ln w="12700">
-            <a:solidFill>
-              <a:srgbClr val="00D4AA"/>
-            </a:solidFill>
-          </a:ln>
-          <a:effectLst/>
-        </p:spPr>
-        <p:style>
-          <a:lnRef idx="1">
-            <a:schemeClr val="accent1"/>
-          </a:lnRef>
-          <a:fillRef idx="3">
-            <a:schemeClr val="accent1"/>
-          </a:fillRef>
-          <a:effectRef idx="2">
-            <a:schemeClr val="accent1"/>
-          </a:effectRef>
-          <a:fontRef idx="minor">
-            <a:schemeClr val="lt1"/>
-          </a:fontRef>
-        </p:style>
-        <p:txBody>
-          <a:bodyPr rtlCol="0" anchor="ctr" wrap="square" lIns="137160" rIns="137160" tIns="91440" bIns="91440"/>
-          <a:lstStyle/>
-          <a:p>
-            <a:pPr algn="ctr">
-              <a:defRPr sz="1600" b="1">
-                <a:solidFill>
-                  <a:srgbClr val="009EFF"/>
-                </a:solidFill>
-                <a:latin typeface="Calibri"/>
-              </a:defRPr>
-            </a:pPr>
-            <a:r>
-              <a:t>RL Agent</a:t>
-            </a:r>
-          </a:p>
-          <a:p>
-            <a:pPr algn="l">
-              <a:spcBef>
-                <a:spcPts val="200"/>
-              </a:spcBef>
-              <a:spcAft>
-                <a:spcPts val="200"/>
-              </a:spcAft>
-              <a:defRPr sz="1300" b="0">
-                <a:solidFill>
-                  <a:srgbClr val="B0B8CC"/>
-                </a:solidFill>
-                <a:latin typeface="Calibri"/>
-              </a:defRPr>
-            </a:pPr>
-            <a:r>
-              <a:t>State: (node, neighbors, link quality, buffer)</a:t>
-            </a:r>
-          </a:p>
-          <a:p>
-            <a:pPr algn="l">
-              <a:spcBef>
-                <a:spcPts val="200"/>
-              </a:spcBef>
-              <a:spcAft>
-                <a:spcPts val="200"/>
-              </a:spcAft>
-              <a:defRPr sz="1300" b="0">
-                <a:solidFill>
-                  <a:srgbClr val="B0B8CC"/>
-                </a:solidFill>
-                <a:latin typeface="Calibri"/>
-              </a:defRPr>
-            </a:pPr>
-            <a:r>
-              <a:t>Actions: forward | store | drop | split</a:t>
-            </a:r>
-          </a:p>
-          <a:p>
-            <a:pPr algn="l">
-              <a:spcBef>
-                <a:spcPts val="200"/>
-              </a:spcBef>
-              <a:spcAft>
-                <a:spcPts val="200"/>
-              </a:spcAft>
-              <a:defRPr sz="1300" b="0">
-                <a:solidFill>
-                  <a:srgbClr val="B0B8CC"/>
-                </a:solidFill>
-                <a:latin typeface="Calibri"/>
-              </a:defRPr>
-            </a:pPr>
-            <a:r>
-              <a:t>Reward: R = α(delivery) − β(delay) − γ(hops) − δ(drops) − ε(energy) [A1]</a:t>
-            </a:r>
-          </a:p>
-          <a:p>
-            <a:pPr algn="l">
-              <a:spcBef>
-                <a:spcPts val="200"/>
-              </a:spcBef>
-              <a:spcAft>
-                <a:spcPts val="200"/>
-              </a:spcAft>
-              <a:defRPr sz="1300" b="0">
-                <a:solidFill>
-                  <a:srgbClr val="B0B8CC"/>
-                </a:solidFill>
-                <a:latin typeface="Calibri"/>
-              </a:defRPr>
-            </a:pPr>
-            <a:r>
-              <a:t>ε-greedy exploration, decay 0.995 (α=1.0, δ=10.0) [A1]</a:t>
-            </a:r>
-          </a:p>
-          <a:p>
-            <a:pPr algn="l">
-              <a:spcBef>
-                <a:spcPts val="200"/>
-              </a:spcBef>
-              <a:spcAft>
-                <a:spcPts val="200"/>
-              </a:spcAft>
-              <a:defRPr sz="1300" b="0">
-                <a:solidFill>
-                  <a:srgbClr val="B0B8CC"/>
-                </a:solidFill>
-                <a:latin typeface="Calibri"/>
-              </a:defRPr>
-            </a:pPr>
-            <a:r>
-              <a:t>Q-table + federated aggregation across nodes</a:t>
-            </a:r>
-          </a:p>
-        </p:txBody>
-      </p:sp>
-      <p:sp>
-        <p:nvSpPr>
-          <p:cNvPr id="7" name="Rounded Rectangle 6"/>
-          <p:cNvSpPr/>
-          <p:nvPr/>
-        </p:nvSpPr>
-        <p:spPr>
-          <a:xfrm>
-            <a:off x="274320" y="3886200"/>
-            <a:ext cx="2834640" cy="1005840"/>
-          </a:xfrm>
-          <a:prstGeom prst="roundRect">
-            <a:avLst/>
-          </a:prstGeom>
-          <a:solidFill>
-            <a:srgbClr val="141B2D"/>
-          </a:solidFill>
-          <a:ln w="12700">
-            <a:solidFill>
-              <a:srgbClr val="2ECC71"/>
-            </a:solidFill>
-          </a:ln>
-          <a:effectLst/>
-        </p:spPr>
-        <p:style>
-          <a:lnRef idx="1">
-            <a:schemeClr val="accent1"/>
-          </a:lnRef>
-          <a:fillRef idx="3">
-            <a:schemeClr val="accent1"/>
-          </a:fillRef>
-          <a:effectRef idx="2">
-            <a:schemeClr val="accent1"/>
-          </a:effectRef>
-          <a:fontRef idx="minor">
-            <a:schemeClr val="lt1"/>
-          </a:fontRef>
-        </p:style>
-        <p:txBody>
-          <a:bodyPr rtlCol="0" anchor="ctr" wrap="square"/>
-          <a:lstStyle/>
-          <a:p>
-            <a:pPr algn="ctr">
-              <a:defRPr sz="2400" b="1">
-                <a:solidFill>
-                  <a:srgbClr val="2ECC71"/>
-                </a:solidFill>
-                <a:latin typeface="Calibri"/>
-              </a:defRPr>
-            </a:pPr>
-            <a:r>
-              <a:t>713/800</a:t>
-            </a:r>
-          </a:p>
-          <a:p>
-            <a:pPr algn="ctr">
-              <a:spcBef>
-                <a:spcPts val="200"/>
-              </a:spcBef>
-              <a:spcAft>
-                <a:spcPts val="400"/>
-              </a:spcAft>
-              <a:defRPr sz="1000" b="0">
-                <a:solidFill>
-                  <a:srgbClr val="B0B8CC"/>
-                </a:solidFill>
-                <a:latin typeface="Calibri"/>
-              </a:defRPr>
-            </a:pPr>
-            <a:r>
-              <a:t>Forward decisions [A3]</a:t>
-            </a:r>
-          </a:p>
-        </p:txBody>
-      </p:sp>
-      <p:sp>
-        <p:nvSpPr>
-          <p:cNvPr id="8" name="Rounded Rectangle 7"/>
-          <p:cNvSpPr/>
-          <p:nvPr/>
-        </p:nvSpPr>
-        <p:spPr>
-          <a:xfrm>
-            <a:off x="3246120" y="3886200"/>
-            <a:ext cx="2834640" cy="1005840"/>
-          </a:xfrm>
-          <a:prstGeom prst="roundRect">
-            <a:avLst/>
-          </a:prstGeom>
-          <a:solidFill>
-            <a:srgbClr val="141B2D"/>
-          </a:solidFill>
-          <a:ln w="12700">
-            <a:solidFill>
-              <a:srgbClr val="009EFF"/>
-            </a:solidFill>
-          </a:ln>
-          <a:effectLst/>
-        </p:spPr>
-        <p:style>
-          <a:lnRef idx="1">
-            <a:schemeClr val="accent1"/>
-          </a:lnRef>
-          <a:fillRef idx="3">
-            <a:schemeClr val="accent1"/>
-          </a:fillRef>
-          <a:effectRef idx="2">
-            <a:schemeClr val="accent1"/>
-          </a:effectRef>
-          <a:fontRef idx="minor">
-            <a:schemeClr val="lt1"/>
-          </a:fontRef>
-        </p:style>
-        <p:txBody>
-          <a:bodyPr rtlCol="0" anchor="ctr" wrap="square"/>
-          <a:lstStyle/>
-          <a:p>
-            <a:pPr algn="ctr">
-              <a:defRPr sz="2400" b="1">
-                <a:solidFill>
-                  <a:srgbClr val="009EFF"/>
-                </a:solidFill>
-                <a:latin typeface="Calibri"/>
-              </a:defRPr>
-            </a:pPr>
-            <a:r>
-              <a:t>seconds</a:t>
-            </a:r>
-          </a:p>
-          <a:p>
-            <a:pPr algn="ctr">
-              <a:spcBef>
-                <a:spcPts val="200"/>
-              </a:spcBef>
-              <a:spcAft>
-                <a:spcPts val="400"/>
-              </a:spcAft>
-              <a:defRPr sz="1000" b="0">
-                <a:solidFill>
-                  <a:srgbClr val="B0B8CC"/>
-                </a:solidFill>
-                <a:latin typeface="Calibri"/>
-              </a:defRPr>
-            </a:pPr>
-            <a:r>
-              <a:t>Recovery vs hours [A1]</a:t>
-            </a:r>
-          </a:p>
-        </p:txBody>
-      </p:sp>
-      <p:sp>
-        <p:nvSpPr>
-          <p:cNvPr id="9" name="Rounded Rectangle 8"/>
-          <p:cNvSpPr/>
-          <p:nvPr/>
-        </p:nvSpPr>
-        <p:spPr>
-          <a:xfrm>
-            <a:off x="6217920" y="3886200"/>
-            <a:ext cx="2834640" cy="1005840"/>
-          </a:xfrm>
-          <a:prstGeom prst="roundRect">
-            <a:avLst/>
-          </a:prstGeom>
-          <a:solidFill>
-            <a:srgbClr val="141B2D"/>
-          </a:solidFill>
-          <a:ln w="12700">
-            <a:solidFill>
-              <a:srgbClr val="8B5CF6"/>
-            </a:solidFill>
-          </a:ln>
-          <a:effectLst/>
-        </p:spPr>
-        <p:style>
-          <a:lnRef idx="1">
-            <a:schemeClr val="accent1"/>
-          </a:lnRef>
-          <a:fillRef idx="3">
-            <a:schemeClr val="accent1"/>
-          </a:fillRef>
-          <a:effectRef idx="2">
-            <a:schemeClr val="accent1"/>
-          </a:effectRef>
-          <a:fontRef idx="minor">
-            <a:schemeClr val="lt1"/>
-          </a:fontRef>
-        </p:style>
-        <p:txBody>
-          <a:bodyPr rtlCol="0" anchor="ctr" wrap="square"/>
-          <a:lstStyle/>
-          <a:p>
-            <a:pPr algn="ctr">
-              <a:defRPr sz="2400" b="1">
-                <a:solidFill>
-                  <a:srgbClr val="8B5CF6"/>
-                </a:solidFill>
-                <a:latin typeface="Calibri"/>
-              </a:defRPr>
-            </a:pPr>
-            <a:r>
-              <a:t>Q-table</a:t>
-            </a:r>
-          </a:p>
-          <a:p>
-            <a:pPr algn="ctr">
-              <a:spcBef>
-                <a:spcPts val="200"/>
-              </a:spcBef>
-              <a:spcAft>
-                <a:spcPts val="400"/>
-              </a:spcAft>
-              <a:defRPr sz="1000" b="0">
-                <a:solidFill>
-                  <a:srgbClr val="B0B8CC"/>
-                </a:solidFill>
-                <a:latin typeface="Calibri"/>
-              </a:defRPr>
-            </a:pPr>
-            <a:r>
-              <a:t>Auditable policy [A1]</a:t>
-            </a:r>
-          </a:p>
-        </p:txBody>
-      </p:sp>
-      <p:sp>
-        <p:nvSpPr>
-          <p:cNvPr id="10" name="TextBox 9"/>
-          <p:cNvSpPr txBox="1"/>
-          <p:nvPr/>
-        </p:nvSpPr>
-        <p:spPr>
-          <a:xfrm>
-            <a:off x="457200" y="6601968"/>
-            <a:ext cx="11430000" cy="228600"/>
-          </a:xfrm>
-          <a:prstGeom prst="rect">
-            <a:avLst/>
-          </a:prstGeom>
-          <a:noFill/>
-        </p:spPr>
-        <p:txBody>
-          <a:bodyPr wrap="square">
-            <a:spAutoFit/>
-          </a:bodyPr>
-          <a:lstStyle/>
-          <a:p>
-            <a:pPr algn="l">
-              <a:defRPr sz="800" b="0">
-                <a:solidFill>
-                  <a:srgbClr val="6B7B96"/>
-                </a:solidFill>
-                <a:latin typeface="Calibri"/>
-              </a:defRPr>
-            </a:pPr>
-            <a:r>
-              <a:t>[A1] rl_agent.py (reward fn, ε-decay 0.995)  ·  [A3] run_simulation Module 3 (training convergence 713/800)</a:t>
-            </a:r>
-          </a:p>
-        </p:txBody>
-      </p:sp>
-      <p:sp>
-        <p:nvSpPr>
-          <p:cNvPr id="11" name="TextBox 10"/>
-          <p:cNvSpPr txBox="1"/>
-          <p:nvPr/>
-        </p:nvSpPr>
-        <p:spPr>
-          <a:xfrm>
-            <a:off x="457200" y="6400800"/>
-            <a:ext cx="4572000" cy="365760"/>
-          </a:xfrm>
-          <a:prstGeom prst="rect">
-            <a:avLst/>
-          </a:prstGeom>
-          <a:noFill/>
-        </p:spPr>
-        <p:txBody>
-          <a:bodyPr wrap="square">
-            <a:spAutoFit/>
-          </a:bodyPr>
-          <a:lstStyle/>
-          <a:p>
-            <a:pPr algn="l">
-              <a:defRPr sz="1000" b="0">
-                <a:solidFill>
-                  <a:srgbClr val="6B7B96"/>
-                </a:solidFill>
-                <a:latin typeface="Calibri"/>
-              </a:defRPr>
-            </a:pPr>
-            <a:r>
-              <a:t>AETHERIX — Interplanetary Communication Network</a:t>
-            </a:r>
-          </a:p>
-        </p:txBody>
-      </p:sp>
-      <p:sp>
-        <p:nvSpPr>
-          <p:cNvPr id="12" name="TextBox 11"/>
-          <p:cNvSpPr txBox="1"/>
-          <p:nvPr/>
-        </p:nvSpPr>
-        <p:spPr>
-          <a:xfrm>
-            <a:off x="10058400" y="6400800"/>
-            <a:ext cx="1828800" cy="365760"/>
-          </a:xfrm>
-          <a:prstGeom prst="rect">
-            <a:avLst/>
-          </a:prstGeom>
-          <a:noFill/>
-        </p:spPr>
-        <p:txBody>
-          <a:bodyPr wrap="square">
-            <a:spAutoFit/>
-          </a:bodyPr>
-          <a:lstStyle/>
-          <a:p>
-            <a:pPr algn="r">
-              <a:defRPr sz="1000" b="0">
-                <a:solidFill>
-                  <a:srgbClr val="6B7B96"/>
-                </a:solidFill>
-                <a:latin typeface="Calibri"/>
-              </a:defRPr>
-            </a:pPr>
-            <a:r>
-              <a:t>14 / 31</a:t>
-            </a:r>
-          </a:p>
-        </p:txBody>
-      </p:sp>
-    </p:spTree>
-  </p:cSld>
-  <p:transition spd="med" advClick="1">
-    <p:wipe dir="d"/>
   </p:transition>
   <p:clrMapOvr>
     <a:masterClrMapping/>
@@ -8998,6 +8461,786 @@
         </p:nvSpPr>
         <p:spPr>
           <a:xfrm>
+            <a:off x="548640" y="274320"/>
+            <a:ext cx="8229600" cy="548640"/>
+          </a:xfrm>
+          <a:prstGeom prst="rect">
+            <a:avLst/>
+          </a:prstGeom>
+          <a:noFill/>
+        </p:spPr>
+        <p:txBody>
+          <a:bodyPr wrap="square">
+            <a:spAutoFit/>
+          </a:bodyPr>
+          <a:lstStyle/>
+          <a:p>
+            <a:pPr algn="l">
+              <a:defRPr sz="3200" b="1">
+                <a:solidFill>
+                  <a:srgbClr val="FFFFFF"/>
+                </a:solidFill>
+                <a:latin typeface="Calibri"/>
+              </a:defRPr>
+            </a:pPr>
+            <a:r>
+              <a:t>RL-BASED ROUTING</a:t>
+            </a:r>
+          </a:p>
+        </p:txBody>
+      </p:sp>
+      <p:sp>
+        <p:nvSpPr>
+          <p:cNvPr id="3" name="TextBox 2"/>
+          <p:cNvSpPr txBox="1"/>
+          <p:nvPr/>
+        </p:nvSpPr>
+        <p:spPr>
+          <a:xfrm>
+            <a:off x="548640" y="822960"/>
+            <a:ext cx="8229600" cy="365760"/>
+          </a:xfrm>
+          <a:prstGeom prst="rect">
+            <a:avLst/>
+          </a:prstGeom>
+          <a:noFill/>
+        </p:spPr>
+        <p:txBody>
+          <a:bodyPr wrap="square">
+            <a:spAutoFit/>
+          </a:bodyPr>
+          <a:lstStyle/>
+          <a:p>
+            <a:pPr algn="l">
+              <a:defRPr sz="1600" b="0">
+                <a:solidFill>
+                  <a:srgbClr val="00D4AA"/>
+                </a:solidFill>
+                <a:latin typeface="Calibri"/>
+              </a:defRPr>
+            </a:pPr>
+            <a:r>
+              <a:t>AI Innovation</a:t>
+            </a:r>
+          </a:p>
+        </p:txBody>
+      </p:sp>
+      <p:sp>
+        <p:nvSpPr>
+          <p:cNvPr id="4" name="Rectangle 3"/>
+          <p:cNvSpPr/>
+          <p:nvPr/>
+        </p:nvSpPr>
+        <p:spPr>
+          <a:xfrm>
+            <a:off x="548640" y="1234440"/>
+            <a:ext cx="2286000" cy="38100"/>
+          </a:xfrm>
+          <a:prstGeom prst="rect">
+            <a:avLst/>
+          </a:prstGeom>
+          <a:solidFill>
+            <a:srgbClr val="009EFF"/>
+          </a:solidFill>
+          <a:ln>
+            <a:noFill/>
+          </a:ln>
+          <a:effectLst/>
+        </p:spPr>
+        <p:style>
+          <a:lnRef idx="1">
+            <a:schemeClr val="accent1"/>
+          </a:lnRef>
+          <a:fillRef idx="3">
+            <a:schemeClr val="accent1"/>
+          </a:fillRef>
+          <a:effectRef idx="2">
+            <a:schemeClr val="accent1"/>
+          </a:effectRef>
+          <a:fontRef idx="minor">
+            <a:schemeClr val="lt1"/>
+          </a:fontRef>
+        </p:style>
+        <p:txBody>
+          <a:bodyPr rtlCol="0" anchor="ctr"/>
+          <a:lstStyle/>
+          <a:p>
+            <a:pPr algn="ctr"/>
+          </a:p>
+        </p:txBody>
+      </p:sp>
+      <p:sp>
+        <p:nvSpPr>
+          <p:cNvPr id="5" name="Rounded Rectangle 4"/>
+          <p:cNvSpPr/>
+          <p:nvPr/>
+        </p:nvSpPr>
+        <p:spPr>
+          <a:xfrm>
+            <a:off x="274320" y="1417320"/>
+            <a:ext cx="4206240" cy="2286000"/>
+          </a:xfrm>
+          <a:prstGeom prst="roundRect">
+            <a:avLst/>
+          </a:prstGeom>
+          <a:solidFill>
+            <a:srgbClr val="141B2D"/>
+          </a:solidFill>
+          <a:ln w="12700">
+            <a:solidFill>
+              <a:srgbClr val="FF4D4D"/>
+            </a:solidFill>
+          </a:ln>
+          <a:effectLst/>
+        </p:spPr>
+        <p:style>
+          <a:lnRef idx="1">
+            <a:schemeClr val="accent1"/>
+          </a:lnRef>
+          <a:fillRef idx="3">
+            <a:schemeClr val="accent1"/>
+          </a:fillRef>
+          <a:effectRef idx="2">
+            <a:schemeClr val="accent1"/>
+          </a:effectRef>
+          <a:fontRef idx="minor">
+            <a:schemeClr val="lt1"/>
+          </a:fontRef>
+        </p:style>
+        <p:txBody>
+          <a:bodyPr rtlCol="0" anchor="ctr" wrap="square" lIns="137160" rIns="137160" tIns="91440" bIns="91440"/>
+          <a:lstStyle/>
+          <a:p>
+            <a:pPr algn="ctr">
+              <a:defRPr sz="1600" b="1">
+                <a:solidFill>
+                  <a:srgbClr val="009EFF"/>
+                </a:solidFill>
+                <a:latin typeface="Calibri"/>
+              </a:defRPr>
+            </a:pPr>
+            <a:r>
+              <a:t>Contact Graph Routing</a:t>
+            </a:r>
+          </a:p>
+          <a:p>
+            <a:pPr algn="l">
+              <a:spcBef>
+                <a:spcPts val="200"/>
+              </a:spcBef>
+              <a:spcAft>
+                <a:spcPts val="200"/>
+              </a:spcAft>
+              <a:defRPr sz="1300" b="0">
+                <a:solidFill>
+                  <a:srgbClr val="B0B8CC"/>
+                </a:solidFill>
+                <a:latin typeface="Calibri"/>
+              </a:defRPr>
+            </a:pPr>
+            <a:r>
+              <a:t>Pre-computed contact plans required</a:t>
+            </a:r>
+          </a:p>
+          <a:p>
+            <a:pPr algn="l">
+              <a:spcBef>
+                <a:spcPts val="200"/>
+              </a:spcBef>
+              <a:spcAft>
+                <a:spcPts val="200"/>
+              </a:spcAft>
+              <a:defRPr sz="1300" b="0">
+                <a:solidFill>
+                  <a:srgbClr val="B0B8CC"/>
+                </a:solidFill>
+                <a:latin typeface="Calibri"/>
+              </a:defRPr>
+            </a:pPr>
+            <a:r>
+              <a:t>Cannot adapt to unexpected link failures</a:t>
+            </a:r>
+          </a:p>
+          <a:p>
+            <a:pPr algn="l">
+              <a:spcBef>
+                <a:spcPts val="200"/>
+              </a:spcBef>
+              <a:spcAft>
+                <a:spcPts val="200"/>
+              </a:spcAft>
+              <a:defRPr sz="1300" b="0">
+                <a:solidFill>
+                  <a:srgbClr val="B0B8CC"/>
+                </a:solidFill>
+                <a:latin typeface="Calibri"/>
+              </a:defRPr>
+            </a:pPr>
+            <a:r>
+              <a:t>Computational cost grows O(n³) per route</a:t>
+            </a:r>
+          </a:p>
+          <a:p>
+            <a:pPr algn="l">
+              <a:spcBef>
+                <a:spcPts val="200"/>
+              </a:spcBef>
+              <a:spcAft>
+                <a:spcPts val="200"/>
+              </a:spcAft>
+              <a:defRPr sz="1300" b="0">
+                <a:solidFill>
+                  <a:srgbClr val="B0B8CC"/>
+                </a:solidFill>
+                <a:latin typeface="Calibri"/>
+              </a:defRPr>
+            </a:pPr>
+            <a:r>
+              <a:t>No learning from historical performance</a:t>
+            </a:r>
+          </a:p>
+          <a:p>
+            <a:pPr algn="l">
+              <a:spcBef>
+                <a:spcPts val="200"/>
+              </a:spcBef>
+              <a:spcAft>
+                <a:spcPts val="200"/>
+              </a:spcAft>
+              <a:defRPr sz="1300" b="0">
+                <a:solidFill>
+                  <a:srgbClr val="B0B8CC"/>
+                </a:solidFill>
+                <a:latin typeface="Calibri"/>
+              </a:defRPr>
+            </a:pPr>
+            <a:r>
+              <a:t>Single-path — ignores multipath opportunity</a:t>
+            </a:r>
+          </a:p>
+        </p:txBody>
+      </p:sp>
+      <p:sp>
+        <p:nvSpPr>
+          <p:cNvPr id="6" name="Rounded Rectangle 5"/>
+          <p:cNvSpPr/>
+          <p:nvPr/>
+        </p:nvSpPr>
+        <p:spPr>
+          <a:xfrm>
+            <a:off x="4663440" y="1417320"/>
+            <a:ext cx="4206240" cy="2286000"/>
+          </a:xfrm>
+          <a:prstGeom prst="roundRect">
+            <a:avLst/>
+          </a:prstGeom>
+          <a:solidFill>
+            <a:srgbClr val="141B2D"/>
+          </a:solidFill>
+          <a:ln w="12700">
+            <a:solidFill>
+              <a:srgbClr val="00D4AA"/>
+            </a:solidFill>
+          </a:ln>
+          <a:effectLst/>
+        </p:spPr>
+        <p:style>
+          <a:lnRef idx="1">
+            <a:schemeClr val="accent1"/>
+          </a:lnRef>
+          <a:fillRef idx="3">
+            <a:schemeClr val="accent1"/>
+          </a:fillRef>
+          <a:effectRef idx="2">
+            <a:schemeClr val="accent1"/>
+          </a:effectRef>
+          <a:fontRef idx="minor">
+            <a:schemeClr val="lt1"/>
+          </a:fontRef>
+        </p:style>
+        <p:txBody>
+          <a:bodyPr rtlCol="0" anchor="ctr" wrap="square" lIns="137160" rIns="137160" tIns="91440" bIns="91440"/>
+          <a:lstStyle/>
+          <a:p>
+            <a:pPr algn="ctr">
+              <a:defRPr sz="1600" b="1">
+                <a:solidFill>
+                  <a:srgbClr val="009EFF"/>
+                </a:solidFill>
+                <a:latin typeface="Calibri"/>
+              </a:defRPr>
+            </a:pPr>
+            <a:r>
+              <a:t>RL Agent</a:t>
+            </a:r>
+          </a:p>
+          <a:p>
+            <a:pPr algn="l">
+              <a:spcBef>
+                <a:spcPts val="200"/>
+              </a:spcBef>
+              <a:spcAft>
+                <a:spcPts val="200"/>
+              </a:spcAft>
+              <a:defRPr sz="1300" b="0">
+                <a:solidFill>
+                  <a:srgbClr val="B0B8CC"/>
+                </a:solidFill>
+                <a:latin typeface="Calibri"/>
+              </a:defRPr>
+            </a:pPr>
+            <a:r>
+              <a:t>State: (node, neighbors, link quality, buffer)</a:t>
+            </a:r>
+          </a:p>
+          <a:p>
+            <a:pPr algn="l">
+              <a:spcBef>
+                <a:spcPts val="200"/>
+              </a:spcBef>
+              <a:spcAft>
+                <a:spcPts val="200"/>
+              </a:spcAft>
+              <a:defRPr sz="1300" b="0">
+                <a:solidFill>
+                  <a:srgbClr val="B0B8CC"/>
+                </a:solidFill>
+                <a:latin typeface="Calibri"/>
+              </a:defRPr>
+            </a:pPr>
+            <a:r>
+              <a:t>Actions: forward | store | drop | split</a:t>
+            </a:r>
+          </a:p>
+          <a:p>
+            <a:pPr algn="l">
+              <a:spcBef>
+                <a:spcPts val="200"/>
+              </a:spcBef>
+              <a:spcAft>
+                <a:spcPts val="200"/>
+              </a:spcAft>
+              <a:defRPr sz="1300" b="0">
+                <a:solidFill>
+                  <a:srgbClr val="B0B8CC"/>
+                </a:solidFill>
+                <a:latin typeface="Calibri"/>
+              </a:defRPr>
+            </a:pPr>
+            <a:r>
+              <a:t>Reward: R = α(delivery) − β(delay) − γ(hops) − δ(drops) − ε(energy) [A1]</a:t>
+            </a:r>
+          </a:p>
+          <a:p>
+            <a:pPr algn="l">
+              <a:spcBef>
+                <a:spcPts val="200"/>
+              </a:spcBef>
+              <a:spcAft>
+                <a:spcPts val="200"/>
+              </a:spcAft>
+              <a:defRPr sz="1300" b="0">
+                <a:solidFill>
+                  <a:srgbClr val="B0B8CC"/>
+                </a:solidFill>
+                <a:latin typeface="Calibri"/>
+              </a:defRPr>
+            </a:pPr>
+            <a:r>
+              <a:t>ε-greedy exploration, decay 0.995 (α=1.0, δ=10.0) [A1]</a:t>
+            </a:r>
+          </a:p>
+          <a:p>
+            <a:pPr algn="l">
+              <a:spcBef>
+                <a:spcPts val="200"/>
+              </a:spcBef>
+              <a:spcAft>
+                <a:spcPts val="200"/>
+              </a:spcAft>
+              <a:defRPr sz="1300" b="0">
+                <a:solidFill>
+                  <a:srgbClr val="B0B8CC"/>
+                </a:solidFill>
+                <a:latin typeface="Calibri"/>
+              </a:defRPr>
+            </a:pPr>
+            <a:r>
+              <a:t>Q-table + federated aggregation across nodes</a:t>
+            </a:r>
+          </a:p>
+        </p:txBody>
+      </p:sp>
+      <p:sp>
+        <p:nvSpPr>
+          <p:cNvPr id="7" name="Rounded Rectangle 6"/>
+          <p:cNvSpPr/>
+          <p:nvPr/>
+        </p:nvSpPr>
+        <p:spPr>
+          <a:xfrm>
+            <a:off x="274320" y="3886200"/>
+            <a:ext cx="2834640" cy="1005840"/>
+          </a:xfrm>
+          <a:prstGeom prst="roundRect">
+            <a:avLst/>
+          </a:prstGeom>
+          <a:solidFill>
+            <a:srgbClr val="141B2D"/>
+          </a:solidFill>
+          <a:ln w="12700">
+            <a:solidFill>
+              <a:srgbClr val="2ECC71"/>
+            </a:solidFill>
+          </a:ln>
+          <a:effectLst/>
+        </p:spPr>
+        <p:style>
+          <a:lnRef idx="1">
+            <a:schemeClr val="accent1"/>
+          </a:lnRef>
+          <a:fillRef idx="3">
+            <a:schemeClr val="accent1"/>
+          </a:fillRef>
+          <a:effectRef idx="2">
+            <a:schemeClr val="accent1"/>
+          </a:effectRef>
+          <a:fontRef idx="minor">
+            <a:schemeClr val="lt1"/>
+          </a:fontRef>
+        </p:style>
+        <p:txBody>
+          <a:bodyPr rtlCol="0" anchor="ctr" wrap="square"/>
+          <a:lstStyle/>
+          <a:p>
+            <a:pPr algn="ctr">
+              <a:defRPr sz="2400" b="1">
+                <a:solidFill>
+                  <a:srgbClr val="2ECC71"/>
+                </a:solidFill>
+                <a:latin typeface="Calibri"/>
+              </a:defRPr>
+            </a:pPr>
+            <a:r>
+              <a:t>713/800</a:t>
+            </a:r>
+          </a:p>
+          <a:p>
+            <a:pPr algn="ctr">
+              <a:spcBef>
+                <a:spcPts val="200"/>
+              </a:spcBef>
+              <a:spcAft>
+                <a:spcPts val="400"/>
+              </a:spcAft>
+              <a:defRPr sz="1000" b="0">
+                <a:solidFill>
+                  <a:srgbClr val="B0B8CC"/>
+                </a:solidFill>
+                <a:latin typeface="Calibri"/>
+              </a:defRPr>
+            </a:pPr>
+            <a:r>
+              <a:t>Forward decisions [A3]</a:t>
+            </a:r>
+          </a:p>
+        </p:txBody>
+      </p:sp>
+      <p:sp>
+        <p:nvSpPr>
+          <p:cNvPr id="8" name="Rounded Rectangle 7"/>
+          <p:cNvSpPr/>
+          <p:nvPr/>
+        </p:nvSpPr>
+        <p:spPr>
+          <a:xfrm>
+            <a:off x="3246120" y="3886200"/>
+            <a:ext cx="2834640" cy="1005840"/>
+          </a:xfrm>
+          <a:prstGeom prst="roundRect">
+            <a:avLst/>
+          </a:prstGeom>
+          <a:solidFill>
+            <a:srgbClr val="141B2D"/>
+          </a:solidFill>
+          <a:ln w="12700">
+            <a:solidFill>
+              <a:srgbClr val="009EFF"/>
+            </a:solidFill>
+          </a:ln>
+          <a:effectLst/>
+        </p:spPr>
+        <p:style>
+          <a:lnRef idx="1">
+            <a:schemeClr val="accent1"/>
+          </a:lnRef>
+          <a:fillRef idx="3">
+            <a:schemeClr val="accent1"/>
+          </a:fillRef>
+          <a:effectRef idx="2">
+            <a:schemeClr val="accent1"/>
+          </a:effectRef>
+          <a:fontRef idx="minor">
+            <a:schemeClr val="lt1"/>
+          </a:fontRef>
+        </p:style>
+        <p:txBody>
+          <a:bodyPr rtlCol="0" anchor="ctr" wrap="square"/>
+          <a:lstStyle/>
+          <a:p>
+            <a:pPr algn="ctr">
+              <a:defRPr sz="2400" b="1">
+                <a:solidFill>
+                  <a:srgbClr val="009EFF"/>
+                </a:solidFill>
+                <a:latin typeface="Calibri"/>
+              </a:defRPr>
+            </a:pPr>
+            <a:r>
+              <a:t>seconds</a:t>
+            </a:r>
+          </a:p>
+          <a:p>
+            <a:pPr algn="ctr">
+              <a:spcBef>
+                <a:spcPts val="200"/>
+              </a:spcBef>
+              <a:spcAft>
+                <a:spcPts val="400"/>
+              </a:spcAft>
+              <a:defRPr sz="1000" b="0">
+                <a:solidFill>
+                  <a:srgbClr val="B0B8CC"/>
+                </a:solidFill>
+                <a:latin typeface="Calibri"/>
+              </a:defRPr>
+            </a:pPr>
+            <a:r>
+              <a:t>Recovery vs hours [A1]</a:t>
+            </a:r>
+          </a:p>
+        </p:txBody>
+      </p:sp>
+      <p:sp>
+        <p:nvSpPr>
+          <p:cNvPr id="9" name="Rounded Rectangle 8"/>
+          <p:cNvSpPr/>
+          <p:nvPr/>
+        </p:nvSpPr>
+        <p:spPr>
+          <a:xfrm>
+            <a:off x="6217920" y="3886200"/>
+            <a:ext cx="2834640" cy="1005840"/>
+          </a:xfrm>
+          <a:prstGeom prst="roundRect">
+            <a:avLst/>
+          </a:prstGeom>
+          <a:solidFill>
+            <a:srgbClr val="141B2D"/>
+          </a:solidFill>
+          <a:ln w="12700">
+            <a:solidFill>
+              <a:srgbClr val="8B5CF6"/>
+            </a:solidFill>
+          </a:ln>
+          <a:effectLst/>
+        </p:spPr>
+        <p:style>
+          <a:lnRef idx="1">
+            <a:schemeClr val="accent1"/>
+          </a:lnRef>
+          <a:fillRef idx="3">
+            <a:schemeClr val="accent1"/>
+          </a:fillRef>
+          <a:effectRef idx="2">
+            <a:schemeClr val="accent1"/>
+          </a:effectRef>
+          <a:fontRef idx="minor">
+            <a:schemeClr val="lt1"/>
+          </a:fontRef>
+        </p:style>
+        <p:txBody>
+          <a:bodyPr rtlCol="0" anchor="ctr" wrap="square"/>
+          <a:lstStyle/>
+          <a:p>
+            <a:pPr algn="ctr">
+              <a:defRPr sz="2400" b="1">
+                <a:solidFill>
+                  <a:srgbClr val="8B5CF6"/>
+                </a:solidFill>
+                <a:latin typeface="Calibri"/>
+              </a:defRPr>
+            </a:pPr>
+            <a:r>
+              <a:t>Q-table</a:t>
+            </a:r>
+          </a:p>
+          <a:p>
+            <a:pPr algn="ctr">
+              <a:spcBef>
+                <a:spcPts val="200"/>
+              </a:spcBef>
+              <a:spcAft>
+                <a:spcPts val="400"/>
+              </a:spcAft>
+              <a:defRPr sz="1000" b="0">
+                <a:solidFill>
+                  <a:srgbClr val="B0B8CC"/>
+                </a:solidFill>
+                <a:latin typeface="Calibri"/>
+              </a:defRPr>
+            </a:pPr>
+            <a:r>
+              <a:t>Auditable policy [A1]</a:t>
+            </a:r>
+          </a:p>
+        </p:txBody>
+      </p:sp>
+      <p:sp>
+        <p:nvSpPr>
+          <p:cNvPr id="10" name="TextBox 9"/>
+          <p:cNvSpPr txBox="1"/>
+          <p:nvPr/>
+        </p:nvSpPr>
+        <p:spPr>
+          <a:xfrm>
+            <a:off x="457200" y="6601968"/>
+            <a:ext cx="11430000" cy="228600"/>
+          </a:xfrm>
+          <a:prstGeom prst="rect">
+            <a:avLst/>
+          </a:prstGeom>
+          <a:noFill/>
+        </p:spPr>
+        <p:txBody>
+          <a:bodyPr wrap="square">
+            <a:spAutoFit/>
+          </a:bodyPr>
+          <a:lstStyle/>
+          <a:p>
+            <a:pPr algn="l">
+              <a:defRPr sz="800" b="0">
+                <a:solidFill>
+                  <a:srgbClr val="6B7B96"/>
+                </a:solidFill>
+                <a:latin typeface="Calibri"/>
+              </a:defRPr>
+            </a:pPr>
+            <a:r>
+              <a:t>[A1] rl_agent.py (reward fn, ε-decay 0.995)  ·  [A3] run_simulation Module 3 (training convergence 713/800)</a:t>
+            </a:r>
+          </a:p>
+        </p:txBody>
+      </p:sp>
+      <p:sp>
+        <p:nvSpPr>
+          <p:cNvPr id="11" name="TextBox 10"/>
+          <p:cNvSpPr txBox="1"/>
+          <p:nvPr/>
+        </p:nvSpPr>
+        <p:spPr>
+          <a:xfrm>
+            <a:off x="457200" y="6400800"/>
+            <a:ext cx="4572000" cy="365760"/>
+          </a:xfrm>
+          <a:prstGeom prst="rect">
+            <a:avLst/>
+          </a:prstGeom>
+          <a:noFill/>
+        </p:spPr>
+        <p:txBody>
+          <a:bodyPr wrap="square">
+            <a:spAutoFit/>
+          </a:bodyPr>
+          <a:lstStyle/>
+          <a:p>
+            <a:pPr algn="l">
+              <a:defRPr sz="1000" b="0">
+                <a:solidFill>
+                  <a:srgbClr val="6B7B96"/>
+                </a:solidFill>
+                <a:latin typeface="Calibri"/>
+              </a:defRPr>
+            </a:pPr>
+            <a:r>
+              <a:t>AETHERIX — Interplanetary Communication Network</a:t>
+            </a:r>
+          </a:p>
+        </p:txBody>
+      </p:sp>
+      <p:sp>
+        <p:nvSpPr>
+          <p:cNvPr id="12" name="TextBox 11"/>
+          <p:cNvSpPr txBox="1"/>
+          <p:nvPr/>
+        </p:nvSpPr>
+        <p:spPr>
+          <a:xfrm>
+            <a:off x="10058400" y="6400800"/>
+            <a:ext cx="1828800" cy="365760"/>
+          </a:xfrm>
+          <a:prstGeom prst="rect">
+            <a:avLst/>
+          </a:prstGeom>
+          <a:noFill/>
+        </p:spPr>
+        <p:txBody>
+          <a:bodyPr wrap="square">
+            <a:spAutoFit/>
+          </a:bodyPr>
+          <a:lstStyle/>
+          <a:p>
+            <a:pPr algn="r">
+              <a:defRPr sz="1000" b="0">
+                <a:solidFill>
+                  <a:srgbClr val="6B7B96"/>
+                </a:solidFill>
+                <a:latin typeface="Calibri"/>
+              </a:defRPr>
+            </a:pPr>
+            <a:r>
+              <a:t>15 / 33</a:t>
+            </a:r>
+          </a:p>
+        </p:txBody>
+      </p:sp>
+    </p:spTree>
+  </p:cSld>
+  <p:transition spd="med" advClick="1">
+    <p:wipe dir="d"/>
+  </p:transition>
+  <p:clrMapOvr>
+    <a:masterClrMapping/>
+  </p:clrMapOvr>
+</p:sld>
+</file>
+
+<file path=ppt/slides/slide16.xml><?xml version="1.0" encoding="utf-8"?>
+<p:sld xmlns:a="http://schemas.openxmlformats.org/drawingml/2006/main" xmlns:p="http://schemas.openxmlformats.org/presentationml/2006/main" xmlns:r="http://schemas.openxmlformats.org/officeDocument/2006/relationships">
+  <p:cSld>
+    <p:bg>
+      <p:bgPr>
+        <a:solidFill>
+          <a:srgbClr val="0B0E1A"/>
+        </a:solidFill>
+        <a:effectLst/>
+      </p:bgPr>
+    </p:bg>
+    <p:spTree>
+      <p:nvGrpSpPr>
+        <p:cNvPr id="1" name=""/>
+        <p:cNvGrpSpPr/>
+        <p:nvPr/>
+      </p:nvGrpSpPr>
+      <p:grpSpPr/>
+      <p:sp>
+        <p:nvSpPr>
+          <p:cNvPr id="2" name="TextBox 1"/>
+          <p:cNvSpPr txBox="1"/>
+          <p:nvPr/>
+        </p:nvSpPr>
+        <p:spPr>
+          <a:xfrm>
             <a:off x="640080" y="274320"/>
             <a:ext cx="10058400" cy="640080"/>
           </a:xfrm>
@@ -9269,7 +9512,7 @@
               </a:defRPr>
             </a:pPr>
             <a:r>
-              <a:t>15 / 31</a:t>
+              <a:t>16 / 33</a:t>
             </a:r>
           </a:p>
         </p:txBody>
@@ -9285,7 +9528,7 @@
 </p:sld>
 </file>
 
-<file path=ppt/slides/slide16.xml><?xml version="1.0" encoding="utf-8"?>
+<file path=ppt/slides/slide17.xml><?xml version="1.0" encoding="utf-8"?>
 <p:sld xmlns:a="http://schemas.openxmlformats.org/drawingml/2006/main" xmlns:p="http://schemas.openxmlformats.org/presentationml/2006/main" xmlns:r="http://schemas.openxmlformats.org/officeDocument/2006/relationships">
   <p:cSld>
     <p:bg>
@@ -10147,7 +10390,7 @@
               </a:defRPr>
             </a:pPr>
             <a:r>
-              <a:t>16 / 31</a:t>
+              <a:t>17 / 33</a:t>
             </a:r>
           </a:p>
         </p:txBody>
@@ -10163,7 +10406,7 @@
 </p:sld>
 </file>
 
-<file path=ppt/slides/slide17.xml><?xml version="1.0" encoding="utf-8"?>
+<file path=ppt/slides/slide18.xml><?xml version="1.0" encoding="utf-8"?>
 <p:sld xmlns:a="http://schemas.openxmlformats.org/drawingml/2006/main" xmlns:p="http://schemas.openxmlformats.org/presentationml/2006/main" xmlns:r="http://schemas.openxmlformats.org/officeDocument/2006/relationships">
   <p:cSld>
     <p:bg>
@@ -10460,7 +10703,7 @@
               </a:defRPr>
             </a:pPr>
             <a:r>
-              <a:t>17 / 31</a:t>
+              <a:t>18 / 33</a:t>
             </a:r>
           </a:p>
         </p:txBody>
@@ -10476,7 +10719,7 @@
 </p:sld>
 </file>
 
-<file path=ppt/slides/slide18.xml><?xml version="1.0" encoding="utf-8"?>
+<file path=ppt/slides/slide19.xml><?xml version="1.0" encoding="utf-8"?>
 <p:sld xmlns:a="http://schemas.openxmlformats.org/drawingml/2006/main" xmlns:p="http://schemas.openxmlformats.org/presentationml/2006/main" xmlns:r="http://schemas.openxmlformats.org/officeDocument/2006/relationships">
   <p:cSld>
     <p:bg>
@@ -11557,7 +11800,7 @@
               </a:defRPr>
             </a:pPr>
             <a:r>
-              <a:t>18 / 31</a:t>
+              <a:t>19 / 33</a:t>
             </a:r>
           </a:p>
         </p:txBody>
@@ -11566,202 +11809,6 @@
   </p:cSld>
   <p:transition spd="med" advClick="1">
     <p:fade/>
-  </p:transition>
-  <p:clrMapOvr>
-    <a:masterClrMapping/>
-  </p:clrMapOvr>
-</p:sld>
-</file>
-
-<file path=ppt/slides/slide19.xml><?xml version="1.0" encoding="utf-8"?>
-<p:sld xmlns:a="http://schemas.openxmlformats.org/drawingml/2006/main" xmlns:p="http://schemas.openxmlformats.org/presentationml/2006/main" xmlns:r="http://schemas.openxmlformats.org/officeDocument/2006/relationships">
-  <p:cSld>
-    <p:bg>
-      <p:bgPr>
-        <a:solidFill>
-          <a:srgbClr val="0B0E1A"/>
-        </a:solidFill>
-        <a:effectLst/>
-      </p:bgPr>
-    </p:bg>
-    <p:spTree>
-      <p:nvGrpSpPr>
-        <p:cNvPr id="1" name=""/>
-        <p:cNvGrpSpPr/>
-        <p:nvPr/>
-      </p:nvGrpSpPr>
-      <p:grpSpPr/>
-      <p:sp>
-        <p:nvSpPr>
-          <p:cNvPr id="2" name="TextBox 1"/>
-          <p:cNvSpPr txBox="1"/>
-          <p:nvPr/>
-        </p:nvSpPr>
-        <p:spPr>
-          <a:xfrm>
-            <a:off x="548640" y="365760"/>
-            <a:ext cx="8229600" cy="548640"/>
-          </a:xfrm>
-          <a:prstGeom prst="rect">
-            <a:avLst/>
-          </a:prstGeom>
-          <a:noFill/>
-        </p:spPr>
-        <p:txBody>
-          <a:bodyPr wrap="none">
-            <a:spAutoFit/>
-          </a:bodyPr>
-          <a:lstStyle/>
-          <a:p>
-            <a:pPr algn="l">
-              <a:defRPr sz="2800" b="1">
-                <a:solidFill>
-                  <a:srgbClr val="FFFFFF"/>
-                </a:solidFill>
-              </a:defRPr>
-            </a:pPr>
-            <a:r>
-              <a:t>DATA FLOW DIAGRAM</a:t>
-            </a:r>
-          </a:p>
-        </p:txBody>
-      </p:sp>
-      <p:pic>
-        <p:nvPicPr>
-          <p:cNvPr id="3" name="Picture 2" descr="data_flow.png"/>
-          <p:cNvPicPr>
-            <a:picLocks noChangeAspect="1"/>
-          </p:cNvPicPr>
-          <p:nvPr/>
-        </p:nvPicPr>
-        <p:blipFill>
-          <a:blip r:embed="rId2"/>
-          <a:stretch>
-            <a:fillRect/>
-          </a:stretch>
-        </p:blipFill>
-        <p:spPr>
-          <a:xfrm>
-            <a:off x="365760" y="1097280"/>
-            <a:ext cx="8412480" cy="5029200"/>
-          </a:xfrm>
-          <a:prstGeom prst="rect">
-            <a:avLst/>
-          </a:prstGeom>
-        </p:spPr>
-      </p:pic>
-      <p:sp>
-        <p:nvSpPr>
-          <p:cNvPr id="4" name="TextBox 3"/>
-          <p:cNvSpPr txBox="1"/>
-          <p:nvPr/>
-        </p:nvSpPr>
-        <p:spPr>
-          <a:xfrm>
-            <a:off x="457200" y="6601968"/>
-            <a:ext cx="11430000" cy="228600"/>
-          </a:xfrm>
-          <a:prstGeom prst="rect">
-            <a:avLst/>
-          </a:prstGeom>
-          <a:noFill/>
-        </p:spPr>
-        <p:txBody>
-          <a:bodyPr wrap="square">
-            <a:spAutoFit/>
-          </a:bodyPr>
-          <a:lstStyle/>
-          <a:p>
-            <a:pPr algn="l">
-              <a:defRPr sz="800" b="0">
-                <a:solidFill>
-                  <a:srgbClr val="6B7B96"/>
-                </a:solidFill>
-                <a:latin typeface="Calibri"/>
-              </a:defRPr>
-            </a:pPr>
-            <a:r>
-              <a:t>[A2] topology.py (full data path Mars→Earth)</a:t>
-            </a:r>
-          </a:p>
-        </p:txBody>
-      </p:sp>
-      <p:sp>
-        <p:nvSpPr>
-          <p:cNvPr id="5" name="TextBox 4"/>
-          <p:cNvSpPr txBox="1"/>
-          <p:nvPr/>
-        </p:nvSpPr>
-        <p:spPr>
-          <a:xfrm>
-            <a:off x="457200" y="6400800"/>
-            <a:ext cx="4572000" cy="365760"/>
-          </a:xfrm>
-          <a:prstGeom prst="rect">
-            <a:avLst/>
-          </a:prstGeom>
-          <a:noFill/>
-        </p:spPr>
-        <p:txBody>
-          <a:bodyPr wrap="square">
-            <a:spAutoFit/>
-          </a:bodyPr>
-          <a:lstStyle/>
-          <a:p>
-            <a:pPr algn="l">
-              <a:defRPr sz="1000" b="0">
-                <a:solidFill>
-                  <a:srgbClr val="6B7B96"/>
-                </a:solidFill>
-                <a:latin typeface="Calibri"/>
-              </a:defRPr>
-            </a:pPr>
-            <a:r>
-              <a:t>AETHERIX — Interplanetary Communication Network</a:t>
-            </a:r>
-          </a:p>
-        </p:txBody>
-      </p:sp>
-      <p:sp>
-        <p:nvSpPr>
-          <p:cNvPr id="6" name="TextBox 5"/>
-          <p:cNvSpPr txBox="1"/>
-          <p:nvPr/>
-        </p:nvSpPr>
-        <p:spPr>
-          <a:xfrm>
-            <a:off x="10058400" y="6400800"/>
-            <a:ext cx="1828800" cy="365760"/>
-          </a:xfrm>
-          <a:prstGeom prst="rect">
-            <a:avLst/>
-          </a:prstGeom>
-          <a:noFill/>
-        </p:spPr>
-        <p:txBody>
-          <a:bodyPr wrap="square">
-            <a:spAutoFit/>
-          </a:bodyPr>
-          <a:lstStyle/>
-          <a:p>
-            <a:pPr algn="r">
-              <a:defRPr sz="1000" b="0">
-                <a:solidFill>
-                  <a:srgbClr val="6B7B96"/>
-                </a:solidFill>
-                <a:latin typeface="Calibri"/>
-              </a:defRPr>
-            </a:pPr>
-            <a:r>
-              <a:t>19 / 31</a:t>
-            </a:r>
-          </a:p>
-        </p:txBody>
-      </p:sp>
-    </p:spTree>
-  </p:cSld>
-  <p:transition spd="med" advClick="1">
-    <p:cover dir="l"/>
   </p:transition>
   <p:clrMapOvr>
     <a:masterClrMapping/>
@@ -11970,7 +12017,7 @@
               </a:defRPr>
             </a:pPr>
             <a:r>
-              <a:t>2 / 31</a:t>
+              <a:t>2 / 33</a:t>
             </a:r>
           </a:p>
         </p:txBody>
@@ -14133,6 +14180,443 @@
 </file>
 
 <file path=ppt/slides/slide20.xml><?xml version="1.0" encoding="utf-8"?>
+<p:sld xmlns:a="http://schemas.openxmlformats.org/drawingml/2006/main" xmlns:p="http://schemas.openxmlformats.org/presentationml/2006/main" xmlns:r="http://schemas.openxmlformats.org/officeDocument/2006/relationships">
+  <p:cSld>
+    <p:bg>
+      <p:bgPr>
+        <a:solidFill>
+          <a:srgbClr val="0B0E1A"/>
+        </a:solidFill>
+        <a:effectLst/>
+      </p:bgPr>
+    </p:bg>
+    <p:spTree>
+      <p:nvGrpSpPr>
+        <p:cNvPr id="1" name=""/>
+        <p:cNvGrpSpPr/>
+        <p:nvPr/>
+      </p:nvGrpSpPr>
+      <p:grpSpPr/>
+      <p:sp>
+        <p:nvSpPr>
+          <p:cNvPr id="2" name="TextBox 1"/>
+          <p:cNvSpPr txBox="1"/>
+          <p:nvPr/>
+        </p:nvSpPr>
+        <p:spPr>
+          <a:xfrm>
+            <a:off x="548640" y="365760"/>
+            <a:ext cx="8229600" cy="548640"/>
+          </a:xfrm>
+          <a:prstGeom prst="rect">
+            <a:avLst/>
+          </a:prstGeom>
+          <a:noFill/>
+        </p:spPr>
+        <p:txBody>
+          <a:bodyPr wrap="none">
+            <a:spAutoFit/>
+          </a:bodyPr>
+          <a:lstStyle/>
+          <a:p>
+            <a:pPr algn="l">
+              <a:defRPr sz="2800" b="1">
+                <a:solidFill>
+                  <a:srgbClr val="FFFFFF"/>
+                </a:solidFill>
+              </a:defRPr>
+            </a:pPr>
+            <a:r>
+              <a:t>DATA FLOW DIAGRAM</a:t>
+            </a:r>
+          </a:p>
+        </p:txBody>
+      </p:sp>
+      <p:pic>
+        <p:nvPicPr>
+          <p:cNvPr id="3" name="Picture 2" descr="data_flow.png"/>
+          <p:cNvPicPr>
+            <a:picLocks noChangeAspect="1"/>
+          </p:cNvPicPr>
+          <p:nvPr/>
+        </p:nvPicPr>
+        <p:blipFill>
+          <a:blip r:embed="rId2"/>
+          <a:stretch>
+            <a:fillRect/>
+          </a:stretch>
+        </p:blipFill>
+        <p:spPr>
+          <a:xfrm>
+            <a:off x="365760" y="1097280"/>
+            <a:ext cx="8412480" cy="5029200"/>
+          </a:xfrm>
+          <a:prstGeom prst="rect">
+            <a:avLst/>
+          </a:prstGeom>
+        </p:spPr>
+      </p:pic>
+      <p:sp>
+        <p:nvSpPr>
+          <p:cNvPr id="4" name="TextBox 3"/>
+          <p:cNvSpPr txBox="1"/>
+          <p:nvPr/>
+        </p:nvSpPr>
+        <p:spPr>
+          <a:xfrm>
+            <a:off x="457200" y="6601968"/>
+            <a:ext cx="11430000" cy="228600"/>
+          </a:xfrm>
+          <a:prstGeom prst="rect">
+            <a:avLst/>
+          </a:prstGeom>
+          <a:noFill/>
+        </p:spPr>
+        <p:txBody>
+          <a:bodyPr wrap="square">
+            <a:spAutoFit/>
+          </a:bodyPr>
+          <a:lstStyle/>
+          <a:p>
+            <a:pPr algn="l">
+              <a:defRPr sz="800" b="0">
+                <a:solidFill>
+                  <a:srgbClr val="6B7B96"/>
+                </a:solidFill>
+                <a:latin typeface="Calibri"/>
+              </a:defRPr>
+            </a:pPr>
+            <a:r>
+              <a:t>[A2] topology.py (full data path Mars→Earth)</a:t>
+            </a:r>
+          </a:p>
+        </p:txBody>
+      </p:sp>
+      <p:sp>
+        <p:nvSpPr>
+          <p:cNvPr id="5" name="TextBox 4"/>
+          <p:cNvSpPr txBox="1"/>
+          <p:nvPr/>
+        </p:nvSpPr>
+        <p:spPr>
+          <a:xfrm>
+            <a:off x="457200" y="6400800"/>
+            <a:ext cx="4572000" cy="365760"/>
+          </a:xfrm>
+          <a:prstGeom prst="rect">
+            <a:avLst/>
+          </a:prstGeom>
+          <a:noFill/>
+        </p:spPr>
+        <p:txBody>
+          <a:bodyPr wrap="square">
+            <a:spAutoFit/>
+          </a:bodyPr>
+          <a:lstStyle/>
+          <a:p>
+            <a:pPr algn="l">
+              <a:defRPr sz="1000" b="0">
+                <a:solidFill>
+                  <a:srgbClr val="6B7B96"/>
+                </a:solidFill>
+                <a:latin typeface="Calibri"/>
+              </a:defRPr>
+            </a:pPr>
+            <a:r>
+              <a:t>AETHERIX — Interplanetary Communication Network</a:t>
+            </a:r>
+          </a:p>
+        </p:txBody>
+      </p:sp>
+      <p:sp>
+        <p:nvSpPr>
+          <p:cNvPr id="6" name="TextBox 5"/>
+          <p:cNvSpPr txBox="1"/>
+          <p:nvPr/>
+        </p:nvSpPr>
+        <p:spPr>
+          <a:xfrm>
+            <a:off x="10058400" y="6400800"/>
+            <a:ext cx="1828800" cy="365760"/>
+          </a:xfrm>
+          <a:prstGeom prst="rect">
+            <a:avLst/>
+          </a:prstGeom>
+          <a:noFill/>
+        </p:spPr>
+        <p:txBody>
+          <a:bodyPr wrap="square">
+            <a:spAutoFit/>
+          </a:bodyPr>
+          <a:lstStyle/>
+          <a:p>
+            <a:pPr algn="r">
+              <a:defRPr sz="1000" b="0">
+                <a:solidFill>
+                  <a:srgbClr val="6B7B96"/>
+                </a:solidFill>
+                <a:latin typeface="Calibri"/>
+              </a:defRPr>
+            </a:pPr>
+            <a:r>
+              <a:t>20 / 33</a:t>
+            </a:r>
+          </a:p>
+        </p:txBody>
+      </p:sp>
+    </p:spTree>
+  </p:cSld>
+  <p:transition spd="med" advClick="1">
+    <p:cover dir="l"/>
+  </p:transition>
+  <p:clrMapOvr>
+    <a:masterClrMapping/>
+  </p:clrMapOvr>
+</p:sld>
+</file>
+
+<file path=ppt/slides/slide21.xml><?xml version="1.0" encoding="utf-8"?>
+<p:sld xmlns:a="http://schemas.openxmlformats.org/drawingml/2006/main" xmlns:p="http://schemas.openxmlformats.org/presentationml/2006/main" xmlns:r="http://schemas.openxmlformats.org/officeDocument/2006/relationships">
+  <p:cSld>
+    <p:bg>
+      <p:bgPr>
+        <a:solidFill>
+          <a:srgbClr val="0B0E1A"/>
+        </a:solidFill>
+        <a:effectLst/>
+      </p:bgPr>
+    </p:bg>
+    <p:spTree>
+      <p:nvGrpSpPr>
+        <p:cNvPr id="1" name=""/>
+        <p:cNvGrpSpPr/>
+        <p:nvPr/>
+      </p:nvGrpSpPr>
+      <p:grpSpPr/>
+      <p:sp>
+        <p:nvSpPr>
+          <p:cNvPr id="2" name="TextBox 1"/>
+          <p:cNvSpPr txBox="1"/>
+          <p:nvPr/>
+        </p:nvSpPr>
+        <p:spPr>
+          <a:xfrm>
+            <a:off x="548640" y="274320"/>
+            <a:ext cx="8229600" cy="548640"/>
+          </a:xfrm>
+          <a:prstGeom prst="rect">
+            <a:avLst/>
+          </a:prstGeom>
+          <a:noFill/>
+        </p:spPr>
+        <p:txBody>
+          <a:bodyPr wrap="square">
+            <a:spAutoFit/>
+          </a:bodyPr>
+          <a:lstStyle/>
+          <a:p>
+            <a:pPr algn="l">
+              <a:defRPr sz="3200" b="1">
+                <a:solidFill>
+                  <a:srgbClr val="FFFFFF"/>
+                </a:solidFill>
+                <a:latin typeface="Calibri"/>
+              </a:defRPr>
+            </a:pPr>
+            <a:r>
+              <a:t>PROTOCOL STACK</a:t>
+            </a:r>
+          </a:p>
+        </p:txBody>
+      </p:sp>
+      <p:sp>
+        <p:nvSpPr>
+          <p:cNvPr id="3" name="Rectangle 2"/>
+          <p:cNvSpPr/>
+          <p:nvPr/>
+        </p:nvSpPr>
+        <p:spPr>
+          <a:xfrm>
+            <a:off x="548640" y="868680"/>
+            <a:ext cx="2286000" cy="38100"/>
+          </a:xfrm>
+          <a:prstGeom prst="rect">
+            <a:avLst/>
+          </a:prstGeom>
+          <a:solidFill>
+            <a:srgbClr val="009EFF"/>
+          </a:solidFill>
+          <a:ln>
+            <a:noFill/>
+          </a:ln>
+          <a:effectLst/>
+        </p:spPr>
+        <p:style>
+          <a:lnRef idx="1">
+            <a:schemeClr val="accent1"/>
+          </a:lnRef>
+          <a:fillRef idx="3">
+            <a:schemeClr val="accent1"/>
+          </a:fillRef>
+          <a:effectRef idx="2">
+            <a:schemeClr val="accent1"/>
+          </a:effectRef>
+          <a:fontRef idx="minor">
+            <a:schemeClr val="lt1"/>
+          </a:fontRef>
+        </p:style>
+        <p:txBody>
+          <a:bodyPr rtlCol="0" anchor="ctr"/>
+          <a:lstStyle/>
+          <a:p>
+            <a:pPr algn="ctr"/>
+          </a:p>
+        </p:txBody>
+      </p:sp>
+      <p:pic>
+        <p:nvPicPr>
+          <p:cNvPr id="4" name="Picture 3" descr="protocol_stack.png"/>
+          <p:cNvPicPr>
+            <a:picLocks noChangeAspect="1"/>
+          </p:cNvPicPr>
+          <p:nvPr/>
+        </p:nvPicPr>
+        <p:blipFill>
+          <a:blip r:embed="rId2"/>
+          <a:stretch>
+            <a:fillRect/>
+          </a:stretch>
+        </p:blipFill>
+        <p:spPr>
+          <a:xfrm>
+            <a:off x="457200" y="1097280"/>
+            <a:ext cx="8229600" cy="4846320"/>
+          </a:xfrm>
+          <a:prstGeom prst="rect">
+            <a:avLst/>
+          </a:prstGeom>
+        </p:spPr>
+      </p:pic>
+      <p:sp>
+        <p:nvSpPr>
+          <p:cNvPr id="5" name="TextBox 4"/>
+          <p:cNvSpPr txBox="1"/>
+          <p:nvPr/>
+        </p:nvSpPr>
+        <p:spPr>
+          <a:xfrm>
+            <a:off x="457200" y="6601968"/>
+            <a:ext cx="11430000" cy="228600"/>
+          </a:xfrm>
+          <a:prstGeom prst="rect">
+            <a:avLst/>
+          </a:prstGeom>
+          <a:noFill/>
+        </p:spPr>
+        <p:txBody>
+          <a:bodyPr wrap="square">
+            <a:spAutoFit/>
+          </a:bodyPr>
+          <a:lstStyle/>
+          <a:p>
+            <a:pPr algn="l">
+              <a:defRPr sz="800" b="0">
+                <a:solidFill>
+                  <a:srgbClr val="6B7B96"/>
+                </a:solidFill>
+                <a:latin typeface="Calibri"/>
+              </a:defRPr>
+            </a:pPr>
+            <a:r>
+              <a:t>[9] RFC 9171  ·  [10] RFC 5326  ·  [11] RFC 7242  ·  [A6] bundle.py</a:t>
+            </a:r>
+          </a:p>
+        </p:txBody>
+      </p:sp>
+      <p:sp>
+        <p:nvSpPr>
+          <p:cNvPr id="6" name="TextBox 5"/>
+          <p:cNvSpPr txBox="1"/>
+          <p:nvPr/>
+        </p:nvSpPr>
+        <p:spPr>
+          <a:xfrm>
+            <a:off x="457200" y="6400800"/>
+            <a:ext cx="4572000" cy="365760"/>
+          </a:xfrm>
+          <a:prstGeom prst="rect">
+            <a:avLst/>
+          </a:prstGeom>
+          <a:noFill/>
+        </p:spPr>
+        <p:txBody>
+          <a:bodyPr wrap="square">
+            <a:spAutoFit/>
+          </a:bodyPr>
+          <a:lstStyle/>
+          <a:p>
+            <a:pPr algn="l">
+              <a:defRPr sz="1000" b="0">
+                <a:solidFill>
+                  <a:srgbClr val="6B7B96"/>
+                </a:solidFill>
+                <a:latin typeface="Calibri"/>
+              </a:defRPr>
+            </a:pPr>
+            <a:r>
+              <a:t>AETHERIX — Interplanetary Communication Network</a:t>
+            </a:r>
+          </a:p>
+        </p:txBody>
+      </p:sp>
+      <p:sp>
+        <p:nvSpPr>
+          <p:cNvPr id="7" name="TextBox 6"/>
+          <p:cNvSpPr txBox="1"/>
+          <p:nvPr/>
+        </p:nvSpPr>
+        <p:spPr>
+          <a:xfrm>
+            <a:off x="10058400" y="6400800"/>
+            <a:ext cx="1828800" cy="365760"/>
+          </a:xfrm>
+          <a:prstGeom prst="rect">
+            <a:avLst/>
+          </a:prstGeom>
+          <a:noFill/>
+        </p:spPr>
+        <p:txBody>
+          <a:bodyPr wrap="square">
+            <a:spAutoFit/>
+          </a:bodyPr>
+          <a:lstStyle/>
+          <a:p>
+            <a:pPr algn="r">
+              <a:defRPr sz="1000" b="0">
+                <a:solidFill>
+                  <a:srgbClr val="6B7B96"/>
+                </a:solidFill>
+                <a:latin typeface="Calibri"/>
+              </a:defRPr>
+            </a:pPr>
+            <a:r>
+              <a:t>21 / 33</a:t>
+            </a:r>
+          </a:p>
+        </p:txBody>
+      </p:sp>
+    </p:spTree>
+  </p:cSld>
+  <p:transition spd="med" advClick="1">
+    <p:fade/>
+  </p:transition>
+  <p:clrMapOvr>
+    <a:masterClrMapping/>
+  </p:clrMapOvr>
+</p:sld>
+</file>
+
+<file path=ppt/slides/slide22.xml><?xml version="1.0" encoding="utf-8"?>
 <p:sld xmlns:a="http://schemas.openxmlformats.org/drawingml/2006/main" xmlns:p="http://schemas.openxmlformats.org/presentationml/2006/main" xmlns:r="http://schemas.openxmlformats.org/officeDocument/2006/relationships">
   <p:cSld>
     <p:bg>
@@ -15135,7 +15619,7 @@
               </a:defRPr>
             </a:pPr>
             <a:r>
-              <a:t>20 / 31</a:t>
+              <a:t>22 / 33</a:t>
             </a:r>
           </a:p>
         </p:txBody>
@@ -15151,7 +15635,7 @@
 </p:sld>
 </file>
 
-<file path=ppt/slides/slide21.xml><?xml version="1.0" encoding="utf-8"?>
+<file path=ppt/slides/slide23.xml><?xml version="1.0" encoding="utf-8"?>
 <p:sld xmlns:a="http://schemas.openxmlformats.org/drawingml/2006/main" xmlns:p="http://schemas.openxmlformats.org/presentationml/2006/main" xmlns:r="http://schemas.openxmlformats.org/officeDocument/2006/relationships">
   <p:cSld>
     <p:bg>
@@ -15448,7 +15932,7 @@
               </a:defRPr>
             </a:pPr>
             <a:r>
-              <a:t>21 / 31</a:t>
+              <a:t>23 / 33</a:t>
             </a:r>
           </a:p>
         </p:txBody>
@@ -15464,7 +15948,7 @@
 </p:sld>
 </file>
 
-<file path=ppt/slides/slide22.xml><?xml version="1.0" encoding="utf-8"?>
+<file path=ppt/slides/slide24.xml><?xml version="1.0" encoding="utf-8"?>
 <p:sld xmlns:a="http://schemas.openxmlformats.org/drawingml/2006/main" xmlns:p="http://schemas.openxmlformats.org/presentationml/2006/main" xmlns:r="http://schemas.openxmlformats.org/officeDocument/2006/relationships">
   <p:cSld>
     <p:bg>
@@ -16571,7 +17055,7 @@
               </a:defRPr>
             </a:pPr>
             <a:r>
-              <a:t>22 / 31</a:t>
+              <a:t>24 / 33</a:t>
             </a:r>
           </a:p>
         </p:txBody>
@@ -16587,7 +17071,7 @@
 </p:sld>
 </file>
 
-<file path=ppt/slides/slide23.xml><?xml version="1.0" encoding="utf-8"?>
+<file path=ppt/slides/slide25.xml><?xml version="1.0" encoding="utf-8"?>
 <p:sld xmlns:a="http://schemas.openxmlformats.org/drawingml/2006/main" xmlns:p="http://schemas.openxmlformats.org/presentationml/2006/main" xmlns:r="http://schemas.openxmlformats.org/officeDocument/2006/relationships">
   <p:cSld>
     <p:bg>
@@ -17226,7 +17710,7 @@
               </a:defRPr>
             </a:pPr>
             <a:r>
-              <a:t>23 / 31</a:t>
+              <a:t>25 / 33</a:t>
             </a:r>
           </a:p>
         </p:txBody>
@@ -17242,7 +17726,7 @@
 </p:sld>
 </file>
 
-<file path=ppt/slides/slide24.xml><?xml version="1.0" encoding="utf-8"?>
+<file path=ppt/slides/slide26.xml><?xml version="1.0" encoding="utf-8"?>
 <p:sld xmlns:a="http://schemas.openxmlformats.org/drawingml/2006/main" xmlns:p="http://schemas.openxmlformats.org/presentationml/2006/main" xmlns:r="http://schemas.openxmlformats.org/officeDocument/2006/relationships">
   <p:cSld>
     <p:bg>
@@ -17875,7 +18359,7 @@
               </a:defRPr>
             </a:pPr>
             <a:r>
-              <a:t>24 / 31</a:t>
+              <a:t>26 / 33</a:t>
             </a:r>
           </a:p>
         </p:txBody>
@@ -17891,7 +18375,7 @@
 </p:sld>
 </file>
 
-<file path=ppt/slides/slide25.xml><?xml version="1.0" encoding="utf-8"?>
+<file path=ppt/slides/slide27.xml><?xml version="1.0" encoding="utf-8"?>
 <p:sld xmlns:a="http://schemas.openxmlformats.org/drawingml/2006/main" xmlns:p="http://schemas.openxmlformats.org/presentationml/2006/main" xmlns:r="http://schemas.openxmlformats.org/officeDocument/2006/relationships">
   <p:cSld>
     <p:bg>
@@ -19048,7 +19532,7 @@
               </a:defRPr>
             </a:pPr>
             <a:r>
-              <a:t>25 / 31</a:t>
+              <a:t>27 / 33</a:t>
             </a:r>
           </a:p>
         </p:txBody>
@@ -19064,7 +19548,7 @@
 </p:sld>
 </file>
 
-<file path=ppt/slides/slide26.xml><?xml version="1.0" encoding="utf-8"?>
+<file path=ppt/slides/slide28.xml><?xml version="1.0" encoding="utf-8"?>
 <p:sld xmlns:a="http://schemas.openxmlformats.org/drawingml/2006/main" xmlns:p="http://schemas.openxmlformats.org/presentationml/2006/main" xmlns:r="http://schemas.openxmlformats.org/officeDocument/2006/relationships">
   <p:cSld>
     <p:bg>
@@ -20344,7 +20828,7 @@
               </a:defRPr>
             </a:pPr>
             <a:r>
-              <a:t>26 / 31</a:t>
+              <a:t>28 / 33</a:t>
             </a:r>
           </a:p>
         </p:txBody>
@@ -20360,7 +20844,7 @@
 </p:sld>
 </file>
 
-<file path=ppt/slides/slide27.xml><?xml version="1.0" encoding="utf-8"?>
+<file path=ppt/slides/slide29.xml><?xml version="1.0" encoding="utf-8"?>
 <p:sld xmlns:a="http://schemas.openxmlformats.org/drawingml/2006/main" xmlns:p="http://schemas.openxmlformats.org/presentationml/2006/main" xmlns:r="http://schemas.openxmlformats.org/officeDocument/2006/relationships">
   <p:cSld>
     <p:bg>
@@ -21181,7 +21665,7 @@
               </a:defRPr>
             </a:pPr>
             <a:r>
-              <a:t>27 / 31</a:t>
+              <a:t>29 / 33</a:t>
             </a:r>
           </a:p>
         </p:txBody>
@@ -21197,7 +21681,1086 @@
 </p:sld>
 </file>
 
-<file path=ppt/slides/slide28.xml><?xml version="1.0" encoding="utf-8"?>
+<file path=ppt/slides/slide3.xml><?xml version="1.0" encoding="utf-8"?>
+<p:sld xmlns:a="http://schemas.openxmlformats.org/drawingml/2006/main" xmlns:p="http://schemas.openxmlformats.org/presentationml/2006/main" xmlns:r="http://schemas.openxmlformats.org/officeDocument/2006/relationships">
+  <p:cSld>
+    <p:bg>
+      <p:bgPr>
+        <a:solidFill>
+          <a:srgbClr val="0B0E1A"/>
+        </a:solidFill>
+        <a:effectLst/>
+      </p:bgPr>
+    </p:bg>
+    <p:spTree>
+      <p:nvGrpSpPr>
+        <p:cNvPr id="1" name=""/>
+        <p:cNvGrpSpPr/>
+        <p:nvPr/>
+      </p:nvGrpSpPr>
+      <p:grpSpPr/>
+      <p:sp>
+        <p:nvSpPr>
+          <p:cNvPr id="2" name="TextBox 1"/>
+          <p:cNvSpPr txBox="1"/>
+          <p:nvPr/>
+        </p:nvSpPr>
+        <p:spPr>
+          <a:xfrm>
+            <a:off x="640080" y="274320"/>
+            <a:ext cx="10058400" cy="640080"/>
+          </a:xfrm>
+          <a:prstGeom prst="rect">
+            <a:avLst/>
+          </a:prstGeom>
+          <a:noFill/>
+        </p:spPr>
+        <p:txBody>
+          <a:bodyPr wrap="square">
+            <a:spAutoFit/>
+          </a:bodyPr>
+          <a:lstStyle/>
+          <a:p>
+            <a:pPr algn="l">
+              <a:defRPr sz="3600" b="1">
+                <a:solidFill>
+                  <a:srgbClr val="FFFFFF"/>
+                </a:solidFill>
+                <a:latin typeface="Calibri"/>
+              </a:defRPr>
+            </a:pPr>
+            <a:r>
+              <a:t>WHAT IS AETHERIX?</a:t>
+            </a:r>
+          </a:p>
+        </p:txBody>
+      </p:sp>
+      <p:sp>
+        <p:nvSpPr>
+          <p:cNvPr id="3" name="Rectangle 2"/>
+          <p:cNvSpPr/>
+          <p:nvPr/>
+        </p:nvSpPr>
+        <p:spPr>
+          <a:xfrm>
+            <a:off x="640080" y="868680"/>
+            <a:ext cx="2743200" cy="38100"/>
+          </a:xfrm>
+          <a:prstGeom prst="rect">
+            <a:avLst/>
+          </a:prstGeom>
+          <a:solidFill>
+            <a:srgbClr val="00D4AA"/>
+          </a:solidFill>
+          <a:ln>
+            <a:noFill/>
+          </a:ln>
+          <a:effectLst/>
+        </p:spPr>
+        <p:style>
+          <a:lnRef idx="1">
+            <a:schemeClr val="accent1"/>
+          </a:lnRef>
+          <a:fillRef idx="3">
+            <a:schemeClr val="accent1"/>
+          </a:fillRef>
+          <a:effectRef idx="2">
+            <a:schemeClr val="accent1"/>
+          </a:effectRef>
+          <a:fontRef idx="minor">
+            <a:schemeClr val="lt1"/>
+          </a:fontRef>
+        </p:style>
+        <p:txBody>
+          <a:bodyPr rtlCol="0" anchor="ctr"/>
+          <a:lstStyle/>
+          <a:p>
+            <a:pPr algn="ctr"/>
+          </a:p>
+        </p:txBody>
+      </p:sp>
+      <p:sp>
+        <p:nvSpPr>
+          <p:cNvPr id="4" name="TextBox 3"/>
+          <p:cNvSpPr txBox="1"/>
+          <p:nvPr/>
+        </p:nvSpPr>
+        <p:spPr>
+          <a:xfrm>
+            <a:off x="640080" y="960120"/>
+            <a:ext cx="10058400" cy="365760"/>
+          </a:xfrm>
+          <a:prstGeom prst="rect">
+            <a:avLst/>
+          </a:prstGeom>
+          <a:noFill/>
+        </p:spPr>
+        <p:txBody>
+          <a:bodyPr wrap="square">
+            <a:spAutoFit/>
+          </a:bodyPr>
+          <a:lstStyle/>
+          <a:p>
+            <a:pPr algn="l">
+              <a:defRPr sz="1600" b="0">
+                <a:solidFill>
+                  <a:srgbClr val="6B7B96"/>
+                </a:solidFill>
+                <a:latin typeface="Calibri"/>
+              </a:defRPr>
+            </a:pPr>
+            <a:r>
+              <a:t>Overview &amp; The Problem</a:t>
+            </a:r>
+          </a:p>
+        </p:txBody>
+      </p:sp>
+      <p:sp>
+        <p:nvSpPr>
+          <p:cNvPr id="5" name="TextBox 4"/>
+          <p:cNvSpPr txBox="1"/>
+          <p:nvPr/>
+        </p:nvSpPr>
+        <p:spPr>
+          <a:xfrm>
+            <a:off x="457200" y="6601968"/>
+            <a:ext cx="11430000" cy="228600"/>
+          </a:xfrm>
+          <a:prstGeom prst="rect">
+            <a:avLst/>
+          </a:prstGeom>
+          <a:noFill/>
+        </p:spPr>
+        <p:txBody>
+          <a:bodyPr wrap="square">
+            <a:spAutoFit/>
+          </a:bodyPr>
+          <a:lstStyle/>
+          <a:p>
+            <a:pPr algn="l">
+              <a:defRPr sz="800" b="0">
+                <a:solidFill>
+                  <a:srgbClr val="6B7B96"/>
+                </a:solidFill>
+                <a:latin typeface="Calibri"/>
+              </a:defRPr>
+            </a:pPr>
+            <a:r>
+              <a:t>[1] NASA MRN 2024  ·  [3] JPL Horizons  ·  [12] RFC 4838  ·  [A2] topology.py</a:t>
+            </a:r>
+          </a:p>
+        </p:txBody>
+      </p:sp>
+      <p:sp>
+        <p:nvSpPr>
+          <p:cNvPr id="6" name="TextBox 5"/>
+          <p:cNvSpPr txBox="1"/>
+          <p:nvPr/>
+        </p:nvSpPr>
+        <p:spPr>
+          <a:xfrm>
+            <a:off x="457200" y="6400800"/>
+            <a:ext cx="4572000" cy="365760"/>
+          </a:xfrm>
+          <a:prstGeom prst="rect">
+            <a:avLst/>
+          </a:prstGeom>
+          <a:noFill/>
+        </p:spPr>
+        <p:txBody>
+          <a:bodyPr wrap="square">
+            <a:spAutoFit/>
+          </a:bodyPr>
+          <a:lstStyle/>
+          <a:p>
+            <a:pPr algn="l">
+              <a:defRPr sz="1000" b="0">
+                <a:solidFill>
+                  <a:srgbClr val="6B7B96"/>
+                </a:solidFill>
+                <a:latin typeface="Calibri"/>
+              </a:defRPr>
+            </a:pPr>
+            <a:r>
+              <a:t>AETHERIX — Interplanetary Communication Network</a:t>
+            </a:r>
+          </a:p>
+        </p:txBody>
+      </p:sp>
+      <p:sp>
+        <p:nvSpPr>
+          <p:cNvPr id="7" name="TextBox 6"/>
+          <p:cNvSpPr txBox="1"/>
+          <p:nvPr/>
+        </p:nvSpPr>
+        <p:spPr>
+          <a:xfrm>
+            <a:off x="10058400" y="6400800"/>
+            <a:ext cx="1828800" cy="365760"/>
+          </a:xfrm>
+          <a:prstGeom prst="rect">
+            <a:avLst/>
+          </a:prstGeom>
+          <a:noFill/>
+        </p:spPr>
+        <p:txBody>
+          <a:bodyPr wrap="square">
+            <a:spAutoFit/>
+          </a:bodyPr>
+          <a:lstStyle/>
+          <a:p>
+            <a:pPr algn="r">
+              <a:defRPr sz="1000" b="0">
+                <a:solidFill>
+                  <a:srgbClr val="6B7B96"/>
+                </a:solidFill>
+                <a:latin typeface="Calibri"/>
+              </a:defRPr>
+            </a:pPr>
+            <a:r>
+              <a:t>3 / 33</a:t>
+            </a:r>
+          </a:p>
+        </p:txBody>
+      </p:sp>
+      <p:sp>
+        <p:nvSpPr>
+          <p:cNvPr id="8" name="Rounded Rectangle 7"/>
+          <p:cNvSpPr/>
+          <p:nvPr/>
+        </p:nvSpPr>
+        <p:spPr>
+          <a:xfrm>
+            <a:off x="640080" y="1463040"/>
+            <a:ext cx="5120640" cy="3474720"/>
+          </a:xfrm>
+          <a:prstGeom prst="roundRect">
+            <a:avLst/>
+          </a:prstGeom>
+          <a:solidFill>
+            <a:srgbClr val="141B2D"/>
+          </a:solidFill>
+          <a:ln w="12700">
+            <a:solidFill>
+              <a:srgbClr val="009EFF"/>
+            </a:solidFill>
+          </a:ln>
+          <a:effectLst/>
+        </p:spPr>
+        <p:style>
+          <a:lnRef idx="1">
+            <a:schemeClr val="accent1"/>
+          </a:lnRef>
+          <a:fillRef idx="3">
+            <a:schemeClr val="accent1"/>
+          </a:fillRef>
+          <a:effectRef idx="2">
+            <a:schemeClr val="accent1"/>
+          </a:effectRef>
+          <a:fontRef idx="minor">
+            <a:schemeClr val="lt1"/>
+          </a:fontRef>
+        </p:style>
+        <p:txBody>
+          <a:bodyPr rtlCol="0" anchor="ctr" wrap="square" lIns="137160" rIns="137160" tIns="91440" bIns="91440"/>
+          <a:lstStyle/>
+          <a:p>
+            <a:pPr algn="ctr">
+              <a:defRPr sz="1600" b="1">
+                <a:solidFill>
+                  <a:srgbClr val="009EFF"/>
+                </a:solidFill>
+                <a:latin typeface="Calibri"/>
+              </a:defRPr>
+            </a:pPr>
+          </a:p>
+        </p:txBody>
+      </p:sp>
+      <p:sp>
+        <p:nvSpPr>
+          <p:cNvPr id="9" name="TextBox 8"/>
+          <p:cNvSpPr txBox="1"/>
+          <p:nvPr/>
+        </p:nvSpPr>
+        <p:spPr>
+          <a:xfrm>
+            <a:off x="822960" y="1554480"/>
+            <a:ext cx="4754880" cy="411480"/>
+          </a:xfrm>
+          <a:prstGeom prst="rect">
+            <a:avLst/>
+          </a:prstGeom>
+          <a:noFill/>
+        </p:spPr>
+        <p:txBody>
+          <a:bodyPr wrap="square">
+            <a:spAutoFit/>
+          </a:bodyPr>
+          <a:lstStyle/>
+          <a:p>
+            <a:pPr algn="l">
+              <a:defRPr sz="1800" b="1">
+                <a:solidFill>
+                  <a:srgbClr val="009EFF"/>
+                </a:solidFill>
+                <a:latin typeface="Calibri"/>
+              </a:defRPr>
+            </a:pPr>
+            <a:r>
+              <a:t>What is AETHERIX?</a:t>
+            </a:r>
+          </a:p>
+        </p:txBody>
+      </p:sp>
+      <p:sp>
+        <p:nvSpPr>
+          <p:cNvPr id="10" name="Rectangle 9"/>
+          <p:cNvSpPr/>
+          <p:nvPr/>
+        </p:nvSpPr>
+        <p:spPr>
+          <a:xfrm>
+            <a:off x="822960" y="1920240"/>
+            <a:ext cx="1828800" cy="25400"/>
+          </a:xfrm>
+          <a:prstGeom prst="rect">
+            <a:avLst/>
+          </a:prstGeom>
+          <a:solidFill>
+            <a:srgbClr val="009EFF"/>
+          </a:solidFill>
+          <a:ln>
+            <a:noFill/>
+          </a:ln>
+          <a:effectLst/>
+        </p:spPr>
+        <p:style>
+          <a:lnRef idx="1">
+            <a:schemeClr val="accent1"/>
+          </a:lnRef>
+          <a:fillRef idx="3">
+            <a:schemeClr val="accent1"/>
+          </a:fillRef>
+          <a:effectRef idx="2">
+            <a:schemeClr val="accent1"/>
+          </a:effectRef>
+          <a:fontRef idx="minor">
+            <a:schemeClr val="lt1"/>
+          </a:fontRef>
+        </p:style>
+        <p:txBody>
+          <a:bodyPr rtlCol="0" anchor="ctr"/>
+          <a:lstStyle/>
+          <a:p>
+            <a:pPr algn="ctr"/>
+          </a:p>
+        </p:txBody>
+      </p:sp>
+      <p:sp>
+        <p:nvSpPr>
+          <p:cNvPr id="11" name="TextBox 10"/>
+          <p:cNvSpPr txBox="1"/>
+          <p:nvPr/>
+        </p:nvSpPr>
+        <p:spPr>
+          <a:xfrm>
+            <a:off x="822960" y="2011680"/>
+            <a:ext cx="4754880" cy="457200"/>
+          </a:xfrm>
+          <a:prstGeom prst="rect">
+            <a:avLst/>
+          </a:prstGeom>
+          <a:noFill/>
+        </p:spPr>
+        <p:txBody>
+          <a:bodyPr wrap="square">
+            <a:spAutoFit/>
+          </a:bodyPr>
+          <a:lstStyle/>
+          <a:p>
+            <a:pPr algn="l">
+              <a:defRPr sz="1000" b="0">
+                <a:solidFill>
+                  <a:srgbClr val="B0B8CC"/>
+                </a:solidFill>
+                <a:latin typeface="Calibri"/>
+              </a:defRPr>
+            </a:pPr>
+            <a:r>
+              <a:t>Autonomous Extraterrestrial High-throughput Enhancing</a:t>
+            </a:r>
+            <a:br/>
+            <a:r>
+              <a:t>Routing and Inter-planetary eXchange</a:t>
+            </a:r>
+          </a:p>
+        </p:txBody>
+      </p:sp>
+      <p:sp>
+        <p:nvSpPr>
+          <p:cNvPr id="12" name="TextBox 11"/>
+          <p:cNvSpPr txBox="1"/>
+          <p:nvPr/>
+        </p:nvSpPr>
+        <p:spPr>
+          <a:xfrm>
+            <a:off x="822960" y="2468880"/>
+            <a:ext cx="4754880" cy="457200"/>
+          </a:xfrm>
+          <a:prstGeom prst="rect">
+            <a:avLst/>
+          </a:prstGeom>
+          <a:noFill/>
+        </p:spPr>
+        <p:txBody>
+          <a:bodyPr wrap="square">
+            <a:spAutoFit/>
+          </a:bodyPr>
+          <a:lstStyle/>
+          <a:p>
+            <a:pPr algn="l">
+              <a:defRPr sz="1000" b="0">
+                <a:solidFill>
+                  <a:srgbClr val="B0B8CC"/>
+                </a:solidFill>
+                <a:latin typeface="Calibri"/>
+              </a:defRPr>
+            </a:pPr>
+            <a:r>
+              <a:t>An architecture for delay-tolerant networking (DTN)</a:t>
+            </a:r>
+            <a:br/>
+            <a:r>
+              <a:t>between Earth and Mars</a:t>
+            </a:r>
+          </a:p>
+        </p:txBody>
+      </p:sp>
+      <p:sp>
+        <p:nvSpPr>
+          <p:cNvPr id="13" name="TextBox 12"/>
+          <p:cNvSpPr txBox="1"/>
+          <p:nvPr/>
+        </p:nvSpPr>
+        <p:spPr>
+          <a:xfrm>
+            <a:off x="822960" y="2926080"/>
+            <a:ext cx="4754880" cy="457200"/>
+          </a:xfrm>
+          <a:prstGeom prst="rect">
+            <a:avLst/>
+          </a:prstGeom>
+          <a:noFill/>
+        </p:spPr>
+        <p:txBody>
+          <a:bodyPr wrap="square">
+            <a:spAutoFit/>
+          </a:bodyPr>
+          <a:lstStyle/>
+          <a:p>
+            <a:pPr algn="l">
+              <a:defRPr sz="1000" b="0">
+                <a:solidFill>
+                  <a:srgbClr val="B0B8CC"/>
+                </a:solidFill>
+                <a:latin typeface="Calibri"/>
+              </a:defRPr>
+            </a:pPr>
+            <a:r>
+              <a:t>Replaces static Contact Graph Routing with</a:t>
+            </a:r>
+            <a:br/>
+            <a:r>
+              <a:t>reinforcement-learning-based adaptive routing</a:t>
+            </a:r>
+          </a:p>
+        </p:txBody>
+      </p:sp>
+      <p:sp>
+        <p:nvSpPr>
+          <p:cNvPr id="14" name="TextBox 13"/>
+          <p:cNvSpPr txBox="1"/>
+          <p:nvPr/>
+        </p:nvSpPr>
+        <p:spPr>
+          <a:xfrm>
+            <a:off x="822960" y="3383280"/>
+            <a:ext cx="4754880" cy="457200"/>
+          </a:xfrm>
+          <a:prstGeom prst="rect">
+            <a:avLst/>
+          </a:prstGeom>
+          <a:noFill/>
+        </p:spPr>
+        <p:txBody>
+          <a:bodyPr wrap="square">
+            <a:spAutoFit/>
+          </a:bodyPr>
+          <a:lstStyle/>
+          <a:p>
+            <a:pPr algn="l">
+              <a:defRPr sz="1000" b="0">
+                <a:solidFill>
+                  <a:srgbClr val="B0B8CC"/>
+                </a:solidFill>
+                <a:latin typeface="Calibri"/>
+              </a:defRPr>
+            </a:pPr>
+            <a:r>
+              <a:t>Secures links via Quantum Key Distribution</a:t>
+            </a:r>
+            <a:br/>
+            <a:r>
+              <a:t>(BB84 &amp; E91 protocols with repeater chains)</a:t>
+            </a:r>
+          </a:p>
+        </p:txBody>
+      </p:sp>
+      <p:sp>
+        <p:nvSpPr>
+          <p:cNvPr id="15" name="TextBox 14"/>
+          <p:cNvSpPr txBox="1"/>
+          <p:nvPr/>
+        </p:nvSpPr>
+        <p:spPr>
+          <a:xfrm>
+            <a:off x="822960" y="3840480"/>
+            <a:ext cx="4754880" cy="457200"/>
+          </a:xfrm>
+          <a:prstGeom prst="rect">
+            <a:avLst/>
+          </a:prstGeom>
+          <a:noFill/>
+        </p:spPr>
+        <p:txBody>
+          <a:bodyPr wrap="square">
+            <a:spAutoFit/>
+          </a:bodyPr>
+          <a:lstStyle/>
+          <a:p>
+            <a:pPr algn="l">
+              <a:defRPr sz="1000" b="0">
+                <a:solidFill>
+                  <a:srgbClr val="B0B8CC"/>
+                </a:solidFill>
+                <a:latin typeface="Calibri"/>
+              </a:defRPr>
+            </a:pPr>
+            <a:r>
+              <a:t>Hybrid optical/RF communications across</a:t>
+            </a:r>
+            <a:br/>
+            <a:r>
+              <a:t>a 5-tier, 241-node interplanetary topology</a:t>
+            </a:r>
+          </a:p>
+        </p:txBody>
+      </p:sp>
+      <p:sp>
+        <p:nvSpPr>
+          <p:cNvPr id="16" name="TextBox 15"/>
+          <p:cNvSpPr txBox="1"/>
+          <p:nvPr/>
+        </p:nvSpPr>
+        <p:spPr>
+          <a:xfrm>
+            <a:off x="822960" y="4297680"/>
+            <a:ext cx="4754880" cy="457200"/>
+          </a:xfrm>
+          <a:prstGeom prst="rect">
+            <a:avLst/>
+          </a:prstGeom>
+          <a:noFill/>
+        </p:spPr>
+        <p:txBody>
+          <a:bodyPr wrap="square">
+            <a:spAutoFit/>
+          </a:bodyPr>
+          <a:lstStyle/>
+          <a:p>
+            <a:pPr algn="l">
+              <a:defRPr sz="1000" b="0">
+                <a:solidFill>
+                  <a:srgbClr val="B0B8CC"/>
+                </a:solidFill>
+                <a:latin typeface="Calibri"/>
+              </a:defRPr>
+            </a:pPr>
+            <a:r>
+              <a:t>Open-source, standards-compliant (CCSDS, IETF)</a:t>
+            </a:r>
+            <a:br/>
+            <a:r>
+              <a:t>research platform for deep-space networking</a:t>
+            </a:r>
+          </a:p>
+        </p:txBody>
+      </p:sp>
+      <p:sp>
+        <p:nvSpPr>
+          <p:cNvPr id="17" name="Rounded Rectangle 16"/>
+          <p:cNvSpPr/>
+          <p:nvPr/>
+        </p:nvSpPr>
+        <p:spPr>
+          <a:xfrm>
+            <a:off x="6126480" y="1463040"/>
+            <a:ext cx="5120640" cy="3474720"/>
+          </a:xfrm>
+          <a:prstGeom prst="roundRect">
+            <a:avLst/>
+          </a:prstGeom>
+          <a:solidFill>
+            <a:srgbClr val="141B2D"/>
+          </a:solidFill>
+          <a:ln w="12700">
+            <a:solidFill>
+              <a:srgbClr val="FF4D4D"/>
+            </a:solidFill>
+          </a:ln>
+          <a:effectLst/>
+        </p:spPr>
+        <p:style>
+          <a:lnRef idx="1">
+            <a:schemeClr val="accent1"/>
+          </a:lnRef>
+          <a:fillRef idx="3">
+            <a:schemeClr val="accent1"/>
+          </a:fillRef>
+          <a:effectRef idx="2">
+            <a:schemeClr val="accent1"/>
+          </a:effectRef>
+          <a:fontRef idx="minor">
+            <a:schemeClr val="lt1"/>
+          </a:fontRef>
+        </p:style>
+        <p:txBody>
+          <a:bodyPr rtlCol="0" anchor="ctr" wrap="square" lIns="137160" rIns="137160" tIns="91440" bIns="91440"/>
+          <a:lstStyle/>
+          <a:p>
+            <a:pPr algn="ctr">
+              <a:defRPr sz="1600" b="1">
+                <a:solidFill>
+                  <a:srgbClr val="009EFF"/>
+                </a:solidFill>
+                <a:latin typeface="Calibri"/>
+              </a:defRPr>
+            </a:pPr>
+          </a:p>
+        </p:txBody>
+      </p:sp>
+      <p:sp>
+        <p:nvSpPr>
+          <p:cNvPr id="18" name="TextBox 17"/>
+          <p:cNvSpPr txBox="1"/>
+          <p:nvPr/>
+        </p:nvSpPr>
+        <p:spPr>
+          <a:xfrm>
+            <a:off x="6309360" y="1554480"/>
+            <a:ext cx="4754880" cy="411480"/>
+          </a:xfrm>
+          <a:prstGeom prst="rect">
+            <a:avLst/>
+          </a:prstGeom>
+          <a:noFill/>
+        </p:spPr>
+        <p:txBody>
+          <a:bodyPr wrap="square">
+            <a:spAutoFit/>
+          </a:bodyPr>
+          <a:lstStyle/>
+          <a:p>
+            <a:pPr algn="l">
+              <a:defRPr sz="1800" b="1">
+                <a:solidFill>
+                  <a:srgbClr val="FF4D4D"/>
+                </a:solidFill>
+                <a:latin typeface="Calibri"/>
+              </a:defRPr>
+            </a:pPr>
+            <a:r>
+              <a:t>The Problem</a:t>
+            </a:r>
+          </a:p>
+        </p:txBody>
+      </p:sp>
+      <p:sp>
+        <p:nvSpPr>
+          <p:cNvPr id="19" name="Rectangle 18"/>
+          <p:cNvSpPr/>
+          <p:nvPr/>
+        </p:nvSpPr>
+        <p:spPr>
+          <a:xfrm>
+            <a:off x="6309360" y="1920240"/>
+            <a:ext cx="1828800" cy="25400"/>
+          </a:xfrm>
+          <a:prstGeom prst="rect">
+            <a:avLst/>
+          </a:prstGeom>
+          <a:solidFill>
+            <a:srgbClr val="FF4D4D"/>
+          </a:solidFill>
+          <a:ln>
+            <a:noFill/>
+          </a:ln>
+          <a:effectLst/>
+        </p:spPr>
+        <p:style>
+          <a:lnRef idx="1">
+            <a:schemeClr val="accent1"/>
+          </a:lnRef>
+          <a:fillRef idx="3">
+            <a:schemeClr val="accent1"/>
+          </a:fillRef>
+          <a:effectRef idx="2">
+            <a:schemeClr val="accent1"/>
+          </a:effectRef>
+          <a:fontRef idx="minor">
+            <a:schemeClr val="lt1"/>
+          </a:fontRef>
+        </p:style>
+        <p:txBody>
+          <a:bodyPr rtlCol="0" anchor="ctr"/>
+          <a:lstStyle/>
+          <a:p>
+            <a:pPr algn="ctr"/>
+          </a:p>
+        </p:txBody>
+      </p:sp>
+      <p:sp>
+        <p:nvSpPr>
+          <p:cNvPr id="20" name="TextBox 19"/>
+          <p:cNvSpPr txBox="1"/>
+          <p:nvPr/>
+        </p:nvSpPr>
+        <p:spPr>
+          <a:xfrm>
+            <a:off x="6309360" y="2011680"/>
+            <a:ext cx="4754880" cy="457200"/>
+          </a:xfrm>
+          <a:prstGeom prst="rect">
+            <a:avLst/>
+          </a:prstGeom>
+          <a:noFill/>
+        </p:spPr>
+        <p:txBody>
+          <a:bodyPr wrap="square">
+            <a:spAutoFit/>
+          </a:bodyPr>
+          <a:lstStyle/>
+          <a:p>
+            <a:pPr algn="l">
+              <a:defRPr sz="1000" b="0">
+                <a:solidFill>
+                  <a:srgbClr val="B0B8CC"/>
+                </a:solidFill>
+                <a:latin typeface="Calibri"/>
+              </a:defRPr>
+            </a:pPr>
+            <a:r>
+              <a:t>Earth–Mars distance varies from 54.6M to 401M km</a:t>
+            </a:r>
+            <a:br/>
+            <a:r>
+              <a:t>— a 7x range swing every 780 days</a:t>
+            </a:r>
+          </a:p>
+        </p:txBody>
+      </p:sp>
+      <p:sp>
+        <p:nvSpPr>
+          <p:cNvPr id="21" name="TextBox 20"/>
+          <p:cNvSpPr txBox="1"/>
+          <p:nvPr/>
+        </p:nvSpPr>
+        <p:spPr>
+          <a:xfrm>
+            <a:off x="6309360" y="2468880"/>
+            <a:ext cx="4754880" cy="457200"/>
+          </a:xfrm>
+          <a:prstGeom prst="rect">
+            <a:avLst/>
+          </a:prstGeom>
+          <a:noFill/>
+        </p:spPr>
+        <p:txBody>
+          <a:bodyPr wrap="square">
+            <a:spAutoFit/>
+          </a:bodyPr>
+          <a:lstStyle/>
+          <a:p>
+            <a:pPr algn="l">
+              <a:defRPr sz="1000" b="0">
+                <a:solidFill>
+                  <a:srgbClr val="B0B8CC"/>
+                </a:solidFill>
+                <a:latin typeface="Calibri"/>
+              </a:defRPr>
+            </a:pPr>
+            <a:r>
+              <a:t>One-way light delay is 3–22 minutes;</a:t>
+            </a:r>
+            <a:br/>
+            <a:r>
+              <a:t>round-trip TCP ACK is 6–44 minutes</a:t>
+            </a:r>
+          </a:p>
+        </p:txBody>
+      </p:sp>
+      <p:sp>
+        <p:nvSpPr>
+          <p:cNvPr id="22" name="TextBox 21"/>
+          <p:cNvSpPr txBox="1"/>
+          <p:nvPr/>
+        </p:nvSpPr>
+        <p:spPr>
+          <a:xfrm>
+            <a:off x="6309360" y="2926080"/>
+            <a:ext cx="4754880" cy="457200"/>
+          </a:xfrm>
+          <a:prstGeom prst="rect">
+            <a:avLst/>
+          </a:prstGeom>
+          <a:noFill/>
+        </p:spPr>
+        <p:txBody>
+          <a:bodyPr wrap="square">
+            <a:spAutoFit/>
+          </a:bodyPr>
+          <a:lstStyle/>
+          <a:p>
+            <a:pPr algn="l">
+              <a:defRPr sz="1000" b="0">
+                <a:solidFill>
+                  <a:srgbClr val="B0B8CC"/>
+                </a:solidFill>
+                <a:latin typeface="Calibri"/>
+              </a:defRPr>
+            </a:pPr>
+            <a:r>
+              <a:t>Solar conjunction causes ~2-week communication</a:t>
+            </a:r>
+            <a:br/>
+            <a:r>
+              <a:t>blackouts twice per synodic period</a:t>
+            </a:r>
+          </a:p>
+        </p:txBody>
+      </p:sp>
+      <p:sp>
+        <p:nvSpPr>
+          <p:cNvPr id="23" name="TextBox 22"/>
+          <p:cNvSpPr txBox="1"/>
+          <p:nvPr/>
+        </p:nvSpPr>
+        <p:spPr>
+          <a:xfrm>
+            <a:off x="6309360" y="3383280"/>
+            <a:ext cx="4754880" cy="457200"/>
+          </a:xfrm>
+          <a:prstGeom prst="rect">
+            <a:avLst/>
+          </a:prstGeom>
+          <a:noFill/>
+        </p:spPr>
+        <p:txBody>
+          <a:bodyPr wrap="square">
+            <a:spAutoFit/>
+          </a:bodyPr>
+          <a:lstStyle/>
+          <a:p>
+            <a:pPr algn="l">
+              <a:defRPr sz="1000" b="0">
+                <a:solidFill>
+                  <a:srgbClr val="B0B8CC"/>
+                </a:solidFill>
+                <a:latin typeface="Calibri"/>
+              </a:defRPr>
+            </a:pPr>
+            <a:r>
+              <a:t>Deep-space links are inherently intermittent:</a:t>
+            </a:r>
+            <a:br/>
+            <a:r>
+              <a:t>no continuous end-to-end path exists</a:t>
+            </a:r>
+          </a:p>
+        </p:txBody>
+      </p:sp>
+      <p:sp>
+        <p:nvSpPr>
+          <p:cNvPr id="24" name="TextBox 23"/>
+          <p:cNvSpPr txBox="1"/>
+          <p:nvPr/>
+        </p:nvSpPr>
+        <p:spPr>
+          <a:xfrm>
+            <a:off x="6309360" y="3840480"/>
+            <a:ext cx="4754880" cy="457200"/>
+          </a:xfrm>
+          <a:prstGeom prst="rect">
+            <a:avLst/>
+          </a:prstGeom>
+          <a:noFill/>
+        </p:spPr>
+        <p:txBody>
+          <a:bodyPr wrap="square">
+            <a:spAutoFit/>
+          </a:bodyPr>
+          <a:lstStyle/>
+          <a:p>
+            <a:pPr algn="l">
+              <a:defRPr sz="1000" b="0">
+                <a:solidFill>
+                  <a:srgbClr val="B0B8CC"/>
+                </a:solidFill>
+                <a:latin typeface="Calibri"/>
+              </a:defRPr>
+            </a:pPr>
+            <a:r>
+              <a:t>Static routing cannot adapt to dynamic</a:t>
+            </a:r>
+            <a:br/>
+            <a:r>
+              <a:t>contact schedules and link degradation</a:t>
+            </a:r>
+          </a:p>
+        </p:txBody>
+      </p:sp>
+      <p:sp>
+        <p:nvSpPr>
+          <p:cNvPr id="25" name="TextBox 24"/>
+          <p:cNvSpPr txBox="1"/>
+          <p:nvPr/>
+        </p:nvSpPr>
+        <p:spPr>
+          <a:xfrm>
+            <a:off x="6309360" y="4297680"/>
+            <a:ext cx="4754880" cy="457200"/>
+          </a:xfrm>
+          <a:prstGeom prst="rect">
+            <a:avLst/>
+          </a:prstGeom>
+          <a:noFill/>
+        </p:spPr>
+        <p:txBody>
+          <a:bodyPr wrap="square">
+            <a:spAutoFit/>
+          </a:bodyPr>
+          <a:lstStyle/>
+          <a:p>
+            <a:pPr algn="l">
+              <a:defRPr sz="1000" b="0">
+                <a:solidFill>
+                  <a:srgbClr val="B0B8CC"/>
+                </a:solidFill>
+                <a:latin typeface="Calibri"/>
+              </a:defRPr>
+            </a:pPr>
+            <a:r>
+              <a:t>Classical key exchange is infeasible across</a:t>
+            </a:r>
+            <a:br/>
+            <a:r>
+              <a:t>interplanetary distances</a:t>
+            </a:r>
+          </a:p>
+        </p:txBody>
+      </p:sp>
+      <p:sp>
+        <p:nvSpPr>
+          <p:cNvPr id="26" name="Rounded Rectangle 25"/>
+          <p:cNvSpPr/>
+          <p:nvPr/>
+        </p:nvSpPr>
+        <p:spPr>
+          <a:xfrm>
+            <a:off x="640080" y="5212080"/>
+            <a:ext cx="10607040" cy="822960"/>
+          </a:xfrm>
+          <a:prstGeom prst="roundRect">
+            <a:avLst/>
+          </a:prstGeom>
+          <a:solidFill>
+            <a:srgbClr val="009EFF"/>
+          </a:solidFill>
+          <a:ln>
+            <a:noFill/>
+          </a:ln>
+          <a:effectLst/>
+        </p:spPr>
+        <p:style>
+          <a:lnRef idx="1">
+            <a:schemeClr val="accent1"/>
+          </a:lnRef>
+          <a:fillRef idx="3">
+            <a:schemeClr val="accent1"/>
+          </a:fillRef>
+          <a:effectRef idx="2">
+            <a:schemeClr val="accent1"/>
+          </a:effectRef>
+          <a:fontRef idx="minor">
+            <a:schemeClr val="lt1"/>
+          </a:fontRef>
+        </p:style>
+        <p:txBody>
+          <a:bodyPr rtlCol="0" anchor="ctr"/>
+          <a:lstStyle/>
+          <a:p>
+            <a:pPr algn="ctr"/>
+          </a:p>
+        </p:txBody>
+      </p:sp>
+      <p:sp>
+        <p:nvSpPr>
+          <p:cNvPr id="27" name="TextBox 26"/>
+          <p:cNvSpPr txBox="1"/>
+          <p:nvPr/>
+        </p:nvSpPr>
+        <p:spPr>
+          <a:xfrm>
+            <a:off x="914400" y="5303520"/>
+            <a:ext cx="10058400" cy="640080"/>
+          </a:xfrm>
+          <a:prstGeom prst="rect">
+            <a:avLst/>
+          </a:prstGeom>
+          <a:noFill/>
+        </p:spPr>
+        <p:txBody>
+          <a:bodyPr wrap="square">
+            <a:spAutoFit/>
+          </a:bodyPr>
+          <a:lstStyle/>
+          <a:p>
+            <a:pPr algn="ctr">
+              <a:defRPr sz="1300" b="1">
+                <a:solidFill>
+                  <a:srgbClr val="FFFFFF"/>
+                </a:solidFill>
+                <a:latin typeface="Calibri"/>
+              </a:defRPr>
+            </a:pPr>
+            <a:r>
+              <a:t>AETHERIX addresses every one of these challenges — harnessing DTN store-and-forward, AI-driven adaptive routing, quantum-secured key distribution, and hybrid optical/RF links.</a:t>
+            </a:r>
+          </a:p>
+        </p:txBody>
+      </p:sp>
+    </p:spTree>
+  </p:cSld>
+  <p:transition spd="med" advClick="1">
+    <p:fade/>
+  </p:transition>
+  <p:clrMapOvr>
+    <a:masterClrMapping/>
+  </p:clrMapOvr>
+</p:sld>
+</file>
+
+<file path=ppt/slides/slide30.xml><?xml version="1.0" encoding="utf-8"?>
 <p:sld xmlns:a="http://schemas.openxmlformats.org/drawingml/2006/main" xmlns:p="http://schemas.openxmlformats.org/presentationml/2006/main" xmlns:r="http://schemas.openxmlformats.org/officeDocument/2006/relationships">
   <p:cSld>
     <p:bg>
@@ -22363,2732 +23926,7 @@
               </a:defRPr>
             </a:pPr>
             <a:r>
-              <a:t>28 / 31</a:t>
-            </a:r>
-          </a:p>
-        </p:txBody>
-      </p:sp>
-    </p:spTree>
-  </p:cSld>
-  <p:transition spd="med" advClick="1">
-    <p:fade/>
-  </p:transition>
-  <p:clrMapOvr>
-    <a:masterClrMapping/>
-  </p:clrMapOvr>
-</p:sld>
-</file>
-
-<file path=ppt/slides/slide29.xml><?xml version="1.0" encoding="utf-8"?>
-<p:sld xmlns:a="http://schemas.openxmlformats.org/drawingml/2006/main" xmlns:p="http://schemas.openxmlformats.org/presentationml/2006/main" xmlns:r="http://schemas.openxmlformats.org/officeDocument/2006/relationships">
-  <p:cSld>
-    <p:bg>
-      <p:bgPr>
-        <a:solidFill>
-          <a:srgbClr val="0B0E1A"/>
-        </a:solidFill>
-        <a:effectLst/>
-      </p:bgPr>
-    </p:bg>
-    <p:spTree>
-      <p:nvGrpSpPr>
-        <p:cNvPr id="1" name=""/>
-        <p:cNvGrpSpPr/>
-        <p:nvPr/>
-      </p:nvGrpSpPr>
-      <p:grpSpPr/>
-      <p:sp>
-        <p:nvSpPr>
-          <p:cNvPr id="2" name="TextBox 1"/>
-          <p:cNvSpPr txBox="1"/>
-          <p:nvPr/>
-        </p:nvSpPr>
-        <p:spPr>
-          <a:xfrm>
-            <a:off x="640080" y="274320"/>
-            <a:ext cx="10972800" cy="640080"/>
-          </a:xfrm>
-          <a:prstGeom prst="rect">
-            <a:avLst/>
-          </a:prstGeom>
-          <a:noFill/>
-        </p:spPr>
-        <p:txBody>
-          <a:bodyPr wrap="square">
-            <a:spAutoFit/>
-          </a:bodyPr>
-          <a:lstStyle/>
-          <a:p>
-            <a:pPr algn="l">
-              <a:defRPr sz="3400" b="1">
-                <a:solidFill>
-                  <a:srgbClr val="FFFFFF"/>
-                </a:solidFill>
-                <a:latin typeface="Calibri"/>
-              </a:defRPr>
-            </a:pPr>
-            <a:r>
-              <a:t>REFERENCES</a:t>
-            </a:r>
-          </a:p>
-        </p:txBody>
-      </p:sp>
-      <p:sp>
-        <p:nvSpPr>
-          <p:cNvPr id="3" name="Rectangle 2"/>
-          <p:cNvSpPr/>
-          <p:nvPr/>
-        </p:nvSpPr>
-        <p:spPr>
-          <a:xfrm>
-            <a:off x="640080" y="868680"/>
-            <a:ext cx="2743200" cy="38100"/>
-          </a:xfrm>
-          <a:prstGeom prst="rect">
-            <a:avLst/>
-          </a:prstGeom>
-          <a:solidFill>
-            <a:srgbClr val="00D4AA"/>
-          </a:solidFill>
-          <a:ln>
-            <a:noFill/>
-          </a:ln>
-          <a:effectLst/>
-        </p:spPr>
-        <p:style>
-          <a:lnRef idx="1">
-            <a:schemeClr val="accent1"/>
-          </a:lnRef>
-          <a:fillRef idx="3">
-            <a:schemeClr val="accent1"/>
-          </a:fillRef>
-          <a:effectRef idx="2">
-            <a:schemeClr val="accent1"/>
-          </a:effectRef>
-          <a:fontRef idx="minor">
-            <a:schemeClr val="lt1"/>
-          </a:fontRef>
-        </p:style>
-        <p:txBody>
-          <a:bodyPr rtlCol="0" anchor="ctr"/>
-          <a:lstStyle/>
-          <a:p>
-            <a:pPr algn="ctr"/>
-          </a:p>
-        </p:txBody>
-      </p:sp>
-      <p:sp>
-        <p:nvSpPr>
-          <p:cNvPr id="4" name="TextBox 3"/>
-          <p:cNvSpPr txBox="1"/>
-          <p:nvPr/>
-        </p:nvSpPr>
-        <p:spPr>
-          <a:xfrm>
-            <a:off x="640080" y="960120"/>
-            <a:ext cx="10972800" cy="365760"/>
-          </a:xfrm>
-          <a:prstGeom prst="rect">
-            <a:avLst/>
-          </a:prstGeom>
-          <a:noFill/>
-        </p:spPr>
-        <p:txBody>
-          <a:bodyPr wrap="square">
-            <a:spAutoFit/>
-          </a:bodyPr>
-          <a:lstStyle/>
-          <a:p>
-            <a:pPr algn="l">
-              <a:defRPr sz="1300" b="0">
-                <a:solidFill>
-                  <a:srgbClr val="6B7B96"/>
-                </a:solidFill>
-                <a:latin typeface="Calibri"/>
-              </a:defRPr>
-            </a:pPr>
-            <a:r>
-              <a:t>Industry &amp; Scientific Sources [1]–[20]  ·  three-layer attribution: [N] industry · [AN] this project</a:t>
-            </a:r>
-          </a:p>
-        </p:txBody>
-      </p:sp>
-      <p:sp>
-        <p:nvSpPr>
-          <p:cNvPr id="5" name="TextBox 4"/>
-          <p:cNvSpPr txBox="1"/>
-          <p:nvPr/>
-        </p:nvSpPr>
-        <p:spPr>
-          <a:xfrm>
-            <a:off x="365760" y="1463040"/>
-            <a:ext cx="5760720" cy="365760"/>
-          </a:xfrm>
-          <a:prstGeom prst="rect">
-            <a:avLst/>
-          </a:prstGeom>
-          <a:noFill/>
-        </p:spPr>
-        <p:txBody>
-          <a:bodyPr wrap="square">
-            <a:spAutoFit/>
-          </a:bodyPr>
-          <a:lstStyle/>
-          <a:p>
-            <a:pPr algn="l">
-              <a:defRPr sz="900" b="0">
-                <a:solidFill>
-                  <a:srgbClr val="B0B8CC"/>
-                </a:solidFill>
-                <a:latin typeface="Calibri"/>
-              </a:defRPr>
-            </a:pPr>
-            <a:r>
-              <a:t>[1] NASA JPL, Mars Relay Network User's Guide, 2024.</a:t>
-            </a:r>
-          </a:p>
-        </p:txBody>
-      </p:sp>
-      <p:sp>
-        <p:nvSpPr>
-          <p:cNvPr id="6" name="TextBox 5"/>
-          <p:cNvSpPr txBox="1"/>
-          <p:nvPr/>
-        </p:nvSpPr>
-        <p:spPr>
-          <a:xfrm>
-            <a:off x="365760" y="1874520"/>
-            <a:ext cx="5760720" cy="365760"/>
-          </a:xfrm>
-          <a:prstGeom prst="rect">
-            <a:avLst/>
-          </a:prstGeom>
-          <a:noFill/>
-        </p:spPr>
-        <p:txBody>
-          <a:bodyPr wrap="square">
-            <a:spAutoFit/>
-          </a:bodyPr>
-          <a:lstStyle/>
-          <a:p>
-            <a:pPr algn="l">
-              <a:defRPr sz="900" b="0">
-                <a:solidFill>
-                  <a:srgbClr val="B0B8CC"/>
-                </a:solidFill>
-                <a:latin typeface="Calibri"/>
-              </a:defRPr>
-            </a:pPr>
-            <a:r>
-              <a:t>[2] CCSDS, Bundle Protocol Spec., 734.2-B-1, 2021.</a:t>
-            </a:r>
-          </a:p>
-        </p:txBody>
-      </p:sp>
-      <p:sp>
-        <p:nvSpPr>
-          <p:cNvPr id="7" name="TextBox 6"/>
-          <p:cNvSpPr txBox="1"/>
-          <p:nvPr/>
-        </p:nvSpPr>
-        <p:spPr>
-          <a:xfrm>
-            <a:off x="365760" y="2286000"/>
-            <a:ext cx="5760720" cy="365760"/>
-          </a:xfrm>
-          <a:prstGeom prst="rect">
-            <a:avLst/>
-          </a:prstGeom>
-          <a:noFill/>
-        </p:spPr>
-        <p:txBody>
-          <a:bodyPr wrap="square">
-            <a:spAutoFit/>
-          </a:bodyPr>
-          <a:lstStyle/>
-          <a:p>
-            <a:pPr algn="l">
-              <a:defRPr sz="900" b="0">
-                <a:solidFill>
-                  <a:srgbClr val="B0B8CC"/>
-                </a:solidFill>
-                <a:latin typeface="Calibri"/>
-              </a:defRPr>
-            </a:pPr>
-            <a:r>
-              <a:t>[3] JPL Horizons, Earth–Mars Ephemeris, 2025.</a:t>
-            </a:r>
-          </a:p>
-        </p:txBody>
-      </p:sp>
-      <p:sp>
-        <p:nvSpPr>
-          <p:cNvPr id="8" name="TextBox 7"/>
-          <p:cNvSpPr txBox="1"/>
-          <p:nvPr/>
-        </p:nvSpPr>
-        <p:spPr>
-          <a:xfrm>
-            <a:off x="365760" y="2697480"/>
-            <a:ext cx="5760720" cy="365760"/>
-          </a:xfrm>
-          <a:prstGeom prst="rect">
-            <a:avLst/>
-          </a:prstGeom>
-          <a:noFill/>
-        </p:spPr>
-        <p:txBody>
-          <a:bodyPr wrap="square">
-            <a:spAutoFit/>
-          </a:bodyPr>
-          <a:lstStyle/>
-          <a:p>
-            <a:pPr algn="l">
-              <a:defRPr sz="900" b="0">
-                <a:solidFill>
-                  <a:srgbClr val="B0B8CC"/>
-                </a:solidFill>
-                <a:latin typeface="Calibri"/>
-              </a:defRPr>
-            </a:pPr>
-            <a:r>
-              <a:t>[4] NASA, Deep Space Optical Comm. (DSOC), Psyche, 2024.</a:t>
-            </a:r>
-          </a:p>
-        </p:txBody>
-      </p:sp>
-      <p:sp>
-        <p:nvSpPr>
-          <p:cNvPr id="9" name="TextBox 8"/>
-          <p:cNvSpPr txBox="1"/>
-          <p:nvPr/>
-        </p:nvSpPr>
-        <p:spPr>
-          <a:xfrm>
-            <a:off x="365760" y="3108960"/>
-            <a:ext cx="5760720" cy="365760"/>
-          </a:xfrm>
-          <a:prstGeom prst="rect">
-            <a:avLst/>
-          </a:prstGeom>
-          <a:noFill/>
-        </p:spPr>
-        <p:txBody>
-          <a:bodyPr wrap="square">
-            <a:spAutoFit/>
-          </a:bodyPr>
-          <a:lstStyle/>
-          <a:p>
-            <a:pPr algn="l">
-              <a:defRPr sz="900" b="0">
-                <a:solidFill>
-                  <a:srgbClr val="B0B8CC"/>
-                </a:solidFill>
-                <a:latin typeface="Calibri"/>
-              </a:defRPr>
-            </a:pPr>
-            <a:r>
-              <a:t>[5] CCSDS, Optical Comm. Coding &amp; Sync., 141.0-B-1, 2019.</a:t>
-            </a:r>
-          </a:p>
-        </p:txBody>
-      </p:sp>
-      <p:sp>
-        <p:nvSpPr>
-          <p:cNvPr id="10" name="TextBox 9"/>
-          <p:cNvSpPr txBox="1"/>
-          <p:nvPr/>
-        </p:nvSpPr>
-        <p:spPr>
-          <a:xfrm>
-            <a:off x="365760" y="3520440"/>
-            <a:ext cx="5760720" cy="365760"/>
-          </a:xfrm>
-          <a:prstGeom prst="rect">
-            <a:avLst/>
-          </a:prstGeom>
-          <a:noFill/>
-        </p:spPr>
-        <p:txBody>
-          <a:bodyPr wrap="square">
-            <a:spAutoFit/>
-          </a:bodyPr>
-          <a:lstStyle/>
-          <a:p>
-            <a:pPr algn="l">
-              <a:defRPr sz="900" b="0">
-                <a:solidFill>
-                  <a:srgbClr val="B0B8CC"/>
-                </a:solidFill>
-                <a:latin typeface="Calibri"/>
-              </a:defRPr>
-            </a:pPr>
-            <a:r>
-              <a:t>[6] CCSDS, TM Space Data Link Protocol, 131.0-B-3, 2017.</a:t>
-            </a:r>
-          </a:p>
-        </p:txBody>
-      </p:sp>
-      <p:sp>
-        <p:nvSpPr>
-          <p:cNvPr id="11" name="TextBox 10"/>
-          <p:cNvSpPr txBox="1"/>
-          <p:nvPr/>
-        </p:nvSpPr>
-        <p:spPr>
-          <a:xfrm>
-            <a:off x="365760" y="3931920"/>
-            <a:ext cx="5760720" cy="365760"/>
-          </a:xfrm>
-          <a:prstGeom prst="rect">
-            <a:avLst/>
-          </a:prstGeom>
-          <a:noFill/>
-        </p:spPr>
-        <p:txBody>
-          <a:bodyPr wrap="square">
-            <a:spAutoFit/>
-          </a:bodyPr>
-          <a:lstStyle/>
-          <a:p>
-            <a:pPr algn="l">
-              <a:defRPr sz="900" b="0">
-                <a:solidFill>
-                  <a:srgbClr val="B0B8CC"/>
-                </a:solidFill>
-                <a:latin typeface="Calibri"/>
-              </a:defRPr>
-            </a:pPr>
-            <a:r>
-              <a:t>[7] CCSDS, Lossless Data Compression, 121.0-B-3, 2020.</a:t>
-            </a:r>
-          </a:p>
-        </p:txBody>
-      </p:sp>
-      <p:sp>
-        <p:nvSpPr>
-          <p:cNvPr id="12" name="TextBox 11"/>
-          <p:cNvSpPr txBox="1"/>
-          <p:nvPr/>
-        </p:nvSpPr>
-        <p:spPr>
-          <a:xfrm>
-            <a:off x="365760" y="4343400"/>
-            <a:ext cx="5760720" cy="365760"/>
-          </a:xfrm>
-          <a:prstGeom prst="rect">
-            <a:avLst/>
-          </a:prstGeom>
-          <a:noFill/>
-        </p:spPr>
-        <p:txBody>
-          <a:bodyPr wrap="square">
-            <a:spAutoFit/>
-          </a:bodyPr>
-          <a:lstStyle/>
-          <a:p>
-            <a:pPr algn="l">
-              <a:defRPr sz="900" b="0">
-                <a:solidFill>
-                  <a:srgbClr val="B0B8CC"/>
-                </a:solidFill>
-                <a:latin typeface="Calibri"/>
-              </a:defRPr>
-            </a:pPr>
-            <a:r>
-              <a:t>[8] CCSDS, Image Data Compression, 122.0-B-2, 2017.</a:t>
-            </a:r>
-          </a:p>
-        </p:txBody>
-      </p:sp>
-      <p:sp>
-        <p:nvSpPr>
-          <p:cNvPr id="13" name="TextBox 12"/>
-          <p:cNvSpPr txBox="1"/>
-          <p:nvPr/>
-        </p:nvSpPr>
-        <p:spPr>
-          <a:xfrm>
-            <a:off x="365760" y="4754880"/>
-            <a:ext cx="5760720" cy="365760"/>
-          </a:xfrm>
-          <a:prstGeom prst="rect">
-            <a:avLst/>
-          </a:prstGeom>
-          <a:noFill/>
-        </p:spPr>
-        <p:txBody>
-          <a:bodyPr wrap="square">
-            <a:spAutoFit/>
-          </a:bodyPr>
-          <a:lstStyle/>
-          <a:p>
-            <a:pPr algn="l">
-              <a:defRPr sz="900" b="0">
-                <a:solidFill>
-                  <a:srgbClr val="B0B8CC"/>
-                </a:solidFill>
-                <a:latin typeface="Calibri"/>
-              </a:defRPr>
-            </a:pPr>
-            <a:r>
-              <a:t>[9] IETF, Bundle Protocol Version 7, RFC 9171, 2022.</a:t>
-            </a:r>
-          </a:p>
-        </p:txBody>
-      </p:sp>
-      <p:sp>
-        <p:nvSpPr>
-          <p:cNvPr id="14" name="TextBox 13"/>
-          <p:cNvSpPr txBox="1"/>
-          <p:nvPr/>
-        </p:nvSpPr>
-        <p:spPr>
-          <a:xfrm>
-            <a:off x="365760" y="5166360"/>
-            <a:ext cx="5760720" cy="365760"/>
-          </a:xfrm>
-          <a:prstGeom prst="rect">
-            <a:avLst/>
-          </a:prstGeom>
-          <a:noFill/>
-        </p:spPr>
-        <p:txBody>
-          <a:bodyPr wrap="square">
-            <a:spAutoFit/>
-          </a:bodyPr>
-          <a:lstStyle/>
-          <a:p>
-            <a:pPr algn="l">
-              <a:defRPr sz="900" b="0">
-                <a:solidFill>
-                  <a:srgbClr val="B0B8CC"/>
-                </a:solidFill>
-                <a:latin typeface="Calibri"/>
-              </a:defRPr>
-            </a:pPr>
-            <a:r>
-              <a:t>[10] IETF, Licklider Transmission Protocol, RFC 5326, 2008.</a:t>
-            </a:r>
-          </a:p>
-        </p:txBody>
-      </p:sp>
-      <p:sp>
-        <p:nvSpPr>
-          <p:cNvPr id="15" name="TextBox 14"/>
-          <p:cNvSpPr txBox="1"/>
-          <p:nvPr/>
-        </p:nvSpPr>
-        <p:spPr>
-          <a:xfrm>
-            <a:off x="6309360" y="1463040"/>
-            <a:ext cx="5760720" cy="365760"/>
-          </a:xfrm>
-          <a:prstGeom prst="rect">
-            <a:avLst/>
-          </a:prstGeom>
-          <a:noFill/>
-        </p:spPr>
-        <p:txBody>
-          <a:bodyPr wrap="square">
-            <a:spAutoFit/>
-          </a:bodyPr>
-          <a:lstStyle/>
-          <a:p>
-            <a:pPr algn="l">
-              <a:defRPr sz="900" b="0">
-                <a:solidFill>
-                  <a:srgbClr val="B0B8CC"/>
-                </a:solidFill>
-                <a:latin typeface="Calibri"/>
-              </a:defRPr>
-            </a:pPr>
-            <a:r>
-              <a:t>[11] IETF, DTN TCP Convergence Layer, RFC 7242, 2014.</a:t>
-            </a:r>
-          </a:p>
-        </p:txBody>
-      </p:sp>
-      <p:sp>
-        <p:nvSpPr>
-          <p:cNvPr id="16" name="TextBox 15"/>
-          <p:cNvSpPr txBox="1"/>
-          <p:nvPr/>
-        </p:nvSpPr>
-        <p:spPr>
-          <a:xfrm>
-            <a:off x="6309360" y="1874520"/>
-            <a:ext cx="5760720" cy="365760"/>
-          </a:xfrm>
-          <a:prstGeom prst="rect">
-            <a:avLst/>
-          </a:prstGeom>
-          <a:noFill/>
-        </p:spPr>
-        <p:txBody>
-          <a:bodyPr wrap="square">
-            <a:spAutoFit/>
-          </a:bodyPr>
-          <a:lstStyle/>
-          <a:p>
-            <a:pPr algn="l">
-              <a:defRPr sz="900" b="0">
-                <a:solidFill>
-                  <a:srgbClr val="B0B8CC"/>
-                </a:solidFill>
-                <a:latin typeface="Calibri"/>
-              </a:defRPr>
-            </a:pPr>
-            <a:r>
-              <a:t>[12] IETF, Delay-Tolerant Networking Architecture, RFC 4838, 2007.</a:t>
-            </a:r>
-          </a:p>
-        </p:txBody>
-      </p:sp>
-      <p:sp>
-        <p:nvSpPr>
-          <p:cNvPr id="17" name="TextBox 16"/>
-          <p:cNvSpPr txBox="1"/>
-          <p:nvPr/>
-        </p:nvSpPr>
-        <p:spPr>
-          <a:xfrm>
-            <a:off x="6309360" y="2286000"/>
-            <a:ext cx="5760720" cy="365760"/>
-          </a:xfrm>
-          <a:prstGeom prst="rect">
-            <a:avLst/>
-          </a:prstGeom>
-          <a:noFill/>
-        </p:spPr>
-        <p:txBody>
-          <a:bodyPr wrap="square">
-            <a:spAutoFit/>
-          </a:bodyPr>
-          <a:lstStyle/>
-          <a:p>
-            <a:pPr algn="l">
-              <a:defRPr sz="900" b="0">
-                <a:solidFill>
-                  <a:srgbClr val="B0B8CC"/>
-                </a:solidFill>
-                <a:latin typeface="Calibri"/>
-              </a:defRPr>
-            </a:pPr>
-            <a:r>
-              <a:t>[13] Bennett &amp; Brassard, Quantum Cryptography, IEEE ICC, 1984.</a:t>
-            </a:r>
-          </a:p>
-        </p:txBody>
-      </p:sp>
-      <p:sp>
-        <p:nvSpPr>
-          <p:cNvPr id="18" name="TextBox 17"/>
-          <p:cNvSpPr txBox="1"/>
-          <p:nvPr/>
-        </p:nvSpPr>
-        <p:spPr>
-          <a:xfrm>
-            <a:off x="6309360" y="2697480"/>
-            <a:ext cx="5760720" cy="365760"/>
-          </a:xfrm>
-          <a:prstGeom prst="rect">
-            <a:avLst/>
-          </a:prstGeom>
-          <a:noFill/>
-        </p:spPr>
-        <p:txBody>
-          <a:bodyPr wrap="square">
-            <a:spAutoFit/>
-          </a:bodyPr>
-          <a:lstStyle/>
-          <a:p>
-            <a:pPr algn="l">
-              <a:defRPr sz="900" b="0">
-                <a:solidFill>
-                  <a:srgbClr val="B0B8CC"/>
-                </a:solidFill>
-                <a:latin typeface="Calibri"/>
-              </a:defRPr>
-            </a:pPr>
-            <a:r>
-              <a:t>[14] Ekert, Quantum Cryptography Based on Bell's Theorem, PRL 67, 1991.</a:t>
-            </a:r>
-          </a:p>
-        </p:txBody>
-      </p:sp>
-      <p:sp>
-        <p:nvSpPr>
-          <p:cNvPr id="19" name="TextBox 18"/>
-          <p:cNvSpPr txBox="1"/>
-          <p:nvPr/>
-        </p:nvSpPr>
-        <p:spPr>
-          <a:xfrm>
-            <a:off x="6309360" y="3108960"/>
-            <a:ext cx="5760720" cy="365760"/>
-          </a:xfrm>
-          <a:prstGeom prst="rect">
-            <a:avLst/>
-          </a:prstGeom>
-          <a:noFill/>
-        </p:spPr>
-        <p:txBody>
-          <a:bodyPr wrap="square">
-            <a:spAutoFit/>
-          </a:bodyPr>
-          <a:lstStyle/>
-          <a:p>
-            <a:pPr algn="l">
-              <a:defRPr sz="900" b="0">
-                <a:solidFill>
-                  <a:srgbClr val="B0B8CC"/>
-                </a:solidFill>
-                <a:latin typeface="Calibri"/>
-              </a:defRPr>
-            </a:pPr>
-            <a:r>
-              <a:t>[15] Shor &amp; Preskill, Simple Proof of Security of BB84, PRL 85, 2000.</a:t>
-            </a:r>
-          </a:p>
-        </p:txBody>
-      </p:sp>
-      <p:sp>
-        <p:nvSpPr>
-          <p:cNvPr id="20" name="TextBox 19"/>
-          <p:cNvSpPr txBox="1"/>
-          <p:nvPr/>
-        </p:nvSpPr>
-        <p:spPr>
-          <a:xfrm>
-            <a:off x="6309360" y="3520440"/>
-            <a:ext cx="5760720" cy="365760"/>
-          </a:xfrm>
-          <a:prstGeom prst="rect">
-            <a:avLst/>
-          </a:prstGeom>
-          <a:noFill/>
-        </p:spPr>
-        <p:txBody>
-          <a:bodyPr wrap="square">
-            <a:spAutoFit/>
-          </a:bodyPr>
-          <a:lstStyle/>
-          <a:p>
-            <a:pPr algn="l">
-              <a:defRPr sz="900" b="0">
-                <a:solidFill>
-                  <a:srgbClr val="B0B8CC"/>
-                </a:solidFill>
-                <a:latin typeface="Calibri"/>
-              </a:defRPr>
-            </a:pPr>
-            <a:r>
-              <a:t>[16] NIST, Module-Lattice-Based KEM, FIPS 203, 2024.</a:t>
-            </a:r>
-          </a:p>
-        </p:txBody>
-      </p:sp>
-      <p:sp>
-        <p:nvSpPr>
-          <p:cNvPr id="21" name="TextBox 20"/>
-          <p:cNvSpPr txBox="1"/>
-          <p:nvPr/>
-        </p:nvSpPr>
-        <p:spPr>
-          <a:xfrm>
-            <a:off x="6309360" y="3931920"/>
-            <a:ext cx="5760720" cy="365760"/>
-          </a:xfrm>
-          <a:prstGeom prst="rect">
-            <a:avLst/>
-          </a:prstGeom>
-          <a:noFill/>
-        </p:spPr>
-        <p:txBody>
-          <a:bodyPr wrap="square">
-            <a:spAutoFit/>
-          </a:bodyPr>
-          <a:lstStyle/>
-          <a:p>
-            <a:pPr algn="l">
-              <a:defRPr sz="900" b="0">
-                <a:solidFill>
-                  <a:srgbClr val="B0B8CC"/>
-                </a:solidFill>
-                <a:latin typeface="Calibri"/>
-              </a:defRPr>
-            </a:pPr>
-            <a:r>
-              <a:t>[17] NIST, Module-Lattice-Based Digital Signature, FIPS 204, 2024.</a:t>
-            </a:r>
-          </a:p>
-        </p:txBody>
-      </p:sp>
-      <p:sp>
-        <p:nvSpPr>
-          <p:cNvPr id="22" name="TextBox 21"/>
-          <p:cNvSpPr txBox="1"/>
-          <p:nvPr/>
-        </p:nvSpPr>
-        <p:spPr>
-          <a:xfrm>
-            <a:off x="6309360" y="4343400"/>
-            <a:ext cx="5760720" cy="365760"/>
-          </a:xfrm>
-          <a:prstGeom prst="rect">
-            <a:avLst/>
-          </a:prstGeom>
-          <a:noFill/>
-        </p:spPr>
-        <p:txBody>
-          <a:bodyPr wrap="square">
-            <a:spAutoFit/>
-          </a:bodyPr>
-          <a:lstStyle/>
-          <a:p>
-            <a:pPr algn="l">
-              <a:defRPr sz="900" b="0">
-                <a:solidFill>
-                  <a:srgbClr val="B0B8CC"/>
-                </a:solidFill>
-                <a:latin typeface="Calibri"/>
-              </a:defRPr>
-            </a:pPr>
-            <a:r>
-              <a:t>[18] BAE Systems, RAD750 Radiation-Hardened PowerPC, 2024.</a:t>
-            </a:r>
-          </a:p>
-        </p:txBody>
-      </p:sp>
-      <p:sp>
-        <p:nvSpPr>
-          <p:cNvPr id="23" name="TextBox 22"/>
-          <p:cNvSpPr txBox="1"/>
-          <p:nvPr/>
-        </p:nvSpPr>
-        <p:spPr>
-          <a:xfrm>
-            <a:off x="6309360" y="4754880"/>
-            <a:ext cx="5760720" cy="365760"/>
-          </a:xfrm>
-          <a:prstGeom prst="rect">
-            <a:avLst/>
-          </a:prstGeom>
-          <a:noFill/>
-        </p:spPr>
-        <p:txBody>
-          <a:bodyPr wrap="square">
-            <a:spAutoFit/>
-          </a:bodyPr>
-          <a:lstStyle/>
-          <a:p>
-            <a:pPr algn="l">
-              <a:defRPr sz="900" b="0">
-                <a:solidFill>
-                  <a:srgbClr val="B0B8CC"/>
-                </a:solidFill>
-                <a:latin typeface="Calibri"/>
-              </a:defRPr>
-            </a:pPr>
-            <a:r>
-              <a:t>[19] ESA/Gaisler, LEON3FT Processor, 2023.</a:t>
-            </a:r>
-          </a:p>
-        </p:txBody>
-      </p:sp>
-      <p:sp>
-        <p:nvSpPr>
-          <p:cNvPr id="24" name="TextBox 23"/>
-          <p:cNvSpPr txBox="1"/>
-          <p:nvPr/>
-        </p:nvSpPr>
-        <p:spPr>
-          <a:xfrm>
-            <a:off x="6309360" y="5166360"/>
-            <a:ext cx="5760720" cy="365760"/>
-          </a:xfrm>
-          <a:prstGeom prst="rect">
-            <a:avLst/>
-          </a:prstGeom>
-          <a:noFill/>
-        </p:spPr>
-        <p:txBody>
-          <a:bodyPr wrap="square">
-            <a:spAutoFit/>
-          </a:bodyPr>
-          <a:lstStyle/>
-          <a:p>
-            <a:pPr algn="l">
-              <a:defRPr sz="900" b="0">
-                <a:solidFill>
-                  <a:srgbClr val="B0B8CC"/>
-                </a:solidFill>
-                <a:latin typeface="Calibri"/>
-              </a:defRPr>
-            </a:pPr>
-            <a:r>
-              <a:t>[20] IETF, RFC 4838 §3.1, 2007 (DTN challenges).</a:t>
-            </a:r>
-          </a:p>
-        </p:txBody>
-      </p:sp>
-      <p:sp>
-        <p:nvSpPr>
-          <p:cNvPr id="25" name="TextBox 24"/>
-          <p:cNvSpPr txBox="1"/>
-          <p:nvPr/>
-        </p:nvSpPr>
-        <p:spPr>
-          <a:xfrm>
-            <a:off x="457200" y="6601968"/>
-            <a:ext cx="11430000" cy="228600"/>
-          </a:xfrm>
-          <a:prstGeom prst="rect">
-            <a:avLst/>
-          </a:prstGeom>
-          <a:noFill/>
-        </p:spPr>
-        <p:txBody>
-          <a:bodyPr wrap="square">
-            <a:spAutoFit/>
-          </a:bodyPr>
-          <a:lstStyle/>
-          <a:p>
-            <a:pPr algn="l">
-              <a:defRPr sz="800" b="0">
-                <a:solidFill>
-                  <a:srgbClr val="6B7B96"/>
-                </a:solidFill>
-                <a:latin typeface="Calibri"/>
-              </a:defRPr>
-            </a:pPr>
-            <a:r>
-              <a:t>Full URLs: github.com/matx104/AETHERIX  ·  next slide: project sources [A1]–[A8]</a:t>
-            </a:r>
-          </a:p>
-        </p:txBody>
-      </p:sp>
-      <p:sp>
-        <p:nvSpPr>
-          <p:cNvPr id="26" name="TextBox 25"/>
-          <p:cNvSpPr txBox="1"/>
-          <p:nvPr/>
-        </p:nvSpPr>
-        <p:spPr>
-          <a:xfrm>
-            <a:off x="457200" y="6400800"/>
-            <a:ext cx="4572000" cy="365760"/>
-          </a:xfrm>
-          <a:prstGeom prst="rect">
-            <a:avLst/>
-          </a:prstGeom>
-          <a:noFill/>
-        </p:spPr>
-        <p:txBody>
-          <a:bodyPr wrap="square">
-            <a:spAutoFit/>
-          </a:bodyPr>
-          <a:lstStyle/>
-          <a:p>
-            <a:pPr algn="l">
-              <a:defRPr sz="1000" b="0">
-                <a:solidFill>
-                  <a:srgbClr val="6B7B96"/>
-                </a:solidFill>
-                <a:latin typeface="Calibri"/>
-              </a:defRPr>
-            </a:pPr>
-            <a:r>
-              <a:t>AETHERIX — Interplanetary Communication Network</a:t>
-            </a:r>
-          </a:p>
-        </p:txBody>
-      </p:sp>
-      <p:sp>
-        <p:nvSpPr>
-          <p:cNvPr id="27" name="TextBox 26"/>
-          <p:cNvSpPr txBox="1"/>
-          <p:nvPr/>
-        </p:nvSpPr>
-        <p:spPr>
-          <a:xfrm>
-            <a:off x="10058400" y="6400800"/>
-            <a:ext cx="1828800" cy="365760"/>
-          </a:xfrm>
-          <a:prstGeom prst="rect">
-            <a:avLst/>
-          </a:prstGeom>
-          <a:noFill/>
-        </p:spPr>
-        <p:txBody>
-          <a:bodyPr wrap="square">
-            <a:spAutoFit/>
-          </a:bodyPr>
-          <a:lstStyle/>
-          <a:p>
-            <a:pPr algn="r">
-              <a:defRPr sz="1000" b="0">
-                <a:solidFill>
-                  <a:srgbClr val="6B7B96"/>
-                </a:solidFill>
-                <a:latin typeface="Calibri"/>
-              </a:defRPr>
-            </a:pPr>
-            <a:r>
-              <a:t>29 / 31</a:t>
-            </a:r>
-          </a:p>
-        </p:txBody>
-      </p:sp>
-    </p:spTree>
-  </p:cSld>
-  <p:transition spd="med" advClick="1">
-    <p:fade/>
-  </p:transition>
-  <p:clrMapOvr>
-    <a:masterClrMapping/>
-  </p:clrMapOvr>
-</p:sld>
-</file>
-
-<file path=ppt/slides/slide3.xml><?xml version="1.0" encoding="utf-8"?>
-<p:sld xmlns:a="http://schemas.openxmlformats.org/drawingml/2006/main" xmlns:p="http://schemas.openxmlformats.org/presentationml/2006/main" xmlns:r="http://schemas.openxmlformats.org/officeDocument/2006/relationships">
-  <p:cSld>
-    <p:bg>
-      <p:bgPr>
-        <a:solidFill>
-          <a:srgbClr val="0B0E1A"/>
-        </a:solidFill>
-        <a:effectLst/>
-      </p:bgPr>
-    </p:bg>
-    <p:spTree>
-      <p:nvGrpSpPr>
-        <p:cNvPr id="1" name=""/>
-        <p:cNvGrpSpPr/>
-        <p:nvPr/>
-      </p:nvGrpSpPr>
-      <p:grpSpPr/>
-      <p:sp>
-        <p:nvSpPr>
-          <p:cNvPr id="2" name="TextBox 1"/>
-          <p:cNvSpPr txBox="1"/>
-          <p:nvPr/>
-        </p:nvSpPr>
-        <p:spPr>
-          <a:xfrm>
-            <a:off x="640080" y="274320"/>
-            <a:ext cx="10058400" cy="640080"/>
-          </a:xfrm>
-          <a:prstGeom prst="rect">
-            <a:avLst/>
-          </a:prstGeom>
-          <a:noFill/>
-        </p:spPr>
-        <p:txBody>
-          <a:bodyPr wrap="square">
-            <a:spAutoFit/>
-          </a:bodyPr>
-          <a:lstStyle/>
-          <a:p>
-            <a:pPr algn="l">
-              <a:defRPr sz="3600" b="1">
-                <a:solidFill>
-                  <a:srgbClr val="FFFFFF"/>
-                </a:solidFill>
-                <a:latin typeface="Calibri"/>
-              </a:defRPr>
-            </a:pPr>
-            <a:r>
-              <a:t>WHAT IS AETHERIX?</a:t>
-            </a:r>
-          </a:p>
-        </p:txBody>
-      </p:sp>
-      <p:sp>
-        <p:nvSpPr>
-          <p:cNvPr id="3" name="Rectangle 2"/>
-          <p:cNvSpPr/>
-          <p:nvPr/>
-        </p:nvSpPr>
-        <p:spPr>
-          <a:xfrm>
-            <a:off x="640080" y="868680"/>
-            <a:ext cx="2743200" cy="38100"/>
-          </a:xfrm>
-          <a:prstGeom prst="rect">
-            <a:avLst/>
-          </a:prstGeom>
-          <a:solidFill>
-            <a:srgbClr val="00D4AA"/>
-          </a:solidFill>
-          <a:ln>
-            <a:noFill/>
-          </a:ln>
-          <a:effectLst/>
-        </p:spPr>
-        <p:style>
-          <a:lnRef idx="1">
-            <a:schemeClr val="accent1"/>
-          </a:lnRef>
-          <a:fillRef idx="3">
-            <a:schemeClr val="accent1"/>
-          </a:fillRef>
-          <a:effectRef idx="2">
-            <a:schemeClr val="accent1"/>
-          </a:effectRef>
-          <a:fontRef idx="minor">
-            <a:schemeClr val="lt1"/>
-          </a:fontRef>
-        </p:style>
-        <p:txBody>
-          <a:bodyPr rtlCol="0" anchor="ctr"/>
-          <a:lstStyle/>
-          <a:p>
-            <a:pPr algn="ctr"/>
-          </a:p>
-        </p:txBody>
-      </p:sp>
-      <p:sp>
-        <p:nvSpPr>
-          <p:cNvPr id="4" name="TextBox 3"/>
-          <p:cNvSpPr txBox="1"/>
-          <p:nvPr/>
-        </p:nvSpPr>
-        <p:spPr>
-          <a:xfrm>
-            <a:off x="640080" y="960120"/>
-            <a:ext cx="10058400" cy="365760"/>
-          </a:xfrm>
-          <a:prstGeom prst="rect">
-            <a:avLst/>
-          </a:prstGeom>
-          <a:noFill/>
-        </p:spPr>
-        <p:txBody>
-          <a:bodyPr wrap="square">
-            <a:spAutoFit/>
-          </a:bodyPr>
-          <a:lstStyle/>
-          <a:p>
-            <a:pPr algn="l">
-              <a:defRPr sz="1600" b="0">
-                <a:solidFill>
-                  <a:srgbClr val="6B7B96"/>
-                </a:solidFill>
-                <a:latin typeface="Calibri"/>
-              </a:defRPr>
-            </a:pPr>
-            <a:r>
-              <a:t>Overview &amp; The Problem</a:t>
-            </a:r>
-          </a:p>
-        </p:txBody>
-      </p:sp>
-      <p:sp>
-        <p:nvSpPr>
-          <p:cNvPr id="5" name="TextBox 4"/>
-          <p:cNvSpPr txBox="1"/>
-          <p:nvPr/>
-        </p:nvSpPr>
-        <p:spPr>
-          <a:xfrm>
-            <a:off x="457200" y="6601968"/>
-            <a:ext cx="11430000" cy="228600"/>
-          </a:xfrm>
-          <a:prstGeom prst="rect">
-            <a:avLst/>
-          </a:prstGeom>
-          <a:noFill/>
-        </p:spPr>
-        <p:txBody>
-          <a:bodyPr wrap="square">
-            <a:spAutoFit/>
-          </a:bodyPr>
-          <a:lstStyle/>
-          <a:p>
-            <a:pPr algn="l">
-              <a:defRPr sz="800" b="0">
-                <a:solidFill>
-                  <a:srgbClr val="6B7B96"/>
-                </a:solidFill>
-                <a:latin typeface="Calibri"/>
-              </a:defRPr>
-            </a:pPr>
-            <a:r>
-              <a:t>[1] NASA MRN 2024  ·  [3] JPL Horizons  ·  [12] RFC 4838  ·  [A2] topology.py</a:t>
-            </a:r>
-          </a:p>
-        </p:txBody>
-      </p:sp>
-      <p:sp>
-        <p:nvSpPr>
-          <p:cNvPr id="6" name="TextBox 5"/>
-          <p:cNvSpPr txBox="1"/>
-          <p:nvPr/>
-        </p:nvSpPr>
-        <p:spPr>
-          <a:xfrm>
-            <a:off x="457200" y="6400800"/>
-            <a:ext cx="4572000" cy="365760"/>
-          </a:xfrm>
-          <a:prstGeom prst="rect">
-            <a:avLst/>
-          </a:prstGeom>
-          <a:noFill/>
-        </p:spPr>
-        <p:txBody>
-          <a:bodyPr wrap="square">
-            <a:spAutoFit/>
-          </a:bodyPr>
-          <a:lstStyle/>
-          <a:p>
-            <a:pPr algn="l">
-              <a:defRPr sz="1000" b="0">
-                <a:solidFill>
-                  <a:srgbClr val="6B7B96"/>
-                </a:solidFill>
-                <a:latin typeface="Calibri"/>
-              </a:defRPr>
-            </a:pPr>
-            <a:r>
-              <a:t>AETHERIX — Interplanetary Communication Network</a:t>
-            </a:r>
-          </a:p>
-        </p:txBody>
-      </p:sp>
-      <p:sp>
-        <p:nvSpPr>
-          <p:cNvPr id="7" name="TextBox 6"/>
-          <p:cNvSpPr txBox="1"/>
-          <p:nvPr/>
-        </p:nvSpPr>
-        <p:spPr>
-          <a:xfrm>
-            <a:off x="10058400" y="6400800"/>
-            <a:ext cx="1828800" cy="365760"/>
-          </a:xfrm>
-          <a:prstGeom prst="rect">
-            <a:avLst/>
-          </a:prstGeom>
-          <a:noFill/>
-        </p:spPr>
-        <p:txBody>
-          <a:bodyPr wrap="square">
-            <a:spAutoFit/>
-          </a:bodyPr>
-          <a:lstStyle/>
-          <a:p>
-            <a:pPr algn="r">
-              <a:defRPr sz="1000" b="0">
-                <a:solidFill>
-                  <a:srgbClr val="6B7B96"/>
-                </a:solidFill>
-                <a:latin typeface="Calibri"/>
-              </a:defRPr>
-            </a:pPr>
-            <a:r>
-              <a:t>3 / 31</a:t>
-            </a:r>
-          </a:p>
-        </p:txBody>
-      </p:sp>
-      <p:sp>
-        <p:nvSpPr>
-          <p:cNvPr id="8" name="Rounded Rectangle 7"/>
-          <p:cNvSpPr/>
-          <p:nvPr/>
-        </p:nvSpPr>
-        <p:spPr>
-          <a:xfrm>
-            <a:off x="640080" y="1463040"/>
-            <a:ext cx="5120640" cy="3474720"/>
-          </a:xfrm>
-          <a:prstGeom prst="roundRect">
-            <a:avLst/>
-          </a:prstGeom>
-          <a:solidFill>
-            <a:srgbClr val="141B2D"/>
-          </a:solidFill>
-          <a:ln w="12700">
-            <a:solidFill>
-              <a:srgbClr val="009EFF"/>
-            </a:solidFill>
-          </a:ln>
-          <a:effectLst/>
-        </p:spPr>
-        <p:style>
-          <a:lnRef idx="1">
-            <a:schemeClr val="accent1"/>
-          </a:lnRef>
-          <a:fillRef idx="3">
-            <a:schemeClr val="accent1"/>
-          </a:fillRef>
-          <a:effectRef idx="2">
-            <a:schemeClr val="accent1"/>
-          </a:effectRef>
-          <a:fontRef idx="minor">
-            <a:schemeClr val="lt1"/>
-          </a:fontRef>
-        </p:style>
-        <p:txBody>
-          <a:bodyPr rtlCol="0" anchor="ctr" wrap="square" lIns="137160" rIns="137160" tIns="91440" bIns="91440"/>
-          <a:lstStyle/>
-          <a:p>
-            <a:pPr algn="ctr">
-              <a:defRPr sz="1600" b="1">
-                <a:solidFill>
-                  <a:srgbClr val="009EFF"/>
-                </a:solidFill>
-                <a:latin typeface="Calibri"/>
-              </a:defRPr>
-            </a:pPr>
-          </a:p>
-        </p:txBody>
-      </p:sp>
-      <p:sp>
-        <p:nvSpPr>
-          <p:cNvPr id="9" name="TextBox 8"/>
-          <p:cNvSpPr txBox="1"/>
-          <p:nvPr/>
-        </p:nvSpPr>
-        <p:spPr>
-          <a:xfrm>
-            <a:off x="822960" y="1554480"/>
-            <a:ext cx="4754880" cy="411480"/>
-          </a:xfrm>
-          <a:prstGeom prst="rect">
-            <a:avLst/>
-          </a:prstGeom>
-          <a:noFill/>
-        </p:spPr>
-        <p:txBody>
-          <a:bodyPr wrap="square">
-            <a:spAutoFit/>
-          </a:bodyPr>
-          <a:lstStyle/>
-          <a:p>
-            <a:pPr algn="l">
-              <a:defRPr sz="1800" b="1">
-                <a:solidFill>
-                  <a:srgbClr val="009EFF"/>
-                </a:solidFill>
-                <a:latin typeface="Calibri"/>
-              </a:defRPr>
-            </a:pPr>
-            <a:r>
-              <a:t>What is AETHERIX?</a:t>
-            </a:r>
-          </a:p>
-        </p:txBody>
-      </p:sp>
-      <p:sp>
-        <p:nvSpPr>
-          <p:cNvPr id="10" name="Rectangle 9"/>
-          <p:cNvSpPr/>
-          <p:nvPr/>
-        </p:nvSpPr>
-        <p:spPr>
-          <a:xfrm>
-            <a:off x="822960" y="1920240"/>
-            <a:ext cx="1828800" cy="25400"/>
-          </a:xfrm>
-          <a:prstGeom prst="rect">
-            <a:avLst/>
-          </a:prstGeom>
-          <a:solidFill>
-            <a:srgbClr val="009EFF"/>
-          </a:solidFill>
-          <a:ln>
-            <a:noFill/>
-          </a:ln>
-          <a:effectLst/>
-        </p:spPr>
-        <p:style>
-          <a:lnRef idx="1">
-            <a:schemeClr val="accent1"/>
-          </a:lnRef>
-          <a:fillRef idx="3">
-            <a:schemeClr val="accent1"/>
-          </a:fillRef>
-          <a:effectRef idx="2">
-            <a:schemeClr val="accent1"/>
-          </a:effectRef>
-          <a:fontRef idx="minor">
-            <a:schemeClr val="lt1"/>
-          </a:fontRef>
-        </p:style>
-        <p:txBody>
-          <a:bodyPr rtlCol="0" anchor="ctr"/>
-          <a:lstStyle/>
-          <a:p>
-            <a:pPr algn="ctr"/>
-          </a:p>
-        </p:txBody>
-      </p:sp>
-      <p:sp>
-        <p:nvSpPr>
-          <p:cNvPr id="11" name="TextBox 10"/>
-          <p:cNvSpPr txBox="1"/>
-          <p:nvPr/>
-        </p:nvSpPr>
-        <p:spPr>
-          <a:xfrm>
-            <a:off x="822960" y="2011680"/>
-            <a:ext cx="4754880" cy="457200"/>
-          </a:xfrm>
-          <a:prstGeom prst="rect">
-            <a:avLst/>
-          </a:prstGeom>
-          <a:noFill/>
-        </p:spPr>
-        <p:txBody>
-          <a:bodyPr wrap="square">
-            <a:spAutoFit/>
-          </a:bodyPr>
-          <a:lstStyle/>
-          <a:p>
-            <a:pPr algn="l">
-              <a:defRPr sz="1000" b="0">
-                <a:solidFill>
-                  <a:srgbClr val="B0B8CC"/>
-                </a:solidFill>
-                <a:latin typeface="Calibri"/>
-              </a:defRPr>
-            </a:pPr>
-            <a:r>
-              <a:t>Autonomous Extraterrestrial High-throughput Enhancing</a:t>
-            </a:r>
-            <a:br/>
-            <a:r>
-              <a:t>Routing and Inter-planetary eXchange</a:t>
-            </a:r>
-          </a:p>
-        </p:txBody>
-      </p:sp>
-      <p:sp>
-        <p:nvSpPr>
-          <p:cNvPr id="12" name="TextBox 11"/>
-          <p:cNvSpPr txBox="1"/>
-          <p:nvPr/>
-        </p:nvSpPr>
-        <p:spPr>
-          <a:xfrm>
-            <a:off x="822960" y="2468880"/>
-            <a:ext cx="4754880" cy="457200"/>
-          </a:xfrm>
-          <a:prstGeom prst="rect">
-            <a:avLst/>
-          </a:prstGeom>
-          <a:noFill/>
-        </p:spPr>
-        <p:txBody>
-          <a:bodyPr wrap="square">
-            <a:spAutoFit/>
-          </a:bodyPr>
-          <a:lstStyle/>
-          <a:p>
-            <a:pPr algn="l">
-              <a:defRPr sz="1000" b="0">
-                <a:solidFill>
-                  <a:srgbClr val="B0B8CC"/>
-                </a:solidFill>
-                <a:latin typeface="Calibri"/>
-              </a:defRPr>
-            </a:pPr>
-            <a:r>
-              <a:t>An architecture for delay-tolerant networking (DTN)</a:t>
-            </a:r>
-            <a:br/>
-            <a:r>
-              <a:t>between Earth and Mars</a:t>
-            </a:r>
-          </a:p>
-        </p:txBody>
-      </p:sp>
-      <p:sp>
-        <p:nvSpPr>
-          <p:cNvPr id="13" name="TextBox 12"/>
-          <p:cNvSpPr txBox="1"/>
-          <p:nvPr/>
-        </p:nvSpPr>
-        <p:spPr>
-          <a:xfrm>
-            <a:off x="822960" y="2926080"/>
-            <a:ext cx="4754880" cy="457200"/>
-          </a:xfrm>
-          <a:prstGeom prst="rect">
-            <a:avLst/>
-          </a:prstGeom>
-          <a:noFill/>
-        </p:spPr>
-        <p:txBody>
-          <a:bodyPr wrap="square">
-            <a:spAutoFit/>
-          </a:bodyPr>
-          <a:lstStyle/>
-          <a:p>
-            <a:pPr algn="l">
-              <a:defRPr sz="1000" b="0">
-                <a:solidFill>
-                  <a:srgbClr val="B0B8CC"/>
-                </a:solidFill>
-                <a:latin typeface="Calibri"/>
-              </a:defRPr>
-            </a:pPr>
-            <a:r>
-              <a:t>Replaces static Contact Graph Routing with</a:t>
-            </a:r>
-            <a:br/>
-            <a:r>
-              <a:t>reinforcement-learning-based adaptive routing</a:t>
-            </a:r>
-          </a:p>
-        </p:txBody>
-      </p:sp>
-      <p:sp>
-        <p:nvSpPr>
-          <p:cNvPr id="14" name="TextBox 13"/>
-          <p:cNvSpPr txBox="1"/>
-          <p:nvPr/>
-        </p:nvSpPr>
-        <p:spPr>
-          <a:xfrm>
-            <a:off x="822960" y="3383280"/>
-            <a:ext cx="4754880" cy="457200"/>
-          </a:xfrm>
-          <a:prstGeom prst="rect">
-            <a:avLst/>
-          </a:prstGeom>
-          <a:noFill/>
-        </p:spPr>
-        <p:txBody>
-          <a:bodyPr wrap="square">
-            <a:spAutoFit/>
-          </a:bodyPr>
-          <a:lstStyle/>
-          <a:p>
-            <a:pPr algn="l">
-              <a:defRPr sz="1000" b="0">
-                <a:solidFill>
-                  <a:srgbClr val="B0B8CC"/>
-                </a:solidFill>
-                <a:latin typeface="Calibri"/>
-              </a:defRPr>
-            </a:pPr>
-            <a:r>
-              <a:t>Secures links via Quantum Key Distribution</a:t>
-            </a:r>
-            <a:br/>
-            <a:r>
-              <a:t>(BB84 &amp; E91 protocols with repeater chains)</a:t>
-            </a:r>
-          </a:p>
-        </p:txBody>
-      </p:sp>
-      <p:sp>
-        <p:nvSpPr>
-          <p:cNvPr id="15" name="TextBox 14"/>
-          <p:cNvSpPr txBox="1"/>
-          <p:nvPr/>
-        </p:nvSpPr>
-        <p:spPr>
-          <a:xfrm>
-            <a:off x="822960" y="3840480"/>
-            <a:ext cx="4754880" cy="457200"/>
-          </a:xfrm>
-          <a:prstGeom prst="rect">
-            <a:avLst/>
-          </a:prstGeom>
-          <a:noFill/>
-        </p:spPr>
-        <p:txBody>
-          <a:bodyPr wrap="square">
-            <a:spAutoFit/>
-          </a:bodyPr>
-          <a:lstStyle/>
-          <a:p>
-            <a:pPr algn="l">
-              <a:defRPr sz="1000" b="0">
-                <a:solidFill>
-                  <a:srgbClr val="B0B8CC"/>
-                </a:solidFill>
-                <a:latin typeface="Calibri"/>
-              </a:defRPr>
-            </a:pPr>
-            <a:r>
-              <a:t>Hybrid optical/RF communications across</a:t>
-            </a:r>
-            <a:br/>
-            <a:r>
-              <a:t>a 5-tier, 241-node interplanetary topology</a:t>
-            </a:r>
-          </a:p>
-        </p:txBody>
-      </p:sp>
-      <p:sp>
-        <p:nvSpPr>
-          <p:cNvPr id="16" name="TextBox 15"/>
-          <p:cNvSpPr txBox="1"/>
-          <p:nvPr/>
-        </p:nvSpPr>
-        <p:spPr>
-          <a:xfrm>
-            <a:off x="822960" y="4297680"/>
-            <a:ext cx="4754880" cy="457200"/>
-          </a:xfrm>
-          <a:prstGeom prst="rect">
-            <a:avLst/>
-          </a:prstGeom>
-          <a:noFill/>
-        </p:spPr>
-        <p:txBody>
-          <a:bodyPr wrap="square">
-            <a:spAutoFit/>
-          </a:bodyPr>
-          <a:lstStyle/>
-          <a:p>
-            <a:pPr algn="l">
-              <a:defRPr sz="1000" b="0">
-                <a:solidFill>
-                  <a:srgbClr val="B0B8CC"/>
-                </a:solidFill>
-                <a:latin typeface="Calibri"/>
-              </a:defRPr>
-            </a:pPr>
-            <a:r>
-              <a:t>Open-source, standards-compliant (CCSDS, IETF)</a:t>
-            </a:r>
-            <a:br/>
-            <a:r>
-              <a:t>research platform for deep-space networking</a:t>
-            </a:r>
-          </a:p>
-        </p:txBody>
-      </p:sp>
-      <p:sp>
-        <p:nvSpPr>
-          <p:cNvPr id="17" name="Rounded Rectangle 16"/>
-          <p:cNvSpPr/>
-          <p:nvPr/>
-        </p:nvSpPr>
-        <p:spPr>
-          <a:xfrm>
-            <a:off x="6126480" y="1463040"/>
-            <a:ext cx="5120640" cy="3474720"/>
-          </a:xfrm>
-          <a:prstGeom prst="roundRect">
-            <a:avLst/>
-          </a:prstGeom>
-          <a:solidFill>
-            <a:srgbClr val="141B2D"/>
-          </a:solidFill>
-          <a:ln w="12700">
-            <a:solidFill>
-              <a:srgbClr val="FF4D4D"/>
-            </a:solidFill>
-          </a:ln>
-          <a:effectLst/>
-        </p:spPr>
-        <p:style>
-          <a:lnRef idx="1">
-            <a:schemeClr val="accent1"/>
-          </a:lnRef>
-          <a:fillRef idx="3">
-            <a:schemeClr val="accent1"/>
-          </a:fillRef>
-          <a:effectRef idx="2">
-            <a:schemeClr val="accent1"/>
-          </a:effectRef>
-          <a:fontRef idx="minor">
-            <a:schemeClr val="lt1"/>
-          </a:fontRef>
-        </p:style>
-        <p:txBody>
-          <a:bodyPr rtlCol="0" anchor="ctr" wrap="square" lIns="137160" rIns="137160" tIns="91440" bIns="91440"/>
-          <a:lstStyle/>
-          <a:p>
-            <a:pPr algn="ctr">
-              <a:defRPr sz="1600" b="1">
-                <a:solidFill>
-                  <a:srgbClr val="009EFF"/>
-                </a:solidFill>
-                <a:latin typeface="Calibri"/>
-              </a:defRPr>
-            </a:pPr>
-          </a:p>
-        </p:txBody>
-      </p:sp>
-      <p:sp>
-        <p:nvSpPr>
-          <p:cNvPr id="18" name="TextBox 17"/>
-          <p:cNvSpPr txBox="1"/>
-          <p:nvPr/>
-        </p:nvSpPr>
-        <p:spPr>
-          <a:xfrm>
-            <a:off x="6309360" y="1554480"/>
-            <a:ext cx="4754880" cy="411480"/>
-          </a:xfrm>
-          <a:prstGeom prst="rect">
-            <a:avLst/>
-          </a:prstGeom>
-          <a:noFill/>
-        </p:spPr>
-        <p:txBody>
-          <a:bodyPr wrap="square">
-            <a:spAutoFit/>
-          </a:bodyPr>
-          <a:lstStyle/>
-          <a:p>
-            <a:pPr algn="l">
-              <a:defRPr sz="1800" b="1">
-                <a:solidFill>
-                  <a:srgbClr val="FF4D4D"/>
-                </a:solidFill>
-                <a:latin typeface="Calibri"/>
-              </a:defRPr>
-            </a:pPr>
-            <a:r>
-              <a:t>The Problem</a:t>
-            </a:r>
-          </a:p>
-        </p:txBody>
-      </p:sp>
-      <p:sp>
-        <p:nvSpPr>
-          <p:cNvPr id="19" name="Rectangle 18"/>
-          <p:cNvSpPr/>
-          <p:nvPr/>
-        </p:nvSpPr>
-        <p:spPr>
-          <a:xfrm>
-            <a:off x="6309360" y="1920240"/>
-            <a:ext cx="1828800" cy="25400"/>
-          </a:xfrm>
-          <a:prstGeom prst="rect">
-            <a:avLst/>
-          </a:prstGeom>
-          <a:solidFill>
-            <a:srgbClr val="FF4D4D"/>
-          </a:solidFill>
-          <a:ln>
-            <a:noFill/>
-          </a:ln>
-          <a:effectLst/>
-        </p:spPr>
-        <p:style>
-          <a:lnRef idx="1">
-            <a:schemeClr val="accent1"/>
-          </a:lnRef>
-          <a:fillRef idx="3">
-            <a:schemeClr val="accent1"/>
-          </a:fillRef>
-          <a:effectRef idx="2">
-            <a:schemeClr val="accent1"/>
-          </a:effectRef>
-          <a:fontRef idx="minor">
-            <a:schemeClr val="lt1"/>
-          </a:fontRef>
-        </p:style>
-        <p:txBody>
-          <a:bodyPr rtlCol="0" anchor="ctr"/>
-          <a:lstStyle/>
-          <a:p>
-            <a:pPr algn="ctr"/>
-          </a:p>
-        </p:txBody>
-      </p:sp>
-      <p:sp>
-        <p:nvSpPr>
-          <p:cNvPr id="20" name="TextBox 19"/>
-          <p:cNvSpPr txBox="1"/>
-          <p:nvPr/>
-        </p:nvSpPr>
-        <p:spPr>
-          <a:xfrm>
-            <a:off x="6309360" y="2011680"/>
-            <a:ext cx="4754880" cy="457200"/>
-          </a:xfrm>
-          <a:prstGeom prst="rect">
-            <a:avLst/>
-          </a:prstGeom>
-          <a:noFill/>
-        </p:spPr>
-        <p:txBody>
-          <a:bodyPr wrap="square">
-            <a:spAutoFit/>
-          </a:bodyPr>
-          <a:lstStyle/>
-          <a:p>
-            <a:pPr algn="l">
-              <a:defRPr sz="1000" b="0">
-                <a:solidFill>
-                  <a:srgbClr val="B0B8CC"/>
-                </a:solidFill>
-                <a:latin typeface="Calibri"/>
-              </a:defRPr>
-            </a:pPr>
-            <a:r>
-              <a:t>Earth–Mars distance varies from 54.6M to 401M km</a:t>
-            </a:r>
-            <a:br/>
-            <a:r>
-              <a:t>— a 7x range swing every 780 days</a:t>
-            </a:r>
-          </a:p>
-        </p:txBody>
-      </p:sp>
-      <p:sp>
-        <p:nvSpPr>
-          <p:cNvPr id="21" name="TextBox 20"/>
-          <p:cNvSpPr txBox="1"/>
-          <p:nvPr/>
-        </p:nvSpPr>
-        <p:spPr>
-          <a:xfrm>
-            <a:off x="6309360" y="2468880"/>
-            <a:ext cx="4754880" cy="457200"/>
-          </a:xfrm>
-          <a:prstGeom prst="rect">
-            <a:avLst/>
-          </a:prstGeom>
-          <a:noFill/>
-        </p:spPr>
-        <p:txBody>
-          <a:bodyPr wrap="square">
-            <a:spAutoFit/>
-          </a:bodyPr>
-          <a:lstStyle/>
-          <a:p>
-            <a:pPr algn="l">
-              <a:defRPr sz="1000" b="0">
-                <a:solidFill>
-                  <a:srgbClr val="B0B8CC"/>
-                </a:solidFill>
-                <a:latin typeface="Calibri"/>
-              </a:defRPr>
-            </a:pPr>
-            <a:r>
-              <a:t>One-way light delay is 3–22 minutes;</a:t>
-            </a:r>
-            <a:br/>
-            <a:r>
-              <a:t>round-trip TCP ACK is 6–44 minutes</a:t>
-            </a:r>
-          </a:p>
-        </p:txBody>
-      </p:sp>
-      <p:sp>
-        <p:nvSpPr>
-          <p:cNvPr id="22" name="TextBox 21"/>
-          <p:cNvSpPr txBox="1"/>
-          <p:nvPr/>
-        </p:nvSpPr>
-        <p:spPr>
-          <a:xfrm>
-            <a:off x="6309360" y="2926080"/>
-            <a:ext cx="4754880" cy="457200"/>
-          </a:xfrm>
-          <a:prstGeom prst="rect">
-            <a:avLst/>
-          </a:prstGeom>
-          <a:noFill/>
-        </p:spPr>
-        <p:txBody>
-          <a:bodyPr wrap="square">
-            <a:spAutoFit/>
-          </a:bodyPr>
-          <a:lstStyle/>
-          <a:p>
-            <a:pPr algn="l">
-              <a:defRPr sz="1000" b="0">
-                <a:solidFill>
-                  <a:srgbClr val="B0B8CC"/>
-                </a:solidFill>
-                <a:latin typeface="Calibri"/>
-              </a:defRPr>
-            </a:pPr>
-            <a:r>
-              <a:t>Solar conjunction causes ~2-week communication</a:t>
-            </a:r>
-            <a:br/>
-            <a:r>
-              <a:t>blackouts twice per synodic period</a:t>
-            </a:r>
-          </a:p>
-        </p:txBody>
-      </p:sp>
-      <p:sp>
-        <p:nvSpPr>
-          <p:cNvPr id="23" name="TextBox 22"/>
-          <p:cNvSpPr txBox="1"/>
-          <p:nvPr/>
-        </p:nvSpPr>
-        <p:spPr>
-          <a:xfrm>
-            <a:off x="6309360" y="3383280"/>
-            <a:ext cx="4754880" cy="457200"/>
-          </a:xfrm>
-          <a:prstGeom prst="rect">
-            <a:avLst/>
-          </a:prstGeom>
-          <a:noFill/>
-        </p:spPr>
-        <p:txBody>
-          <a:bodyPr wrap="square">
-            <a:spAutoFit/>
-          </a:bodyPr>
-          <a:lstStyle/>
-          <a:p>
-            <a:pPr algn="l">
-              <a:defRPr sz="1000" b="0">
-                <a:solidFill>
-                  <a:srgbClr val="B0B8CC"/>
-                </a:solidFill>
-                <a:latin typeface="Calibri"/>
-              </a:defRPr>
-            </a:pPr>
-            <a:r>
-              <a:t>Deep-space links are inherently intermittent:</a:t>
-            </a:r>
-            <a:br/>
-            <a:r>
-              <a:t>no continuous end-to-end path exists</a:t>
-            </a:r>
-          </a:p>
-        </p:txBody>
-      </p:sp>
-      <p:sp>
-        <p:nvSpPr>
-          <p:cNvPr id="24" name="TextBox 23"/>
-          <p:cNvSpPr txBox="1"/>
-          <p:nvPr/>
-        </p:nvSpPr>
-        <p:spPr>
-          <a:xfrm>
-            <a:off x="6309360" y="3840480"/>
-            <a:ext cx="4754880" cy="457200"/>
-          </a:xfrm>
-          <a:prstGeom prst="rect">
-            <a:avLst/>
-          </a:prstGeom>
-          <a:noFill/>
-        </p:spPr>
-        <p:txBody>
-          <a:bodyPr wrap="square">
-            <a:spAutoFit/>
-          </a:bodyPr>
-          <a:lstStyle/>
-          <a:p>
-            <a:pPr algn="l">
-              <a:defRPr sz="1000" b="0">
-                <a:solidFill>
-                  <a:srgbClr val="B0B8CC"/>
-                </a:solidFill>
-                <a:latin typeface="Calibri"/>
-              </a:defRPr>
-            </a:pPr>
-            <a:r>
-              <a:t>Static routing cannot adapt to dynamic</a:t>
-            </a:r>
-            <a:br/>
-            <a:r>
-              <a:t>contact schedules and link degradation</a:t>
-            </a:r>
-          </a:p>
-        </p:txBody>
-      </p:sp>
-      <p:sp>
-        <p:nvSpPr>
-          <p:cNvPr id="25" name="TextBox 24"/>
-          <p:cNvSpPr txBox="1"/>
-          <p:nvPr/>
-        </p:nvSpPr>
-        <p:spPr>
-          <a:xfrm>
-            <a:off x="6309360" y="4297680"/>
-            <a:ext cx="4754880" cy="457200"/>
-          </a:xfrm>
-          <a:prstGeom prst="rect">
-            <a:avLst/>
-          </a:prstGeom>
-          <a:noFill/>
-        </p:spPr>
-        <p:txBody>
-          <a:bodyPr wrap="square">
-            <a:spAutoFit/>
-          </a:bodyPr>
-          <a:lstStyle/>
-          <a:p>
-            <a:pPr algn="l">
-              <a:defRPr sz="1000" b="0">
-                <a:solidFill>
-                  <a:srgbClr val="B0B8CC"/>
-                </a:solidFill>
-                <a:latin typeface="Calibri"/>
-              </a:defRPr>
-            </a:pPr>
-            <a:r>
-              <a:t>Classical key exchange is infeasible across</a:t>
-            </a:r>
-            <a:br/>
-            <a:r>
-              <a:t>interplanetary distances</a:t>
-            </a:r>
-          </a:p>
-        </p:txBody>
-      </p:sp>
-      <p:sp>
-        <p:nvSpPr>
-          <p:cNvPr id="26" name="Rounded Rectangle 25"/>
-          <p:cNvSpPr/>
-          <p:nvPr/>
-        </p:nvSpPr>
-        <p:spPr>
-          <a:xfrm>
-            <a:off x="640080" y="5212080"/>
-            <a:ext cx="10607040" cy="822960"/>
-          </a:xfrm>
-          <a:prstGeom prst="roundRect">
-            <a:avLst/>
-          </a:prstGeom>
-          <a:solidFill>
-            <a:srgbClr val="009EFF"/>
-          </a:solidFill>
-          <a:ln>
-            <a:noFill/>
-          </a:ln>
-          <a:effectLst/>
-        </p:spPr>
-        <p:style>
-          <a:lnRef idx="1">
-            <a:schemeClr val="accent1"/>
-          </a:lnRef>
-          <a:fillRef idx="3">
-            <a:schemeClr val="accent1"/>
-          </a:fillRef>
-          <a:effectRef idx="2">
-            <a:schemeClr val="accent1"/>
-          </a:effectRef>
-          <a:fontRef idx="minor">
-            <a:schemeClr val="lt1"/>
-          </a:fontRef>
-        </p:style>
-        <p:txBody>
-          <a:bodyPr rtlCol="0" anchor="ctr"/>
-          <a:lstStyle/>
-          <a:p>
-            <a:pPr algn="ctr"/>
-          </a:p>
-        </p:txBody>
-      </p:sp>
-      <p:sp>
-        <p:nvSpPr>
-          <p:cNvPr id="27" name="TextBox 26"/>
-          <p:cNvSpPr txBox="1"/>
-          <p:nvPr/>
-        </p:nvSpPr>
-        <p:spPr>
-          <a:xfrm>
-            <a:off x="914400" y="5303520"/>
-            <a:ext cx="10058400" cy="640080"/>
-          </a:xfrm>
-          <a:prstGeom prst="rect">
-            <a:avLst/>
-          </a:prstGeom>
-          <a:noFill/>
-        </p:spPr>
-        <p:txBody>
-          <a:bodyPr wrap="square">
-            <a:spAutoFit/>
-          </a:bodyPr>
-          <a:lstStyle/>
-          <a:p>
-            <a:pPr algn="ctr">
-              <a:defRPr sz="1300" b="1">
-                <a:solidFill>
-                  <a:srgbClr val="FFFFFF"/>
-                </a:solidFill>
-                <a:latin typeface="Calibri"/>
-              </a:defRPr>
-            </a:pPr>
-            <a:r>
-              <a:t>AETHERIX addresses every one of these challenges — harnessing DTN store-and-forward, AI-driven adaptive routing, quantum-secured key distribution, and hybrid optical/RF links.</a:t>
-            </a:r>
-          </a:p>
-        </p:txBody>
-      </p:sp>
-    </p:spTree>
-  </p:cSld>
-  <p:transition spd="med" advClick="1">
-    <p:fade/>
-  </p:transition>
-  <p:clrMapOvr>
-    <a:masterClrMapping/>
-  </p:clrMapOvr>
-</p:sld>
-</file>
-
-<file path=ppt/slides/slide30.xml><?xml version="1.0" encoding="utf-8"?>
-<p:sld xmlns:a="http://schemas.openxmlformats.org/drawingml/2006/main" xmlns:p="http://schemas.openxmlformats.org/presentationml/2006/main" xmlns:r="http://schemas.openxmlformats.org/officeDocument/2006/relationships">
-  <p:cSld>
-    <p:bg>
-      <p:bgPr>
-        <a:solidFill>
-          <a:srgbClr val="0B0E1A"/>
-        </a:solidFill>
-        <a:effectLst/>
-      </p:bgPr>
-    </p:bg>
-    <p:spTree>
-      <p:nvGrpSpPr>
-        <p:cNvPr id="1" name=""/>
-        <p:cNvGrpSpPr/>
-        <p:nvPr/>
-      </p:nvGrpSpPr>
-      <p:grpSpPr/>
-      <p:sp>
-        <p:nvSpPr>
-          <p:cNvPr id="2" name="TextBox 1"/>
-          <p:cNvSpPr txBox="1"/>
-          <p:nvPr/>
-        </p:nvSpPr>
-        <p:spPr>
-          <a:xfrm>
-            <a:off x="640080" y="274320"/>
-            <a:ext cx="10972800" cy="640080"/>
-          </a:xfrm>
-          <a:prstGeom prst="rect">
-            <a:avLst/>
-          </a:prstGeom>
-          <a:noFill/>
-        </p:spPr>
-        <p:txBody>
-          <a:bodyPr wrap="square">
-            <a:spAutoFit/>
-          </a:bodyPr>
-          <a:lstStyle/>
-          <a:p>
-            <a:pPr algn="l">
-              <a:defRPr sz="3400" b="1">
-                <a:solidFill>
-                  <a:srgbClr val="FFFFFF"/>
-                </a:solidFill>
-                <a:latin typeface="Calibri"/>
-              </a:defRPr>
-            </a:pPr>
-            <a:r>
-              <a:t>REFERENCES (cont.)</a:t>
-            </a:r>
-          </a:p>
-        </p:txBody>
-      </p:sp>
-      <p:sp>
-        <p:nvSpPr>
-          <p:cNvPr id="3" name="Rectangle 2"/>
-          <p:cNvSpPr/>
-          <p:nvPr/>
-        </p:nvSpPr>
-        <p:spPr>
-          <a:xfrm>
-            <a:off x="640080" y="868680"/>
-            <a:ext cx="2743200" cy="38100"/>
-          </a:xfrm>
-          <a:prstGeom prst="rect">
-            <a:avLst/>
-          </a:prstGeom>
-          <a:solidFill>
-            <a:srgbClr val="00D4AA"/>
-          </a:solidFill>
-          <a:ln>
-            <a:noFill/>
-          </a:ln>
-          <a:effectLst/>
-        </p:spPr>
-        <p:style>
-          <a:lnRef idx="1">
-            <a:schemeClr val="accent1"/>
-          </a:lnRef>
-          <a:fillRef idx="3">
-            <a:schemeClr val="accent1"/>
-          </a:fillRef>
-          <a:effectRef idx="2">
-            <a:schemeClr val="accent1"/>
-          </a:effectRef>
-          <a:fontRef idx="minor">
-            <a:schemeClr val="lt1"/>
-          </a:fontRef>
-        </p:style>
-        <p:txBody>
-          <a:bodyPr rtlCol="0" anchor="ctr"/>
-          <a:lstStyle/>
-          <a:p>
-            <a:pPr algn="ctr"/>
-          </a:p>
-        </p:txBody>
-      </p:sp>
-      <p:sp>
-        <p:nvSpPr>
-          <p:cNvPr id="4" name="TextBox 3"/>
-          <p:cNvSpPr txBox="1"/>
-          <p:nvPr/>
-        </p:nvSpPr>
-        <p:spPr>
-          <a:xfrm>
-            <a:off x="640080" y="960120"/>
-            <a:ext cx="10972800" cy="365760"/>
-          </a:xfrm>
-          <a:prstGeom prst="rect">
-            <a:avLst/>
-          </a:prstGeom>
-          <a:noFill/>
-        </p:spPr>
-        <p:txBody>
-          <a:bodyPr wrap="square">
-            <a:spAutoFit/>
-          </a:bodyPr>
-          <a:lstStyle/>
-          <a:p>
-            <a:pPr algn="l">
-              <a:defRPr sz="1300" b="0">
-                <a:solidFill>
-                  <a:srgbClr val="6B7B96"/>
-                </a:solidFill>
-                <a:latin typeface="Calibri"/>
-              </a:defRPr>
-            </a:pPr>
-            <a:r>
-              <a:t>Project Sources [A1]–[A8]  ·  M. A. Tariq, AETHERIX, github.com/matx104/AETHERIX (2025)</a:t>
-            </a:r>
-          </a:p>
-        </p:txBody>
-      </p:sp>
-      <p:sp>
-        <p:nvSpPr>
-          <p:cNvPr id="5" name="TextBox 4"/>
-          <p:cNvSpPr txBox="1"/>
-          <p:nvPr/>
-        </p:nvSpPr>
-        <p:spPr>
-          <a:xfrm>
-            <a:off x="365760" y="1508760"/>
-            <a:ext cx="5760720" cy="365760"/>
-          </a:xfrm>
-          <a:prstGeom prst="rect">
-            <a:avLst/>
-          </a:prstGeom>
-          <a:noFill/>
-        </p:spPr>
-        <p:txBody>
-          <a:bodyPr wrap="square">
-            <a:spAutoFit/>
-          </a:bodyPr>
-          <a:lstStyle/>
-          <a:p>
-            <a:pPr algn="l">
-              <a:defRPr sz="1100" b="0">
-                <a:solidFill>
-                  <a:srgbClr val="B0B8CC"/>
-                </a:solidFill>
-                <a:latin typeface="Calibri"/>
-              </a:defRPr>
-            </a:pPr>
-            <a:r>
-              <a:t>[A1] RL Routing Agent — src/routing/rl_agent.py</a:t>
-            </a:r>
-          </a:p>
-        </p:txBody>
-      </p:sp>
-      <p:sp>
-        <p:nvSpPr>
-          <p:cNvPr id="6" name="TextBox 5"/>
-          <p:cNvSpPr txBox="1"/>
-          <p:nvPr/>
-        </p:nvSpPr>
-        <p:spPr>
-          <a:xfrm>
-            <a:off x="365760" y="1920240"/>
-            <a:ext cx="5760720" cy="365760"/>
-          </a:xfrm>
-          <a:prstGeom prst="rect">
-            <a:avLst/>
-          </a:prstGeom>
-          <a:noFill/>
-        </p:spPr>
-        <p:txBody>
-          <a:bodyPr wrap="square">
-            <a:spAutoFit/>
-          </a:bodyPr>
-          <a:lstStyle/>
-          <a:p>
-            <a:pPr algn="l">
-              <a:defRPr sz="1100" b="0">
-                <a:solidFill>
-                  <a:srgbClr val="B0B8CC"/>
-                </a:solidFill>
-                <a:latin typeface="Calibri"/>
-              </a:defRPr>
-            </a:pPr>
-            <a:r>
-              <a:t>[A2] Network Topology — src/orbital/topology.py</a:t>
-            </a:r>
-          </a:p>
-        </p:txBody>
-      </p:sp>
-      <p:sp>
-        <p:nvSpPr>
-          <p:cNvPr id="7" name="TextBox 6"/>
-          <p:cNvSpPr txBox="1"/>
-          <p:nvPr/>
-        </p:nvSpPr>
-        <p:spPr>
-          <a:xfrm>
-            <a:off x="365760" y="2331720"/>
-            <a:ext cx="5760720" cy="365760"/>
-          </a:xfrm>
-          <a:prstGeom prst="rect">
-            <a:avLst/>
-          </a:prstGeom>
-          <a:noFill/>
-        </p:spPr>
-        <p:txBody>
-          <a:bodyPr wrap="square">
-            <a:spAutoFit/>
-          </a:bodyPr>
-          <a:lstStyle/>
-          <a:p>
-            <a:pPr algn="l">
-              <a:defRPr sz="1100" b="0">
-                <a:solidFill>
-                  <a:srgbClr val="B0B8CC"/>
-                </a:solidFill>
-                <a:latin typeface="Calibri"/>
-              </a:defRPr>
-            </a:pPr>
-            <a:r>
-              <a:t>[A3] End-to-End Simulation — run_simulation.py Module 3 (RL training)</a:t>
-            </a:r>
-          </a:p>
-        </p:txBody>
-      </p:sp>
-      <p:sp>
-        <p:nvSpPr>
-          <p:cNvPr id="8" name="TextBox 7"/>
-          <p:cNvSpPr txBox="1"/>
-          <p:nvPr/>
-        </p:nvSpPr>
-        <p:spPr>
-          <a:xfrm>
-            <a:off x="365760" y="2743200"/>
-            <a:ext cx="5760720" cy="365760"/>
-          </a:xfrm>
-          <a:prstGeom prst="rect">
-            <a:avLst/>
-          </a:prstGeom>
-          <a:noFill/>
-        </p:spPr>
-        <p:txBody>
-          <a:bodyPr wrap="square">
-            <a:spAutoFit/>
-          </a:bodyPr>
-          <a:lstStyle/>
-          <a:p>
-            <a:pPr algn="l">
-              <a:defRPr sz="1100" b="0">
-                <a:solidFill>
-                  <a:srgbClr val="B0B8CC"/>
-                </a:solidFill>
-                <a:latin typeface="Calibri"/>
-              </a:defRPr>
-            </a:pPr>
-            <a:r>
-              <a:t>[A4] Optical Link Budget Calculator — src/infrastructure/link_budget.py</a:t>
-            </a:r>
-          </a:p>
-        </p:txBody>
-      </p:sp>
-      <p:sp>
-        <p:nvSpPr>
-          <p:cNvPr id="9" name="TextBox 8"/>
-          <p:cNvSpPr txBox="1"/>
-          <p:nvPr/>
-        </p:nvSpPr>
-        <p:spPr>
-          <a:xfrm>
-            <a:off x="6309360" y="1508760"/>
-            <a:ext cx="5760720" cy="365760"/>
-          </a:xfrm>
-          <a:prstGeom prst="rect">
-            <a:avLst/>
-          </a:prstGeom>
-          <a:noFill/>
-        </p:spPr>
-        <p:txBody>
-          <a:bodyPr wrap="square">
-            <a:spAutoFit/>
-          </a:bodyPr>
-          <a:lstStyle/>
-          <a:p>
-            <a:pPr algn="l">
-              <a:defRPr sz="1100" b="0">
-                <a:solidFill>
-                  <a:srgbClr val="B0B8CC"/>
-                </a:solidFill>
-                <a:latin typeface="Calibri"/>
-              </a:defRPr>
-            </a:pPr>
-            <a:r>
-              <a:t>[A5] QKD Protocol Implementation — src/security/qkd.py</a:t>
-            </a:r>
-          </a:p>
-        </p:txBody>
-      </p:sp>
-      <p:sp>
-        <p:nvSpPr>
-          <p:cNvPr id="10" name="TextBox 9"/>
-          <p:cNvSpPr txBox="1"/>
-          <p:nvPr/>
-        </p:nvSpPr>
-        <p:spPr>
-          <a:xfrm>
-            <a:off x="6309360" y="1920240"/>
-            <a:ext cx="5760720" cy="365760"/>
-          </a:xfrm>
-          <a:prstGeom prst="rect">
-            <a:avLst/>
-          </a:prstGeom>
-          <a:noFill/>
-        </p:spPr>
-        <p:txBody>
-          <a:bodyPr wrap="square">
-            <a:spAutoFit/>
-          </a:bodyPr>
-          <a:lstStyle/>
-          <a:p>
-            <a:pPr algn="l">
-              <a:defRPr sz="1100" b="0">
-                <a:solidFill>
-                  <a:srgbClr val="B0B8CC"/>
-                </a:solidFill>
-                <a:latin typeface="Calibri"/>
-              </a:defRPr>
-            </a:pPr>
-            <a:r>
-              <a:t>[A6] Radiation Hardening Model — src/computing/radiation.py</a:t>
-            </a:r>
-          </a:p>
-        </p:txBody>
-      </p:sp>
-      <p:sp>
-        <p:nvSpPr>
-          <p:cNvPr id="11" name="TextBox 10"/>
-          <p:cNvSpPr txBox="1"/>
-          <p:nvPr/>
-        </p:nvSpPr>
-        <p:spPr>
-          <a:xfrm>
-            <a:off x="6309360" y="2331720"/>
-            <a:ext cx="5760720" cy="365760"/>
-          </a:xfrm>
-          <a:prstGeom prst="rect">
-            <a:avLst/>
-          </a:prstGeom>
-          <a:noFill/>
-        </p:spPr>
-        <p:txBody>
-          <a:bodyPr wrap="square">
-            <a:spAutoFit/>
-          </a:bodyPr>
-          <a:lstStyle/>
-          <a:p>
-            <a:pPr algn="l">
-              <a:defRPr sz="1100" b="0">
-                <a:solidFill>
-                  <a:srgbClr val="B0B8CC"/>
-                </a:solidFill>
-                <a:latin typeface="Calibri"/>
-              </a:defRPr>
-            </a:pPr>
-            <a:r>
-              <a:t>[A7] Data Prioritization Engine — src/routing/prioritization.py</a:t>
-            </a:r>
-          </a:p>
-        </p:txBody>
-      </p:sp>
-      <p:sp>
-        <p:nvSpPr>
-          <p:cNvPr id="12" name="TextBox 11"/>
-          <p:cNvSpPr txBox="1"/>
-          <p:nvPr/>
-        </p:nvSpPr>
-        <p:spPr>
-          <a:xfrm>
-            <a:off x="6309360" y="2743200"/>
-            <a:ext cx="5760720" cy="365760"/>
-          </a:xfrm>
-          <a:prstGeom prst="rect">
-            <a:avLst/>
-          </a:prstGeom>
-          <a:noFill/>
-        </p:spPr>
-        <p:txBody>
-          <a:bodyPr wrap="square">
-            <a:spAutoFit/>
-          </a:bodyPr>
-          <a:lstStyle/>
-          <a:p>
-            <a:pPr algn="l">
-              <a:defRPr sz="1100" b="0">
-                <a:solidFill>
-                  <a:srgbClr val="B0B8CC"/>
-                </a:solidFill>
-                <a:latin typeface="Calibri"/>
-              </a:defRPr>
-            </a:pPr>
-            <a:r>
-              <a:t>[A8] Failure &amp; Recovery Simulation — run_simulation.py Module 4 (conjunction)</a:t>
-            </a:r>
-          </a:p>
-        </p:txBody>
-      </p:sp>
-      <p:sp>
-        <p:nvSpPr>
-          <p:cNvPr id="13" name="Rounded Rectangle 12"/>
-          <p:cNvSpPr/>
-          <p:nvPr/>
-        </p:nvSpPr>
-        <p:spPr>
-          <a:xfrm>
-            <a:off x="365760" y="3383280"/>
-            <a:ext cx="11704320" cy="2011680"/>
-          </a:xfrm>
-          <a:prstGeom prst="roundRect">
-            <a:avLst/>
-          </a:prstGeom>
-          <a:solidFill>
-            <a:srgbClr val="141B2D"/>
-          </a:solidFill>
-          <a:ln w="12700">
-            <a:solidFill>
-              <a:srgbClr val="8B5CF6"/>
-            </a:solidFill>
-          </a:ln>
-          <a:effectLst/>
-        </p:spPr>
-        <p:style>
-          <a:lnRef idx="1">
-            <a:schemeClr val="accent1"/>
-          </a:lnRef>
-          <a:fillRef idx="3">
-            <a:schemeClr val="accent1"/>
-          </a:fillRef>
-          <a:effectRef idx="2">
-            <a:schemeClr val="accent1"/>
-          </a:effectRef>
-          <a:fontRef idx="minor">
-            <a:schemeClr val="lt1"/>
-          </a:fontRef>
-        </p:style>
-        <p:txBody>
-          <a:bodyPr rtlCol="0" anchor="ctr" wrap="square" lIns="137160" rIns="137160" tIns="91440" bIns="91440"/>
-          <a:lstStyle/>
-          <a:p>
-            <a:pPr algn="ctr">
-              <a:defRPr sz="1600" b="1">
-                <a:solidFill>
-                  <a:srgbClr val="8B5CF6"/>
-                </a:solidFill>
-                <a:latin typeface="Calibri"/>
-              </a:defRPr>
-            </a:pPr>
-            <a:r>
-              <a:t>Three-Layer Attribution (resolves the prior citation gap)</a:t>
-            </a:r>
-          </a:p>
-          <a:p>
-            <a:pPr algn="l">
-              <a:spcBef>
-                <a:spcPts val="200"/>
-              </a:spcBef>
-              <a:spcAft>
-                <a:spcPts val="200"/>
-              </a:spcAft>
-              <a:defRPr sz="1200" b="0">
-                <a:solidFill>
-                  <a:srgbClr val="B0B8CC"/>
-                </a:solidFill>
-                <a:latin typeface="Calibri"/>
-              </a:defRPr>
-            </a:pPr>
-            <a:r>
-              <a:t>Layer A — Industry/scientific baseline [1]–[20] (e.g. NASA MRO 0.5–6 Mbps [1]).</a:t>
-            </a:r>
-          </a:p>
-          <a:p>
-            <a:pPr algn="l">
-              <a:spcBef>
-                <a:spcPts val="200"/>
-              </a:spcBef>
-              <a:spcAft>
-                <a:spcPts val="200"/>
-              </a:spcAft>
-              <a:defRPr sz="1200" b="0">
-                <a:solidFill>
-                  <a:srgbClr val="B0B8CC"/>
-                </a:solidFill>
-                <a:latin typeface="Calibri"/>
-              </a:defRPr>
-            </a:pPr>
-            <a:r>
-              <a:t>Layer B — This project's design decision [A1]–[A8] (cite the code).</a:t>
-            </a:r>
-          </a:p>
-          <a:p>
-            <a:pPr algn="l">
-              <a:spcBef>
-                <a:spcPts val="200"/>
-              </a:spcBef>
-              <a:spcAft>
-                <a:spcPts val="200"/>
-              </a:spcAft>
-              <a:defRPr sz="1200" b="0">
-                <a:solidFill>
-                  <a:srgbClr val="B0B8CC"/>
-                </a:solidFill>
-                <a:latin typeface="Calibri"/>
-              </a:defRPr>
-            </a:pPr>
-            <a:r>
-              <a:t>Layer C — Demonstrated simulation results [A6][A8] (cite the run, e.g. radiation 200× [A6]).</a:t>
-            </a:r>
-          </a:p>
-          <a:p>
-            <a:pPr algn="l">
-              <a:spcBef>
-                <a:spcPts val="200"/>
-              </a:spcBef>
-              <a:spcAft>
-                <a:spcPts val="200"/>
-              </a:spcAft>
-              <a:defRPr sz="1200" b="0">
-                <a:solidFill>
-                  <a:srgbClr val="B0B8CC"/>
-                </a:solidFill>
-                <a:latin typeface="Calibri"/>
-              </a:defRPr>
-            </a:pPr>
-            <a:r>
-              <a:t>Design targets (&gt;95% availability, 2–200 Mbps capability) are labelled as such, never as measured results.</a:t>
-            </a:r>
-          </a:p>
-        </p:txBody>
-      </p:sp>
-      <p:sp>
-        <p:nvSpPr>
-          <p:cNvPr id="14" name="TextBox 13"/>
-          <p:cNvSpPr txBox="1"/>
-          <p:nvPr/>
-        </p:nvSpPr>
-        <p:spPr>
-          <a:xfrm>
-            <a:off x="457200" y="6601968"/>
-            <a:ext cx="11430000" cy="228600"/>
-          </a:xfrm>
-          <a:prstGeom prst="rect">
-            <a:avLst/>
-          </a:prstGeom>
-          <a:noFill/>
-        </p:spPr>
-        <p:txBody>
-          <a:bodyPr wrap="square">
-            <a:spAutoFit/>
-          </a:bodyPr>
-          <a:lstStyle/>
-          <a:p>
-            <a:pPr algn="l">
-              <a:defRPr sz="800" b="0">
-                <a:solidFill>
-                  <a:srgbClr val="6B7B96"/>
-                </a:solidFill>
-                <a:latin typeface="Calibri"/>
-              </a:defRPr>
-            </a:pPr>
-            <a:r>
-              <a:t>Reproducible: python run_simulation.py  ·  480 tests: python -m pytest tests/ -q  ·  matx104.github.io/AETHERIX</a:t>
-            </a:r>
-          </a:p>
-        </p:txBody>
-      </p:sp>
-      <p:sp>
-        <p:nvSpPr>
-          <p:cNvPr id="15" name="TextBox 14"/>
-          <p:cNvSpPr txBox="1"/>
-          <p:nvPr/>
-        </p:nvSpPr>
-        <p:spPr>
-          <a:xfrm>
-            <a:off x="457200" y="6400800"/>
-            <a:ext cx="4572000" cy="365760"/>
-          </a:xfrm>
-          <a:prstGeom prst="rect">
-            <a:avLst/>
-          </a:prstGeom>
-          <a:noFill/>
-        </p:spPr>
-        <p:txBody>
-          <a:bodyPr wrap="square">
-            <a:spAutoFit/>
-          </a:bodyPr>
-          <a:lstStyle/>
-          <a:p>
-            <a:pPr algn="l">
-              <a:defRPr sz="1000" b="0">
-                <a:solidFill>
-                  <a:srgbClr val="6B7B96"/>
-                </a:solidFill>
-                <a:latin typeface="Calibri"/>
-              </a:defRPr>
-            </a:pPr>
-            <a:r>
-              <a:t>AETHERIX — Interplanetary Communication Network</a:t>
-            </a:r>
-          </a:p>
-        </p:txBody>
-      </p:sp>
-      <p:sp>
-        <p:nvSpPr>
-          <p:cNvPr id="16" name="TextBox 15"/>
-          <p:cNvSpPr txBox="1"/>
-          <p:nvPr/>
-        </p:nvSpPr>
-        <p:spPr>
-          <a:xfrm>
-            <a:off x="10058400" y="6400800"/>
-            <a:ext cx="1828800" cy="365760"/>
-          </a:xfrm>
-          <a:prstGeom prst="rect">
-            <a:avLst/>
-          </a:prstGeom>
-          <a:noFill/>
-        </p:spPr>
-        <p:txBody>
-          <a:bodyPr wrap="square">
-            <a:spAutoFit/>
-          </a:bodyPr>
-          <a:lstStyle/>
-          <a:p>
-            <a:pPr algn="r">
-              <a:defRPr sz="1000" b="0">
-                <a:solidFill>
-                  <a:srgbClr val="6B7B96"/>
-                </a:solidFill>
-                <a:latin typeface="Calibri"/>
-              </a:defRPr>
-            </a:pPr>
-            <a:r>
-              <a:t>30 / 31</a:t>
+              <a:t>30 / 33</a:t>
             </a:r>
           </a:p>
         </p:txBody>
@@ -25124,6 +23962,1652 @@
       <p:grpSpPr/>
       <p:sp>
         <p:nvSpPr>
+          <p:cNvPr id="2" name="TextBox 1"/>
+          <p:cNvSpPr txBox="1"/>
+          <p:nvPr/>
+        </p:nvSpPr>
+        <p:spPr>
+          <a:xfrm>
+            <a:off x="640080" y="274320"/>
+            <a:ext cx="10972800" cy="640080"/>
+          </a:xfrm>
+          <a:prstGeom prst="rect">
+            <a:avLst/>
+          </a:prstGeom>
+          <a:noFill/>
+        </p:spPr>
+        <p:txBody>
+          <a:bodyPr wrap="square">
+            <a:spAutoFit/>
+          </a:bodyPr>
+          <a:lstStyle/>
+          <a:p>
+            <a:pPr algn="l">
+              <a:defRPr sz="3400" b="1">
+                <a:solidFill>
+                  <a:srgbClr val="FFFFFF"/>
+                </a:solidFill>
+                <a:latin typeface="Calibri"/>
+              </a:defRPr>
+            </a:pPr>
+            <a:r>
+              <a:t>REFERENCES</a:t>
+            </a:r>
+          </a:p>
+        </p:txBody>
+      </p:sp>
+      <p:sp>
+        <p:nvSpPr>
+          <p:cNvPr id="3" name="Rectangle 2"/>
+          <p:cNvSpPr/>
+          <p:nvPr/>
+        </p:nvSpPr>
+        <p:spPr>
+          <a:xfrm>
+            <a:off x="640080" y="868680"/>
+            <a:ext cx="2743200" cy="38100"/>
+          </a:xfrm>
+          <a:prstGeom prst="rect">
+            <a:avLst/>
+          </a:prstGeom>
+          <a:solidFill>
+            <a:srgbClr val="00D4AA"/>
+          </a:solidFill>
+          <a:ln>
+            <a:noFill/>
+          </a:ln>
+          <a:effectLst/>
+        </p:spPr>
+        <p:style>
+          <a:lnRef idx="1">
+            <a:schemeClr val="accent1"/>
+          </a:lnRef>
+          <a:fillRef idx="3">
+            <a:schemeClr val="accent1"/>
+          </a:fillRef>
+          <a:effectRef idx="2">
+            <a:schemeClr val="accent1"/>
+          </a:effectRef>
+          <a:fontRef idx="minor">
+            <a:schemeClr val="lt1"/>
+          </a:fontRef>
+        </p:style>
+        <p:txBody>
+          <a:bodyPr rtlCol="0" anchor="ctr"/>
+          <a:lstStyle/>
+          <a:p>
+            <a:pPr algn="ctr"/>
+          </a:p>
+        </p:txBody>
+      </p:sp>
+      <p:sp>
+        <p:nvSpPr>
+          <p:cNvPr id="4" name="TextBox 3"/>
+          <p:cNvSpPr txBox="1"/>
+          <p:nvPr/>
+        </p:nvSpPr>
+        <p:spPr>
+          <a:xfrm>
+            <a:off x="640080" y="960120"/>
+            <a:ext cx="10972800" cy="365760"/>
+          </a:xfrm>
+          <a:prstGeom prst="rect">
+            <a:avLst/>
+          </a:prstGeom>
+          <a:noFill/>
+        </p:spPr>
+        <p:txBody>
+          <a:bodyPr wrap="square">
+            <a:spAutoFit/>
+          </a:bodyPr>
+          <a:lstStyle/>
+          <a:p>
+            <a:pPr algn="l">
+              <a:defRPr sz="1300" b="0">
+                <a:solidFill>
+                  <a:srgbClr val="6B7B96"/>
+                </a:solidFill>
+                <a:latin typeface="Calibri"/>
+              </a:defRPr>
+            </a:pPr>
+            <a:r>
+              <a:t>Industry &amp; Scientific Sources [1]–[20]  ·  three-layer attribution: [N] industry · [AN] this project</a:t>
+            </a:r>
+          </a:p>
+        </p:txBody>
+      </p:sp>
+      <p:sp>
+        <p:nvSpPr>
+          <p:cNvPr id="5" name="TextBox 4"/>
+          <p:cNvSpPr txBox="1"/>
+          <p:nvPr/>
+        </p:nvSpPr>
+        <p:spPr>
+          <a:xfrm>
+            <a:off x="365760" y="1463040"/>
+            <a:ext cx="5760720" cy="365760"/>
+          </a:xfrm>
+          <a:prstGeom prst="rect">
+            <a:avLst/>
+          </a:prstGeom>
+          <a:noFill/>
+        </p:spPr>
+        <p:txBody>
+          <a:bodyPr wrap="square">
+            <a:spAutoFit/>
+          </a:bodyPr>
+          <a:lstStyle/>
+          <a:p>
+            <a:pPr algn="l">
+              <a:defRPr sz="900" b="0">
+                <a:solidFill>
+                  <a:srgbClr val="B0B8CC"/>
+                </a:solidFill>
+                <a:latin typeface="Calibri"/>
+              </a:defRPr>
+            </a:pPr>
+            <a:r>
+              <a:t>[1] NASA JPL, Mars Relay Network User's Guide, 2024.</a:t>
+            </a:r>
+          </a:p>
+        </p:txBody>
+      </p:sp>
+      <p:sp>
+        <p:nvSpPr>
+          <p:cNvPr id="6" name="TextBox 5"/>
+          <p:cNvSpPr txBox="1"/>
+          <p:nvPr/>
+        </p:nvSpPr>
+        <p:spPr>
+          <a:xfrm>
+            <a:off x="365760" y="1874520"/>
+            <a:ext cx="5760720" cy="365760"/>
+          </a:xfrm>
+          <a:prstGeom prst="rect">
+            <a:avLst/>
+          </a:prstGeom>
+          <a:noFill/>
+        </p:spPr>
+        <p:txBody>
+          <a:bodyPr wrap="square">
+            <a:spAutoFit/>
+          </a:bodyPr>
+          <a:lstStyle/>
+          <a:p>
+            <a:pPr algn="l">
+              <a:defRPr sz="900" b="0">
+                <a:solidFill>
+                  <a:srgbClr val="B0B8CC"/>
+                </a:solidFill>
+                <a:latin typeface="Calibri"/>
+              </a:defRPr>
+            </a:pPr>
+            <a:r>
+              <a:t>[2] CCSDS, Bundle Protocol Spec., 734.2-B-1, 2021.</a:t>
+            </a:r>
+          </a:p>
+        </p:txBody>
+      </p:sp>
+      <p:sp>
+        <p:nvSpPr>
+          <p:cNvPr id="7" name="TextBox 6"/>
+          <p:cNvSpPr txBox="1"/>
+          <p:nvPr/>
+        </p:nvSpPr>
+        <p:spPr>
+          <a:xfrm>
+            <a:off x="365760" y="2286000"/>
+            <a:ext cx="5760720" cy="365760"/>
+          </a:xfrm>
+          <a:prstGeom prst="rect">
+            <a:avLst/>
+          </a:prstGeom>
+          <a:noFill/>
+        </p:spPr>
+        <p:txBody>
+          <a:bodyPr wrap="square">
+            <a:spAutoFit/>
+          </a:bodyPr>
+          <a:lstStyle/>
+          <a:p>
+            <a:pPr algn="l">
+              <a:defRPr sz="900" b="0">
+                <a:solidFill>
+                  <a:srgbClr val="B0B8CC"/>
+                </a:solidFill>
+                <a:latin typeface="Calibri"/>
+              </a:defRPr>
+            </a:pPr>
+            <a:r>
+              <a:t>[3] JPL Horizons, Earth–Mars Ephemeris, 2025.</a:t>
+            </a:r>
+          </a:p>
+        </p:txBody>
+      </p:sp>
+      <p:sp>
+        <p:nvSpPr>
+          <p:cNvPr id="8" name="TextBox 7"/>
+          <p:cNvSpPr txBox="1"/>
+          <p:nvPr/>
+        </p:nvSpPr>
+        <p:spPr>
+          <a:xfrm>
+            <a:off x="365760" y="2697480"/>
+            <a:ext cx="5760720" cy="365760"/>
+          </a:xfrm>
+          <a:prstGeom prst="rect">
+            <a:avLst/>
+          </a:prstGeom>
+          <a:noFill/>
+        </p:spPr>
+        <p:txBody>
+          <a:bodyPr wrap="square">
+            <a:spAutoFit/>
+          </a:bodyPr>
+          <a:lstStyle/>
+          <a:p>
+            <a:pPr algn="l">
+              <a:defRPr sz="900" b="0">
+                <a:solidFill>
+                  <a:srgbClr val="B0B8CC"/>
+                </a:solidFill>
+                <a:latin typeface="Calibri"/>
+              </a:defRPr>
+            </a:pPr>
+            <a:r>
+              <a:t>[4] NASA, Deep Space Optical Comm. (DSOC), Psyche, 2024.</a:t>
+            </a:r>
+          </a:p>
+        </p:txBody>
+      </p:sp>
+      <p:sp>
+        <p:nvSpPr>
+          <p:cNvPr id="9" name="TextBox 8"/>
+          <p:cNvSpPr txBox="1"/>
+          <p:nvPr/>
+        </p:nvSpPr>
+        <p:spPr>
+          <a:xfrm>
+            <a:off x="365760" y="3108960"/>
+            <a:ext cx="5760720" cy="365760"/>
+          </a:xfrm>
+          <a:prstGeom prst="rect">
+            <a:avLst/>
+          </a:prstGeom>
+          <a:noFill/>
+        </p:spPr>
+        <p:txBody>
+          <a:bodyPr wrap="square">
+            <a:spAutoFit/>
+          </a:bodyPr>
+          <a:lstStyle/>
+          <a:p>
+            <a:pPr algn="l">
+              <a:defRPr sz="900" b="0">
+                <a:solidFill>
+                  <a:srgbClr val="B0B8CC"/>
+                </a:solidFill>
+                <a:latin typeface="Calibri"/>
+              </a:defRPr>
+            </a:pPr>
+            <a:r>
+              <a:t>[5] CCSDS, Optical Comm. Coding &amp; Sync., 141.0-B-1, 2019.</a:t>
+            </a:r>
+          </a:p>
+        </p:txBody>
+      </p:sp>
+      <p:sp>
+        <p:nvSpPr>
+          <p:cNvPr id="10" name="TextBox 9"/>
+          <p:cNvSpPr txBox="1"/>
+          <p:nvPr/>
+        </p:nvSpPr>
+        <p:spPr>
+          <a:xfrm>
+            <a:off x="365760" y="3520440"/>
+            <a:ext cx="5760720" cy="365760"/>
+          </a:xfrm>
+          <a:prstGeom prst="rect">
+            <a:avLst/>
+          </a:prstGeom>
+          <a:noFill/>
+        </p:spPr>
+        <p:txBody>
+          <a:bodyPr wrap="square">
+            <a:spAutoFit/>
+          </a:bodyPr>
+          <a:lstStyle/>
+          <a:p>
+            <a:pPr algn="l">
+              <a:defRPr sz="900" b="0">
+                <a:solidFill>
+                  <a:srgbClr val="B0B8CC"/>
+                </a:solidFill>
+                <a:latin typeface="Calibri"/>
+              </a:defRPr>
+            </a:pPr>
+            <a:r>
+              <a:t>[6] CCSDS, TM Space Data Link Protocol, 131.0-B-3, 2017.</a:t>
+            </a:r>
+          </a:p>
+        </p:txBody>
+      </p:sp>
+      <p:sp>
+        <p:nvSpPr>
+          <p:cNvPr id="11" name="TextBox 10"/>
+          <p:cNvSpPr txBox="1"/>
+          <p:nvPr/>
+        </p:nvSpPr>
+        <p:spPr>
+          <a:xfrm>
+            <a:off x="365760" y="3931920"/>
+            <a:ext cx="5760720" cy="365760"/>
+          </a:xfrm>
+          <a:prstGeom prst="rect">
+            <a:avLst/>
+          </a:prstGeom>
+          <a:noFill/>
+        </p:spPr>
+        <p:txBody>
+          <a:bodyPr wrap="square">
+            <a:spAutoFit/>
+          </a:bodyPr>
+          <a:lstStyle/>
+          <a:p>
+            <a:pPr algn="l">
+              <a:defRPr sz="900" b="0">
+                <a:solidFill>
+                  <a:srgbClr val="B0B8CC"/>
+                </a:solidFill>
+                <a:latin typeface="Calibri"/>
+              </a:defRPr>
+            </a:pPr>
+            <a:r>
+              <a:t>[7] CCSDS, Lossless Data Compression, 121.0-B-3, 2020.</a:t>
+            </a:r>
+          </a:p>
+        </p:txBody>
+      </p:sp>
+      <p:sp>
+        <p:nvSpPr>
+          <p:cNvPr id="12" name="TextBox 11"/>
+          <p:cNvSpPr txBox="1"/>
+          <p:nvPr/>
+        </p:nvSpPr>
+        <p:spPr>
+          <a:xfrm>
+            <a:off x="365760" y="4343400"/>
+            <a:ext cx="5760720" cy="365760"/>
+          </a:xfrm>
+          <a:prstGeom prst="rect">
+            <a:avLst/>
+          </a:prstGeom>
+          <a:noFill/>
+        </p:spPr>
+        <p:txBody>
+          <a:bodyPr wrap="square">
+            <a:spAutoFit/>
+          </a:bodyPr>
+          <a:lstStyle/>
+          <a:p>
+            <a:pPr algn="l">
+              <a:defRPr sz="900" b="0">
+                <a:solidFill>
+                  <a:srgbClr val="B0B8CC"/>
+                </a:solidFill>
+                <a:latin typeface="Calibri"/>
+              </a:defRPr>
+            </a:pPr>
+            <a:r>
+              <a:t>[8] CCSDS, Image Data Compression, 122.0-B-2, 2017.</a:t>
+            </a:r>
+          </a:p>
+        </p:txBody>
+      </p:sp>
+      <p:sp>
+        <p:nvSpPr>
+          <p:cNvPr id="13" name="TextBox 12"/>
+          <p:cNvSpPr txBox="1"/>
+          <p:nvPr/>
+        </p:nvSpPr>
+        <p:spPr>
+          <a:xfrm>
+            <a:off x="365760" y="4754880"/>
+            <a:ext cx="5760720" cy="365760"/>
+          </a:xfrm>
+          <a:prstGeom prst="rect">
+            <a:avLst/>
+          </a:prstGeom>
+          <a:noFill/>
+        </p:spPr>
+        <p:txBody>
+          <a:bodyPr wrap="square">
+            <a:spAutoFit/>
+          </a:bodyPr>
+          <a:lstStyle/>
+          <a:p>
+            <a:pPr algn="l">
+              <a:defRPr sz="900" b="0">
+                <a:solidFill>
+                  <a:srgbClr val="B0B8CC"/>
+                </a:solidFill>
+                <a:latin typeface="Calibri"/>
+              </a:defRPr>
+            </a:pPr>
+            <a:r>
+              <a:t>[9] IETF, Bundle Protocol Version 7, RFC 9171, 2022.</a:t>
+            </a:r>
+          </a:p>
+        </p:txBody>
+      </p:sp>
+      <p:sp>
+        <p:nvSpPr>
+          <p:cNvPr id="14" name="TextBox 13"/>
+          <p:cNvSpPr txBox="1"/>
+          <p:nvPr/>
+        </p:nvSpPr>
+        <p:spPr>
+          <a:xfrm>
+            <a:off x="365760" y="5166360"/>
+            <a:ext cx="5760720" cy="365760"/>
+          </a:xfrm>
+          <a:prstGeom prst="rect">
+            <a:avLst/>
+          </a:prstGeom>
+          <a:noFill/>
+        </p:spPr>
+        <p:txBody>
+          <a:bodyPr wrap="square">
+            <a:spAutoFit/>
+          </a:bodyPr>
+          <a:lstStyle/>
+          <a:p>
+            <a:pPr algn="l">
+              <a:defRPr sz="900" b="0">
+                <a:solidFill>
+                  <a:srgbClr val="B0B8CC"/>
+                </a:solidFill>
+                <a:latin typeface="Calibri"/>
+              </a:defRPr>
+            </a:pPr>
+            <a:r>
+              <a:t>[10] IETF, Licklider Transmission Protocol, RFC 5326, 2008.</a:t>
+            </a:r>
+          </a:p>
+        </p:txBody>
+      </p:sp>
+      <p:sp>
+        <p:nvSpPr>
+          <p:cNvPr id="15" name="TextBox 14"/>
+          <p:cNvSpPr txBox="1"/>
+          <p:nvPr/>
+        </p:nvSpPr>
+        <p:spPr>
+          <a:xfrm>
+            <a:off x="6309360" y="1463040"/>
+            <a:ext cx="5760720" cy="365760"/>
+          </a:xfrm>
+          <a:prstGeom prst="rect">
+            <a:avLst/>
+          </a:prstGeom>
+          <a:noFill/>
+        </p:spPr>
+        <p:txBody>
+          <a:bodyPr wrap="square">
+            <a:spAutoFit/>
+          </a:bodyPr>
+          <a:lstStyle/>
+          <a:p>
+            <a:pPr algn="l">
+              <a:defRPr sz="900" b="0">
+                <a:solidFill>
+                  <a:srgbClr val="B0B8CC"/>
+                </a:solidFill>
+                <a:latin typeface="Calibri"/>
+              </a:defRPr>
+            </a:pPr>
+            <a:r>
+              <a:t>[11] IETF, DTN TCP Convergence Layer, RFC 7242, 2014.</a:t>
+            </a:r>
+          </a:p>
+        </p:txBody>
+      </p:sp>
+      <p:sp>
+        <p:nvSpPr>
+          <p:cNvPr id="16" name="TextBox 15"/>
+          <p:cNvSpPr txBox="1"/>
+          <p:nvPr/>
+        </p:nvSpPr>
+        <p:spPr>
+          <a:xfrm>
+            <a:off x="6309360" y="1874520"/>
+            <a:ext cx="5760720" cy="365760"/>
+          </a:xfrm>
+          <a:prstGeom prst="rect">
+            <a:avLst/>
+          </a:prstGeom>
+          <a:noFill/>
+        </p:spPr>
+        <p:txBody>
+          <a:bodyPr wrap="square">
+            <a:spAutoFit/>
+          </a:bodyPr>
+          <a:lstStyle/>
+          <a:p>
+            <a:pPr algn="l">
+              <a:defRPr sz="900" b="0">
+                <a:solidFill>
+                  <a:srgbClr val="B0B8CC"/>
+                </a:solidFill>
+                <a:latin typeface="Calibri"/>
+              </a:defRPr>
+            </a:pPr>
+            <a:r>
+              <a:t>[12] IETF, Delay-Tolerant Networking Architecture, RFC 4838, 2007.</a:t>
+            </a:r>
+          </a:p>
+        </p:txBody>
+      </p:sp>
+      <p:sp>
+        <p:nvSpPr>
+          <p:cNvPr id="17" name="TextBox 16"/>
+          <p:cNvSpPr txBox="1"/>
+          <p:nvPr/>
+        </p:nvSpPr>
+        <p:spPr>
+          <a:xfrm>
+            <a:off x="6309360" y="2286000"/>
+            <a:ext cx="5760720" cy="365760"/>
+          </a:xfrm>
+          <a:prstGeom prst="rect">
+            <a:avLst/>
+          </a:prstGeom>
+          <a:noFill/>
+        </p:spPr>
+        <p:txBody>
+          <a:bodyPr wrap="square">
+            <a:spAutoFit/>
+          </a:bodyPr>
+          <a:lstStyle/>
+          <a:p>
+            <a:pPr algn="l">
+              <a:defRPr sz="900" b="0">
+                <a:solidFill>
+                  <a:srgbClr val="B0B8CC"/>
+                </a:solidFill>
+                <a:latin typeface="Calibri"/>
+              </a:defRPr>
+            </a:pPr>
+            <a:r>
+              <a:t>[13] Bennett &amp; Brassard, Quantum Cryptography, IEEE ICC, 1984.</a:t>
+            </a:r>
+          </a:p>
+        </p:txBody>
+      </p:sp>
+      <p:sp>
+        <p:nvSpPr>
+          <p:cNvPr id="18" name="TextBox 17"/>
+          <p:cNvSpPr txBox="1"/>
+          <p:nvPr/>
+        </p:nvSpPr>
+        <p:spPr>
+          <a:xfrm>
+            <a:off x="6309360" y="2697480"/>
+            <a:ext cx="5760720" cy="365760"/>
+          </a:xfrm>
+          <a:prstGeom prst="rect">
+            <a:avLst/>
+          </a:prstGeom>
+          <a:noFill/>
+        </p:spPr>
+        <p:txBody>
+          <a:bodyPr wrap="square">
+            <a:spAutoFit/>
+          </a:bodyPr>
+          <a:lstStyle/>
+          <a:p>
+            <a:pPr algn="l">
+              <a:defRPr sz="900" b="0">
+                <a:solidFill>
+                  <a:srgbClr val="B0B8CC"/>
+                </a:solidFill>
+                <a:latin typeface="Calibri"/>
+              </a:defRPr>
+            </a:pPr>
+            <a:r>
+              <a:t>[14] Ekert, Quantum Cryptography Based on Bell's Theorem, PRL 67, 1991.</a:t>
+            </a:r>
+          </a:p>
+        </p:txBody>
+      </p:sp>
+      <p:sp>
+        <p:nvSpPr>
+          <p:cNvPr id="19" name="TextBox 18"/>
+          <p:cNvSpPr txBox="1"/>
+          <p:nvPr/>
+        </p:nvSpPr>
+        <p:spPr>
+          <a:xfrm>
+            <a:off x="6309360" y="3108960"/>
+            <a:ext cx="5760720" cy="365760"/>
+          </a:xfrm>
+          <a:prstGeom prst="rect">
+            <a:avLst/>
+          </a:prstGeom>
+          <a:noFill/>
+        </p:spPr>
+        <p:txBody>
+          <a:bodyPr wrap="square">
+            <a:spAutoFit/>
+          </a:bodyPr>
+          <a:lstStyle/>
+          <a:p>
+            <a:pPr algn="l">
+              <a:defRPr sz="900" b="0">
+                <a:solidFill>
+                  <a:srgbClr val="B0B8CC"/>
+                </a:solidFill>
+                <a:latin typeface="Calibri"/>
+              </a:defRPr>
+            </a:pPr>
+            <a:r>
+              <a:t>[15] Shor &amp; Preskill, Simple Proof of Security of BB84, PRL 85, 2000.</a:t>
+            </a:r>
+          </a:p>
+        </p:txBody>
+      </p:sp>
+      <p:sp>
+        <p:nvSpPr>
+          <p:cNvPr id="20" name="TextBox 19"/>
+          <p:cNvSpPr txBox="1"/>
+          <p:nvPr/>
+        </p:nvSpPr>
+        <p:spPr>
+          <a:xfrm>
+            <a:off x="6309360" y="3520440"/>
+            <a:ext cx="5760720" cy="365760"/>
+          </a:xfrm>
+          <a:prstGeom prst="rect">
+            <a:avLst/>
+          </a:prstGeom>
+          <a:noFill/>
+        </p:spPr>
+        <p:txBody>
+          <a:bodyPr wrap="square">
+            <a:spAutoFit/>
+          </a:bodyPr>
+          <a:lstStyle/>
+          <a:p>
+            <a:pPr algn="l">
+              <a:defRPr sz="900" b="0">
+                <a:solidFill>
+                  <a:srgbClr val="B0B8CC"/>
+                </a:solidFill>
+                <a:latin typeface="Calibri"/>
+              </a:defRPr>
+            </a:pPr>
+            <a:r>
+              <a:t>[16] NIST, Module-Lattice-Based KEM, FIPS 203, 2024.</a:t>
+            </a:r>
+          </a:p>
+        </p:txBody>
+      </p:sp>
+      <p:sp>
+        <p:nvSpPr>
+          <p:cNvPr id="21" name="TextBox 20"/>
+          <p:cNvSpPr txBox="1"/>
+          <p:nvPr/>
+        </p:nvSpPr>
+        <p:spPr>
+          <a:xfrm>
+            <a:off x="6309360" y="3931920"/>
+            <a:ext cx="5760720" cy="365760"/>
+          </a:xfrm>
+          <a:prstGeom prst="rect">
+            <a:avLst/>
+          </a:prstGeom>
+          <a:noFill/>
+        </p:spPr>
+        <p:txBody>
+          <a:bodyPr wrap="square">
+            <a:spAutoFit/>
+          </a:bodyPr>
+          <a:lstStyle/>
+          <a:p>
+            <a:pPr algn="l">
+              <a:defRPr sz="900" b="0">
+                <a:solidFill>
+                  <a:srgbClr val="B0B8CC"/>
+                </a:solidFill>
+                <a:latin typeface="Calibri"/>
+              </a:defRPr>
+            </a:pPr>
+            <a:r>
+              <a:t>[17] NIST, Module-Lattice-Based Digital Signature, FIPS 204, 2024.</a:t>
+            </a:r>
+          </a:p>
+        </p:txBody>
+      </p:sp>
+      <p:sp>
+        <p:nvSpPr>
+          <p:cNvPr id="22" name="TextBox 21"/>
+          <p:cNvSpPr txBox="1"/>
+          <p:nvPr/>
+        </p:nvSpPr>
+        <p:spPr>
+          <a:xfrm>
+            <a:off x="6309360" y="4343400"/>
+            <a:ext cx="5760720" cy="365760"/>
+          </a:xfrm>
+          <a:prstGeom prst="rect">
+            <a:avLst/>
+          </a:prstGeom>
+          <a:noFill/>
+        </p:spPr>
+        <p:txBody>
+          <a:bodyPr wrap="square">
+            <a:spAutoFit/>
+          </a:bodyPr>
+          <a:lstStyle/>
+          <a:p>
+            <a:pPr algn="l">
+              <a:defRPr sz="900" b="0">
+                <a:solidFill>
+                  <a:srgbClr val="B0B8CC"/>
+                </a:solidFill>
+                <a:latin typeface="Calibri"/>
+              </a:defRPr>
+            </a:pPr>
+            <a:r>
+              <a:t>[18] BAE Systems, RAD750 Radiation-Hardened PowerPC, 2024.</a:t>
+            </a:r>
+          </a:p>
+        </p:txBody>
+      </p:sp>
+      <p:sp>
+        <p:nvSpPr>
+          <p:cNvPr id="23" name="TextBox 22"/>
+          <p:cNvSpPr txBox="1"/>
+          <p:nvPr/>
+        </p:nvSpPr>
+        <p:spPr>
+          <a:xfrm>
+            <a:off x="6309360" y="4754880"/>
+            <a:ext cx="5760720" cy="365760"/>
+          </a:xfrm>
+          <a:prstGeom prst="rect">
+            <a:avLst/>
+          </a:prstGeom>
+          <a:noFill/>
+        </p:spPr>
+        <p:txBody>
+          <a:bodyPr wrap="square">
+            <a:spAutoFit/>
+          </a:bodyPr>
+          <a:lstStyle/>
+          <a:p>
+            <a:pPr algn="l">
+              <a:defRPr sz="900" b="0">
+                <a:solidFill>
+                  <a:srgbClr val="B0B8CC"/>
+                </a:solidFill>
+                <a:latin typeface="Calibri"/>
+              </a:defRPr>
+            </a:pPr>
+            <a:r>
+              <a:t>[19] ESA/Gaisler, LEON3FT Processor, 2023.</a:t>
+            </a:r>
+          </a:p>
+        </p:txBody>
+      </p:sp>
+      <p:sp>
+        <p:nvSpPr>
+          <p:cNvPr id="24" name="TextBox 23"/>
+          <p:cNvSpPr txBox="1"/>
+          <p:nvPr/>
+        </p:nvSpPr>
+        <p:spPr>
+          <a:xfrm>
+            <a:off x="6309360" y="5166360"/>
+            <a:ext cx="5760720" cy="365760"/>
+          </a:xfrm>
+          <a:prstGeom prst="rect">
+            <a:avLst/>
+          </a:prstGeom>
+          <a:noFill/>
+        </p:spPr>
+        <p:txBody>
+          <a:bodyPr wrap="square">
+            <a:spAutoFit/>
+          </a:bodyPr>
+          <a:lstStyle/>
+          <a:p>
+            <a:pPr algn="l">
+              <a:defRPr sz="900" b="0">
+                <a:solidFill>
+                  <a:srgbClr val="B0B8CC"/>
+                </a:solidFill>
+                <a:latin typeface="Calibri"/>
+              </a:defRPr>
+            </a:pPr>
+            <a:r>
+              <a:t>[20] IETF, RFC 4838 §3.1, 2007 (DTN challenges).</a:t>
+            </a:r>
+          </a:p>
+        </p:txBody>
+      </p:sp>
+      <p:sp>
+        <p:nvSpPr>
+          <p:cNvPr id="25" name="TextBox 24"/>
+          <p:cNvSpPr txBox="1"/>
+          <p:nvPr/>
+        </p:nvSpPr>
+        <p:spPr>
+          <a:xfrm>
+            <a:off x="457200" y="6601968"/>
+            <a:ext cx="11430000" cy="228600"/>
+          </a:xfrm>
+          <a:prstGeom prst="rect">
+            <a:avLst/>
+          </a:prstGeom>
+          <a:noFill/>
+        </p:spPr>
+        <p:txBody>
+          <a:bodyPr wrap="square">
+            <a:spAutoFit/>
+          </a:bodyPr>
+          <a:lstStyle/>
+          <a:p>
+            <a:pPr algn="l">
+              <a:defRPr sz="800" b="0">
+                <a:solidFill>
+                  <a:srgbClr val="6B7B96"/>
+                </a:solidFill>
+                <a:latin typeface="Calibri"/>
+              </a:defRPr>
+            </a:pPr>
+            <a:r>
+              <a:t>Full URLs: github.com/matx104/AETHERIX  ·  next slide: project sources [A1]–[A8]</a:t>
+            </a:r>
+          </a:p>
+        </p:txBody>
+      </p:sp>
+      <p:sp>
+        <p:nvSpPr>
+          <p:cNvPr id="26" name="TextBox 25"/>
+          <p:cNvSpPr txBox="1"/>
+          <p:nvPr/>
+        </p:nvSpPr>
+        <p:spPr>
+          <a:xfrm>
+            <a:off x="457200" y="6400800"/>
+            <a:ext cx="4572000" cy="365760"/>
+          </a:xfrm>
+          <a:prstGeom prst="rect">
+            <a:avLst/>
+          </a:prstGeom>
+          <a:noFill/>
+        </p:spPr>
+        <p:txBody>
+          <a:bodyPr wrap="square">
+            <a:spAutoFit/>
+          </a:bodyPr>
+          <a:lstStyle/>
+          <a:p>
+            <a:pPr algn="l">
+              <a:defRPr sz="1000" b="0">
+                <a:solidFill>
+                  <a:srgbClr val="6B7B96"/>
+                </a:solidFill>
+                <a:latin typeface="Calibri"/>
+              </a:defRPr>
+            </a:pPr>
+            <a:r>
+              <a:t>AETHERIX — Interplanetary Communication Network</a:t>
+            </a:r>
+          </a:p>
+        </p:txBody>
+      </p:sp>
+      <p:sp>
+        <p:nvSpPr>
+          <p:cNvPr id="27" name="TextBox 26"/>
+          <p:cNvSpPr txBox="1"/>
+          <p:nvPr/>
+        </p:nvSpPr>
+        <p:spPr>
+          <a:xfrm>
+            <a:off x="10058400" y="6400800"/>
+            <a:ext cx="1828800" cy="365760"/>
+          </a:xfrm>
+          <a:prstGeom prst="rect">
+            <a:avLst/>
+          </a:prstGeom>
+          <a:noFill/>
+        </p:spPr>
+        <p:txBody>
+          <a:bodyPr wrap="square">
+            <a:spAutoFit/>
+          </a:bodyPr>
+          <a:lstStyle/>
+          <a:p>
+            <a:pPr algn="r">
+              <a:defRPr sz="1000" b="0">
+                <a:solidFill>
+                  <a:srgbClr val="6B7B96"/>
+                </a:solidFill>
+                <a:latin typeface="Calibri"/>
+              </a:defRPr>
+            </a:pPr>
+            <a:r>
+              <a:t>31 / 33</a:t>
+            </a:r>
+          </a:p>
+        </p:txBody>
+      </p:sp>
+    </p:spTree>
+  </p:cSld>
+  <p:transition spd="med" advClick="1">
+    <p:fade/>
+  </p:transition>
+  <p:clrMapOvr>
+    <a:masterClrMapping/>
+  </p:clrMapOvr>
+</p:sld>
+</file>
+
+<file path=ppt/slides/slide32.xml><?xml version="1.0" encoding="utf-8"?>
+<p:sld xmlns:a="http://schemas.openxmlformats.org/drawingml/2006/main" xmlns:p="http://schemas.openxmlformats.org/presentationml/2006/main" xmlns:r="http://schemas.openxmlformats.org/officeDocument/2006/relationships">
+  <p:cSld>
+    <p:bg>
+      <p:bgPr>
+        <a:solidFill>
+          <a:srgbClr val="0B0E1A"/>
+        </a:solidFill>
+        <a:effectLst/>
+      </p:bgPr>
+    </p:bg>
+    <p:spTree>
+      <p:nvGrpSpPr>
+        <p:cNvPr id="1" name=""/>
+        <p:cNvGrpSpPr/>
+        <p:nvPr/>
+      </p:nvGrpSpPr>
+      <p:grpSpPr/>
+      <p:sp>
+        <p:nvSpPr>
+          <p:cNvPr id="2" name="TextBox 1"/>
+          <p:cNvSpPr txBox="1"/>
+          <p:nvPr/>
+        </p:nvSpPr>
+        <p:spPr>
+          <a:xfrm>
+            <a:off x="640080" y="274320"/>
+            <a:ext cx="10972800" cy="640080"/>
+          </a:xfrm>
+          <a:prstGeom prst="rect">
+            <a:avLst/>
+          </a:prstGeom>
+          <a:noFill/>
+        </p:spPr>
+        <p:txBody>
+          <a:bodyPr wrap="square">
+            <a:spAutoFit/>
+          </a:bodyPr>
+          <a:lstStyle/>
+          <a:p>
+            <a:pPr algn="l">
+              <a:defRPr sz="3400" b="1">
+                <a:solidFill>
+                  <a:srgbClr val="FFFFFF"/>
+                </a:solidFill>
+                <a:latin typeface="Calibri"/>
+              </a:defRPr>
+            </a:pPr>
+            <a:r>
+              <a:t>REFERENCES (cont.)</a:t>
+            </a:r>
+          </a:p>
+        </p:txBody>
+      </p:sp>
+      <p:sp>
+        <p:nvSpPr>
+          <p:cNvPr id="3" name="Rectangle 2"/>
+          <p:cNvSpPr/>
+          <p:nvPr/>
+        </p:nvSpPr>
+        <p:spPr>
+          <a:xfrm>
+            <a:off x="640080" y="868680"/>
+            <a:ext cx="2743200" cy="38100"/>
+          </a:xfrm>
+          <a:prstGeom prst="rect">
+            <a:avLst/>
+          </a:prstGeom>
+          <a:solidFill>
+            <a:srgbClr val="00D4AA"/>
+          </a:solidFill>
+          <a:ln>
+            <a:noFill/>
+          </a:ln>
+          <a:effectLst/>
+        </p:spPr>
+        <p:style>
+          <a:lnRef idx="1">
+            <a:schemeClr val="accent1"/>
+          </a:lnRef>
+          <a:fillRef idx="3">
+            <a:schemeClr val="accent1"/>
+          </a:fillRef>
+          <a:effectRef idx="2">
+            <a:schemeClr val="accent1"/>
+          </a:effectRef>
+          <a:fontRef idx="minor">
+            <a:schemeClr val="lt1"/>
+          </a:fontRef>
+        </p:style>
+        <p:txBody>
+          <a:bodyPr rtlCol="0" anchor="ctr"/>
+          <a:lstStyle/>
+          <a:p>
+            <a:pPr algn="ctr"/>
+          </a:p>
+        </p:txBody>
+      </p:sp>
+      <p:sp>
+        <p:nvSpPr>
+          <p:cNvPr id="4" name="TextBox 3"/>
+          <p:cNvSpPr txBox="1"/>
+          <p:nvPr/>
+        </p:nvSpPr>
+        <p:spPr>
+          <a:xfrm>
+            <a:off x="640080" y="960120"/>
+            <a:ext cx="10972800" cy="365760"/>
+          </a:xfrm>
+          <a:prstGeom prst="rect">
+            <a:avLst/>
+          </a:prstGeom>
+          <a:noFill/>
+        </p:spPr>
+        <p:txBody>
+          <a:bodyPr wrap="square">
+            <a:spAutoFit/>
+          </a:bodyPr>
+          <a:lstStyle/>
+          <a:p>
+            <a:pPr algn="l">
+              <a:defRPr sz="1300" b="0">
+                <a:solidFill>
+                  <a:srgbClr val="6B7B96"/>
+                </a:solidFill>
+                <a:latin typeface="Calibri"/>
+              </a:defRPr>
+            </a:pPr>
+            <a:r>
+              <a:t>Project Sources [A1]–[A8]  ·  M. A. Tariq, AETHERIX, github.com/matx104/AETHERIX (2025)</a:t>
+            </a:r>
+          </a:p>
+        </p:txBody>
+      </p:sp>
+      <p:sp>
+        <p:nvSpPr>
+          <p:cNvPr id="5" name="TextBox 4"/>
+          <p:cNvSpPr txBox="1"/>
+          <p:nvPr/>
+        </p:nvSpPr>
+        <p:spPr>
+          <a:xfrm>
+            <a:off x="365760" y="1508760"/>
+            <a:ext cx="5760720" cy="365760"/>
+          </a:xfrm>
+          <a:prstGeom prst="rect">
+            <a:avLst/>
+          </a:prstGeom>
+          <a:noFill/>
+        </p:spPr>
+        <p:txBody>
+          <a:bodyPr wrap="square">
+            <a:spAutoFit/>
+          </a:bodyPr>
+          <a:lstStyle/>
+          <a:p>
+            <a:pPr algn="l">
+              <a:defRPr sz="1100" b="0">
+                <a:solidFill>
+                  <a:srgbClr val="B0B8CC"/>
+                </a:solidFill>
+                <a:latin typeface="Calibri"/>
+              </a:defRPr>
+            </a:pPr>
+            <a:r>
+              <a:t>[A1] RL Routing Agent — src/routing/rl_agent.py</a:t>
+            </a:r>
+          </a:p>
+        </p:txBody>
+      </p:sp>
+      <p:sp>
+        <p:nvSpPr>
+          <p:cNvPr id="6" name="TextBox 5"/>
+          <p:cNvSpPr txBox="1"/>
+          <p:nvPr/>
+        </p:nvSpPr>
+        <p:spPr>
+          <a:xfrm>
+            <a:off x="365760" y="1920240"/>
+            <a:ext cx="5760720" cy="365760"/>
+          </a:xfrm>
+          <a:prstGeom prst="rect">
+            <a:avLst/>
+          </a:prstGeom>
+          <a:noFill/>
+        </p:spPr>
+        <p:txBody>
+          <a:bodyPr wrap="square">
+            <a:spAutoFit/>
+          </a:bodyPr>
+          <a:lstStyle/>
+          <a:p>
+            <a:pPr algn="l">
+              <a:defRPr sz="1100" b="0">
+                <a:solidFill>
+                  <a:srgbClr val="B0B8CC"/>
+                </a:solidFill>
+                <a:latin typeface="Calibri"/>
+              </a:defRPr>
+            </a:pPr>
+            <a:r>
+              <a:t>[A2] Network Topology — src/orbital/topology.py</a:t>
+            </a:r>
+          </a:p>
+        </p:txBody>
+      </p:sp>
+      <p:sp>
+        <p:nvSpPr>
+          <p:cNvPr id="7" name="TextBox 6"/>
+          <p:cNvSpPr txBox="1"/>
+          <p:nvPr/>
+        </p:nvSpPr>
+        <p:spPr>
+          <a:xfrm>
+            <a:off x="365760" y="2331720"/>
+            <a:ext cx="5760720" cy="365760"/>
+          </a:xfrm>
+          <a:prstGeom prst="rect">
+            <a:avLst/>
+          </a:prstGeom>
+          <a:noFill/>
+        </p:spPr>
+        <p:txBody>
+          <a:bodyPr wrap="square">
+            <a:spAutoFit/>
+          </a:bodyPr>
+          <a:lstStyle/>
+          <a:p>
+            <a:pPr algn="l">
+              <a:defRPr sz="1100" b="0">
+                <a:solidFill>
+                  <a:srgbClr val="B0B8CC"/>
+                </a:solidFill>
+                <a:latin typeface="Calibri"/>
+              </a:defRPr>
+            </a:pPr>
+            <a:r>
+              <a:t>[A3] End-to-End Simulation — run_simulation.py Module 3 (RL training)</a:t>
+            </a:r>
+          </a:p>
+        </p:txBody>
+      </p:sp>
+      <p:sp>
+        <p:nvSpPr>
+          <p:cNvPr id="8" name="TextBox 7"/>
+          <p:cNvSpPr txBox="1"/>
+          <p:nvPr/>
+        </p:nvSpPr>
+        <p:spPr>
+          <a:xfrm>
+            <a:off x="365760" y="2743200"/>
+            <a:ext cx="5760720" cy="365760"/>
+          </a:xfrm>
+          <a:prstGeom prst="rect">
+            <a:avLst/>
+          </a:prstGeom>
+          <a:noFill/>
+        </p:spPr>
+        <p:txBody>
+          <a:bodyPr wrap="square">
+            <a:spAutoFit/>
+          </a:bodyPr>
+          <a:lstStyle/>
+          <a:p>
+            <a:pPr algn="l">
+              <a:defRPr sz="1100" b="0">
+                <a:solidFill>
+                  <a:srgbClr val="B0B8CC"/>
+                </a:solidFill>
+                <a:latin typeface="Calibri"/>
+              </a:defRPr>
+            </a:pPr>
+            <a:r>
+              <a:t>[A4] Optical Link Budget Calculator — src/infrastructure/link_budget.py</a:t>
+            </a:r>
+          </a:p>
+        </p:txBody>
+      </p:sp>
+      <p:sp>
+        <p:nvSpPr>
+          <p:cNvPr id="9" name="TextBox 8"/>
+          <p:cNvSpPr txBox="1"/>
+          <p:nvPr/>
+        </p:nvSpPr>
+        <p:spPr>
+          <a:xfrm>
+            <a:off x="6309360" y="1508760"/>
+            <a:ext cx="5760720" cy="365760"/>
+          </a:xfrm>
+          <a:prstGeom prst="rect">
+            <a:avLst/>
+          </a:prstGeom>
+          <a:noFill/>
+        </p:spPr>
+        <p:txBody>
+          <a:bodyPr wrap="square">
+            <a:spAutoFit/>
+          </a:bodyPr>
+          <a:lstStyle/>
+          <a:p>
+            <a:pPr algn="l">
+              <a:defRPr sz="1100" b="0">
+                <a:solidFill>
+                  <a:srgbClr val="B0B8CC"/>
+                </a:solidFill>
+                <a:latin typeface="Calibri"/>
+              </a:defRPr>
+            </a:pPr>
+            <a:r>
+              <a:t>[A5] QKD Protocol Implementation — src/security/qkd.py</a:t>
+            </a:r>
+          </a:p>
+        </p:txBody>
+      </p:sp>
+      <p:sp>
+        <p:nvSpPr>
+          <p:cNvPr id="10" name="TextBox 9"/>
+          <p:cNvSpPr txBox="1"/>
+          <p:nvPr/>
+        </p:nvSpPr>
+        <p:spPr>
+          <a:xfrm>
+            <a:off x="6309360" y="1920240"/>
+            <a:ext cx="5760720" cy="365760"/>
+          </a:xfrm>
+          <a:prstGeom prst="rect">
+            <a:avLst/>
+          </a:prstGeom>
+          <a:noFill/>
+        </p:spPr>
+        <p:txBody>
+          <a:bodyPr wrap="square">
+            <a:spAutoFit/>
+          </a:bodyPr>
+          <a:lstStyle/>
+          <a:p>
+            <a:pPr algn="l">
+              <a:defRPr sz="1100" b="0">
+                <a:solidFill>
+                  <a:srgbClr val="B0B8CC"/>
+                </a:solidFill>
+                <a:latin typeface="Calibri"/>
+              </a:defRPr>
+            </a:pPr>
+            <a:r>
+              <a:t>[A6] Radiation Hardening Model — src/computing/radiation.py</a:t>
+            </a:r>
+          </a:p>
+        </p:txBody>
+      </p:sp>
+      <p:sp>
+        <p:nvSpPr>
+          <p:cNvPr id="11" name="TextBox 10"/>
+          <p:cNvSpPr txBox="1"/>
+          <p:nvPr/>
+        </p:nvSpPr>
+        <p:spPr>
+          <a:xfrm>
+            <a:off x="6309360" y="2331720"/>
+            <a:ext cx="5760720" cy="365760"/>
+          </a:xfrm>
+          <a:prstGeom prst="rect">
+            <a:avLst/>
+          </a:prstGeom>
+          <a:noFill/>
+        </p:spPr>
+        <p:txBody>
+          <a:bodyPr wrap="square">
+            <a:spAutoFit/>
+          </a:bodyPr>
+          <a:lstStyle/>
+          <a:p>
+            <a:pPr algn="l">
+              <a:defRPr sz="1100" b="0">
+                <a:solidFill>
+                  <a:srgbClr val="B0B8CC"/>
+                </a:solidFill>
+                <a:latin typeface="Calibri"/>
+              </a:defRPr>
+            </a:pPr>
+            <a:r>
+              <a:t>[A7] Data Prioritization Engine — src/routing/prioritization.py</a:t>
+            </a:r>
+          </a:p>
+        </p:txBody>
+      </p:sp>
+      <p:sp>
+        <p:nvSpPr>
+          <p:cNvPr id="12" name="TextBox 11"/>
+          <p:cNvSpPr txBox="1"/>
+          <p:nvPr/>
+        </p:nvSpPr>
+        <p:spPr>
+          <a:xfrm>
+            <a:off x="6309360" y="2743200"/>
+            <a:ext cx="5760720" cy="365760"/>
+          </a:xfrm>
+          <a:prstGeom prst="rect">
+            <a:avLst/>
+          </a:prstGeom>
+          <a:noFill/>
+        </p:spPr>
+        <p:txBody>
+          <a:bodyPr wrap="square">
+            <a:spAutoFit/>
+          </a:bodyPr>
+          <a:lstStyle/>
+          <a:p>
+            <a:pPr algn="l">
+              <a:defRPr sz="1100" b="0">
+                <a:solidFill>
+                  <a:srgbClr val="B0B8CC"/>
+                </a:solidFill>
+                <a:latin typeface="Calibri"/>
+              </a:defRPr>
+            </a:pPr>
+            <a:r>
+              <a:t>[A8] Failure &amp; Recovery Simulation — run_simulation.py Module 4 (conjunction)</a:t>
+            </a:r>
+          </a:p>
+        </p:txBody>
+      </p:sp>
+      <p:sp>
+        <p:nvSpPr>
+          <p:cNvPr id="13" name="Rounded Rectangle 12"/>
+          <p:cNvSpPr/>
+          <p:nvPr/>
+        </p:nvSpPr>
+        <p:spPr>
+          <a:xfrm>
+            <a:off x="365760" y="3383280"/>
+            <a:ext cx="11704320" cy="2011680"/>
+          </a:xfrm>
+          <a:prstGeom prst="roundRect">
+            <a:avLst/>
+          </a:prstGeom>
+          <a:solidFill>
+            <a:srgbClr val="141B2D"/>
+          </a:solidFill>
+          <a:ln w="12700">
+            <a:solidFill>
+              <a:srgbClr val="8B5CF6"/>
+            </a:solidFill>
+          </a:ln>
+          <a:effectLst/>
+        </p:spPr>
+        <p:style>
+          <a:lnRef idx="1">
+            <a:schemeClr val="accent1"/>
+          </a:lnRef>
+          <a:fillRef idx="3">
+            <a:schemeClr val="accent1"/>
+          </a:fillRef>
+          <a:effectRef idx="2">
+            <a:schemeClr val="accent1"/>
+          </a:effectRef>
+          <a:fontRef idx="minor">
+            <a:schemeClr val="lt1"/>
+          </a:fontRef>
+        </p:style>
+        <p:txBody>
+          <a:bodyPr rtlCol="0" anchor="ctr" wrap="square" lIns="137160" rIns="137160" tIns="91440" bIns="91440"/>
+          <a:lstStyle/>
+          <a:p>
+            <a:pPr algn="ctr">
+              <a:defRPr sz="1600" b="1">
+                <a:solidFill>
+                  <a:srgbClr val="8B5CF6"/>
+                </a:solidFill>
+                <a:latin typeface="Calibri"/>
+              </a:defRPr>
+            </a:pPr>
+            <a:r>
+              <a:t>Three-Layer Attribution (resolves the prior citation gap)</a:t>
+            </a:r>
+          </a:p>
+          <a:p>
+            <a:pPr algn="l">
+              <a:spcBef>
+                <a:spcPts val="200"/>
+              </a:spcBef>
+              <a:spcAft>
+                <a:spcPts val="200"/>
+              </a:spcAft>
+              <a:defRPr sz="1200" b="0">
+                <a:solidFill>
+                  <a:srgbClr val="B0B8CC"/>
+                </a:solidFill>
+                <a:latin typeface="Calibri"/>
+              </a:defRPr>
+            </a:pPr>
+            <a:r>
+              <a:t>Layer A — Industry/scientific baseline [1]–[20] (e.g. NASA MRO 0.5–6 Mbps [1]).</a:t>
+            </a:r>
+          </a:p>
+          <a:p>
+            <a:pPr algn="l">
+              <a:spcBef>
+                <a:spcPts val="200"/>
+              </a:spcBef>
+              <a:spcAft>
+                <a:spcPts val="200"/>
+              </a:spcAft>
+              <a:defRPr sz="1200" b="0">
+                <a:solidFill>
+                  <a:srgbClr val="B0B8CC"/>
+                </a:solidFill>
+                <a:latin typeface="Calibri"/>
+              </a:defRPr>
+            </a:pPr>
+            <a:r>
+              <a:t>Layer B — This project's design decision [A1]–[A8] (cite the code).</a:t>
+            </a:r>
+          </a:p>
+          <a:p>
+            <a:pPr algn="l">
+              <a:spcBef>
+                <a:spcPts val="200"/>
+              </a:spcBef>
+              <a:spcAft>
+                <a:spcPts val="200"/>
+              </a:spcAft>
+              <a:defRPr sz="1200" b="0">
+                <a:solidFill>
+                  <a:srgbClr val="B0B8CC"/>
+                </a:solidFill>
+                <a:latin typeface="Calibri"/>
+              </a:defRPr>
+            </a:pPr>
+            <a:r>
+              <a:t>Layer C — Demonstrated simulation results [A6][A8] (cite the run, e.g. radiation 200× [A6]).</a:t>
+            </a:r>
+          </a:p>
+          <a:p>
+            <a:pPr algn="l">
+              <a:spcBef>
+                <a:spcPts val="200"/>
+              </a:spcBef>
+              <a:spcAft>
+                <a:spcPts val="200"/>
+              </a:spcAft>
+              <a:defRPr sz="1200" b="0">
+                <a:solidFill>
+                  <a:srgbClr val="B0B8CC"/>
+                </a:solidFill>
+                <a:latin typeface="Calibri"/>
+              </a:defRPr>
+            </a:pPr>
+            <a:r>
+              <a:t>Design targets (&gt;95% availability, 2–200 Mbps capability) are labelled as such, never as measured results.</a:t>
+            </a:r>
+          </a:p>
+        </p:txBody>
+      </p:sp>
+      <p:sp>
+        <p:nvSpPr>
+          <p:cNvPr id="14" name="TextBox 13"/>
+          <p:cNvSpPr txBox="1"/>
+          <p:nvPr/>
+        </p:nvSpPr>
+        <p:spPr>
+          <a:xfrm>
+            <a:off x="457200" y="6601968"/>
+            <a:ext cx="11430000" cy="228600"/>
+          </a:xfrm>
+          <a:prstGeom prst="rect">
+            <a:avLst/>
+          </a:prstGeom>
+          <a:noFill/>
+        </p:spPr>
+        <p:txBody>
+          <a:bodyPr wrap="square">
+            <a:spAutoFit/>
+          </a:bodyPr>
+          <a:lstStyle/>
+          <a:p>
+            <a:pPr algn="l">
+              <a:defRPr sz="800" b="0">
+                <a:solidFill>
+                  <a:srgbClr val="6B7B96"/>
+                </a:solidFill>
+                <a:latin typeface="Calibri"/>
+              </a:defRPr>
+            </a:pPr>
+            <a:r>
+              <a:t>Reproducible: python run_simulation.py  ·  480 tests: python -m pytest tests/ -q  ·  matx104.github.io/AETHERIX</a:t>
+            </a:r>
+          </a:p>
+        </p:txBody>
+      </p:sp>
+      <p:sp>
+        <p:nvSpPr>
+          <p:cNvPr id="15" name="TextBox 14"/>
+          <p:cNvSpPr txBox="1"/>
+          <p:nvPr/>
+        </p:nvSpPr>
+        <p:spPr>
+          <a:xfrm>
+            <a:off x="457200" y="6400800"/>
+            <a:ext cx="4572000" cy="365760"/>
+          </a:xfrm>
+          <a:prstGeom prst="rect">
+            <a:avLst/>
+          </a:prstGeom>
+          <a:noFill/>
+        </p:spPr>
+        <p:txBody>
+          <a:bodyPr wrap="square">
+            <a:spAutoFit/>
+          </a:bodyPr>
+          <a:lstStyle/>
+          <a:p>
+            <a:pPr algn="l">
+              <a:defRPr sz="1000" b="0">
+                <a:solidFill>
+                  <a:srgbClr val="6B7B96"/>
+                </a:solidFill>
+                <a:latin typeface="Calibri"/>
+              </a:defRPr>
+            </a:pPr>
+            <a:r>
+              <a:t>AETHERIX — Interplanetary Communication Network</a:t>
+            </a:r>
+          </a:p>
+        </p:txBody>
+      </p:sp>
+      <p:sp>
+        <p:nvSpPr>
+          <p:cNvPr id="16" name="TextBox 15"/>
+          <p:cNvSpPr txBox="1"/>
+          <p:nvPr/>
+        </p:nvSpPr>
+        <p:spPr>
+          <a:xfrm>
+            <a:off x="10058400" y="6400800"/>
+            <a:ext cx="1828800" cy="365760"/>
+          </a:xfrm>
+          <a:prstGeom prst="rect">
+            <a:avLst/>
+          </a:prstGeom>
+          <a:noFill/>
+        </p:spPr>
+        <p:txBody>
+          <a:bodyPr wrap="square">
+            <a:spAutoFit/>
+          </a:bodyPr>
+          <a:lstStyle/>
+          <a:p>
+            <a:pPr algn="r">
+              <a:defRPr sz="1000" b="0">
+                <a:solidFill>
+                  <a:srgbClr val="6B7B96"/>
+                </a:solidFill>
+                <a:latin typeface="Calibri"/>
+              </a:defRPr>
+            </a:pPr>
+            <a:r>
+              <a:t>32 / 33</a:t>
+            </a:r>
+          </a:p>
+        </p:txBody>
+      </p:sp>
+    </p:spTree>
+  </p:cSld>
+  <p:transition spd="med" advClick="1">
+    <p:fade/>
+  </p:transition>
+  <p:clrMapOvr>
+    <a:masterClrMapping/>
+  </p:clrMapOvr>
+</p:sld>
+</file>
+
+<file path=ppt/slides/slide33.xml><?xml version="1.0" encoding="utf-8"?>
+<p:sld xmlns:a="http://schemas.openxmlformats.org/drawingml/2006/main" xmlns:p="http://schemas.openxmlformats.org/presentationml/2006/main" xmlns:r="http://schemas.openxmlformats.org/officeDocument/2006/relationships">
+  <p:cSld>
+    <p:bg>
+      <p:bgPr>
+        <a:solidFill>
+          <a:srgbClr val="0B0E1A"/>
+        </a:solidFill>
+        <a:effectLst/>
+      </p:bgPr>
+    </p:bg>
+    <p:spTree>
+      <p:nvGrpSpPr>
+        <p:cNvPr id="1" name=""/>
+        <p:cNvGrpSpPr/>
+        <p:nvPr/>
+      </p:nvGrpSpPr>
+      <p:grpSpPr/>
+      <p:sp>
+        <p:nvSpPr>
           <p:cNvPr id="2" name="Rectangle 1"/>
           <p:cNvSpPr/>
           <p:nvPr/>
@@ -25942,7 +26426,7 @@
               </a:defRPr>
             </a:pPr>
             <a:r>
-              <a:t>4 / 31</a:t>
+              <a:t>4 / 33</a:t>
             </a:r>
           </a:p>
         </p:txBody>
@@ -27580,7 +28064,7 @@
               </a:defRPr>
             </a:pPr>
             <a:r>
-              <a:t>5 / 31</a:t>
+              <a:t>5 / 33</a:t>
             </a:r>
           </a:p>
         </p:txBody>
@@ -29235,7 +29719,7 @@
               </a:defRPr>
             </a:pPr>
             <a:r>
-              <a:t>6 / 31</a:t>
+              <a:t>6 / 33</a:t>
             </a:r>
           </a:p>
         </p:txBody>
@@ -30683,7 +31167,7 @@
               </a:defRPr>
             </a:pPr>
             <a:r>
-              <a:t>7 / 31</a:t>
+              <a:t>7 / 33</a:t>
             </a:r>
           </a:p>
         </p:txBody>
@@ -30960,7 +31444,7 @@
               </a:defRPr>
             </a:pPr>
             <a:r>
-              <a:t>8 / 31</a:t>
+              <a:t>8 / 33</a:t>
             </a:r>
           </a:p>
         </p:txBody>
@@ -33310,7 +33794,7 @@
               </a:defRPr>
             </a:pPr>
             <a:r>
-              <a:t>9 / 31</a:t>
+              <a:t>9 / 33</a:t>
             </a:r>
           </a:p>
         </p:txBody>
